--- a/content/05-teaching-resources/slides/specialism/13-testing-a-software-solution.pptx
+++ b/content/05-teaching-resources/slides/specialism/13-testing-a-software-solution.pptx
@@ -14,6 +14,12 @@
     <p:sldId id="262" r:id="rId14"/>
     <p:sldId id="263" r:id="rId15"/>
     <p:sldId id="264" r:id="rId16"/>
+    <p:sldId id="265" r:id="rId17"/>
+    <p:sldId id="266" r:id="rId18"/>
+    <p:sldId id="267" r:id="rId19"/>
+    <p:sldId id="268" r:id="rId20"/>
+    <p:sldId id="269" r:id="rId21"/>
+    <p:sldId id="270" r:id="rId22"/>
   </p:sldIdLst>
   <p:sldSz cx="12191695" cy="6858000" type="screen4x3"/>
   <p:notesSz cx="6858000" cy="9144000"/>
@@ -510,7 +516,22 @@
           <a:lstStyle/>
           <a:p>
             <a:r>
-              <a:t>Each test also needs a purpose, pre-requisites and an expected result. Afterwards, record actual results, changes made, and any re-tests or regression tests.</a:t>
+              <a:t>Answers:</a:t>
+            </a:r>
+          </a:p>
+          <a:p>
+            <a:r>
+              <a:t>1. A quick check that the main features work.</a:t>
+            </a:r>
+          </a:p>
+          <a:p>
+            <a:r>
+              <a:t>2. Checking code for problems without running it.</a:t>
+            </a:r>
+          </a:p>
+          <a:p>
+            <a:r>
+              <a:t>3. E.g. browser compatibility, loading time, responsiveness.</a:t>
             </a:r>
           </a:p>
         </p:txBody>
@@ -580,7 +601,22 @@
           <a:lstStyle/>
           <a:p>
             <a:r>
-              <a:t>Give students a few minutes to answer on mini whiteboards or paper, then reveal the answers on the next slide.</a:t>
+              <a:t>Answers:</a:t>
+            </a:r>
+          </a:p>
+          <a:p>
+            <a:r>
+              <a:t>1. Alpha is internal; beta uses real external users.</a:t>
+            </a:r>
+          </a:p>
+          <a:p>
+            <a:r>
+              <a:t>2. Knowledge of the code's structure.</a:t>
+            </a:r>
+          </a:p>
+          <a:p>
+            <a:r>
+              <a:t>3. That the software meets the client's requirements.</a:t>
             </a:r>
           </a:p>
         </p:txBody>
@@ -650,7 +686,7 @@
           <a:lstStyle/>
           <a:p>
             <a:r>
-              <a:t>Talk through any answers the class found difficult.</a:t>
+              <a:t>Each test also needs a purpose, pre-requisites and an expected result. Afterwards, record actual results, changes made, and any re-tests or regression tests.</a:t>
             </a:r>
           </a:p>
         </p:txBody>
@@ -676,6 +712,231 @@
 </file>
 
 <file path=ppt/notesSlides/notesSlide4.xml><?xml version="1.0" encoding="utf-8"?>
+<p:notes xmlns:a="http://schemas.openxmlformats.org/drawingml/2006/main" xmlns:p="http://schemas.openxmlformats.org/presentationml/2006/main" xmlns:r="http://schemas.openxmlformats.org/officeDocument/2006/relationships">
+  <p:cSld>
+    <p:spTree>
+      <p:nvGrpSpPr>
+        <p:cNvPr id="1" name=""/>
+        <p:cNvGrpSpPr/>
+        <p:nvPr/>
+      </p:nvGrpSpPr>
+      <p:grpSpPr>
+        <a:xfrm>
+          <a:off x="0" y="0"/>
+          <a:ext cx="0" cy="0"/>
+          <a:chOff x="0" y="0"/>
+          <a:chExt cx="0" cy="0"/>
+        </a:xfrm>
+      </p:grpSpPr>
+      <p:sp>
+        <p:nvSpPr>
+          <p:cNvPr id="2" name="Slide Image Placeholder 1"/>
+          <p:cNvSpPr>
+            <a:spLocks noGrp="1"/>
+          </p:cNvSpPr>
+          <p:nvPr>
+            <p:ph type="sldImg" idx="2"/>
+          </p:nvPr>
+        </p:nvSpPr>
+        <p:spPr/>
+      </p:sp>
+      <p:sp>
+        <p:nvSpPr>
+          <p:cNvPr id="3" name="Notes Placeholder 2"/>
+          <p:cNvSpPr>
+            <a:spLocks noGrp="1"/>
+          </p:cNvSpPr>
+          <p:nvPr>
+            <p:ph type="body" idx="3" sz="quarter"/>
+          </p:nvPr>
+        </p:nvSpPr>
+        <p:spPr/>
+        <p:txBody>
+          <a:bodyPr/>
+          <a:lstStyle/>
+          <a:p>
+            <a:r>
+              <a:t>Answers:</a:t>
+            </a:r>
+          </a:p>
+          <a:p>
+            <a:r>
+              <a:t>1. 0 or 101.</a:t>
+            </a:r>
+          </a:p>
+          <a:p>
+            <a:r>
+              <a:t>2. Something that must be set up before a test can run.</a:t>
+            </a:r>
+          </a:p>
+          <a:p>
+            <a:r>
+              <a:t>3. The change made and the re-test or regression test.</a:t>
+            </a:r>
+          </a:p>
+        </p:txBody>
+      </p:sp>
+      <p:sp>
+        <p:nvSpPr>
+          <p:cNvPr id="4" name="Slide Number Placeholder 3"/>
+          <p:cNvSpPr>
+            <a:spLocks noGrp="1"/>
+          </p:cNvSpPr>
+          <p:nvPr>
+            <p:ph type="sldNum" idx="5" sz="quarter"/>
+          </p:nvPr>
+        </p:nvSpPr>
+        <p:spPr/>
+      </p:sp>
+    </p:spTree>
+  </p:cSld>
+  <p:clrMapOvr>
+    <a:masterClrMapping/>
+  </p:clrMapOvr>
+</p:notes>
+</file>
+
+<file path=ppt/notesSlides/notesSlide5.xml><?xml version="1.0" encoding="utf-8"?>
+<p:notes xmlns:a="http://schemas.openxmlformats.org/drawingml/2006/main" xmlns:p="http://schemas.openxmlformats.org/presentationml/2006/main" xmlns:r="http://schemas.openxmlformats.org/officeDocument/2006/relationships">
+  <p:cSld>
+    <p:spTree>
+      <p:nvGrpSpPr>
+        <p:cNvPr id="1" name=""/>
+        <p:cNvGrpSpPr/>
+        <p:nvPr/>
+      </p:nvGrpSpPr>
+      <p:grpSpPr>
+        <a:xfrm>
+          <a:off x="0" y="0"/>
+          <a:ext cx="0" cy="0"/>
+          <a:chOff x="0" y="0"/>
+          <a:chExt cx="0" cy="0"/>
+        </a:xfrm>
+      </p:grpSpPr>
+      <p:sp>
+        <p:nvSpPr>
+          <p:cNvPr id="2" name="Slide Image Placeholder 1"/>
+          <p:cNvSpPr>
+            <a:spLocks noGrp="1"/>
+          </p:cNvSpPr>
+          <p:nvPr>
+            <p:ph type="sldImg" idx="2"/>
+          </p:nvPr>
+        </p:nvSpPr>
+        <p:spPr/>
+      </p:sp>
+      <p:sp>
+        <p:nvSpPr>
+          <p:cNvPr id="3" name="Notes Placeholder 2"/>
+          <p:cNvSpPr>
+            <a:spLocks noGrp="1"/>
+          </p:cNvSpPr>
+          <p:nvPr>
+            <p:ph type="body" idx="3" sz="quarter"/>
+          </p:nvPr>
+        </p:nvSpPr>
+        <p:spPr/>
+        <p:txBody>
+          <a:bodyPr/>
+          <a:lstStyle/>
+          <a:p>
+            <a:r>
+              <a:t>Give students a few minutes to answer on mini whiteboards or paper, then reveal the answers on the next slide.</a:t>
+            </a:r>
+          </a:p>
+        </p:txBody>
+      </p:sp>
+      <p:sp>
+        <p:nvSpPr>
+          <p:cNvPr id="4" name="Slide Number Placeholder 3"/>
+          <p:cNvSpPr>
+            <a:spLocks noGrp="1"/>
+          </p:cNvSpPr>
+          <p:nvPr>
+            <p:ph type="sldNum" idx="5" sz="quarter"/>
+          </p:nvPr>
+        </p:nvSpPr>
+        <p:spPr/>
+      </p:sp>
+    </p:spTree>
+  </p:cSld>
+  <p:clrMapOvr>
+    <a:masterClrMapping/>
+  </p:clrMapOvr>
+</p:notes>
+</file>
+
+<file path=ppt/notesSlides/notesSlide6.xml><?xml version="1.0" encoding="utf-8"?>
+<p:notes xmlns:a="http://schemas.openxmlformats.org/drawingml/2006/main" xmlns:p="http://schemas.openxmlformats.org/presentationml/2006/main" xmlns:r="http://schemas.openxmlformats.org/officeDocument/2006/relationships">
+  <p:cSld>
+    <p:spTree>
+      <p:nvGrpSpPr>
+        <p:cNvPr id="1" name=""/>
+        <p:cNvGrpSpPr/>
+        <p:nvPr/>
+      </p:nvGrpSpPr>
+      <p:grpSpPr>
+        <a:xfrm>
+          <a:off x="0" y="0"/>
+          <a:ext cx="0" cy="0"/>
+          <a:chOff x="0" y="0"/>
+          <a:chExt cx="0" cy="0"/>
+        </a:xfrm>
+      </p:grpSpPr>
+      <p:sp>
+        <p:nvSpPr>
+          <p:cNvPr id="2" name="Slide Image Placeholder 1"/>
+          <p:cNvSpPr>
+            <a:spLocks noGrp="1"/>
+          </p:cNvSpPr>
+          <p:nvPr>
+            <p:ph type="sldImg" idx="2"/>
+          </p:nvPr>
+        </p:nvSpPr>
+        <p:spPr/>
+      </p:sp>
+      <p:sp>
+        <p:nvSpPr>
+          <p:cNvPr id="3" name="Notes Placeholder 2"/>
+          <p:cNvSpPr>
+            <a:spLocks noGrp="1"/>
+          </p:cNvSpPr>
+          <p:nvPr>
+            <p:ph type="body" idx="3" sz="quarter"/>
+          </p:nvPr>
+        </p:nvSpPr>
+        <p:spPr/>
+        <p:txBody>
+          <a:bodyPr/>
+          <a:lstStyle/>
+          <a:p>
+            <a:r>
+              <a:t>Talk through any answers the class found difficult.</a:t>
+            </a:r>
+          </a:p>
+        </p:txBody>
+      </p:sp>
+      <p:sp>
+        <p:nvSpPr>
+          <p:cNvPr id="4" name="Slide Number Placeholder 3"/>
+          <p:cNvSpPr>
+            <a:spLocks noGrp="1"/>
+          </p:cNvSpPr>
+          <p:nvPr>
+            <p:ph type="sldNum" idx="5" sz="quarter"/>
+          </p:nvPr>
+        </p:nvSpPr>
+        <p:spPr/>
+      </p:sp>
+    </p:spTree>
+  </p:cSld>
+  <p:clrMapOvr>
+    <a:masterClrMapping/>
+  </p:clrMapOvr>
+</p:notes>
+</file>
+
+<file path=ppt/notesSlides/notesSlide7.xml><?xml version="1.0" encoding="utf-8"?>
 <p:notes xmlns:a="http://schemas.openxmlformats.org/drawingml/2006/main" xmlns:p="http://schemas.openxmlformats.org/presentationml/2006/main" xmlns:r="http://schemas.openxmlformats.org/officeDocument/2006/relationships">
   <p:cSld>
     <p:spTree>
@@ -4045,6 +4306,3777 @@
 </p:sld>
 </file>
 
+<file path=ppt/slides/slide10.xml><?xml version="1.0" encoding="utf-8"?>
+<p:sld xmlns:a="http://schemas.openxmlformats.org/drawingml/2006/main" xmlns:p="http://schemas.openxmlformats.org/presentationml/2006/main" xmlns:r="http://schemas.openxmlformats.org/officeDocument/2006/relationships">
+  <p:cSld>
+    <p:bg>
+      <p:bgPr>
+        <a:solidFill>
+          <a:srgbClr val="FFFFFF"/>
+        </a:solidFill>
+        <a:effectLst/>
+      </p:bgPr>
+    </p:bg>
+    <p:spTree>
+      <p:nvGrpSpPr>
+        <p:cNvPr id="1" name=""/>
+        <p:cNvGrpSpPr/>
+        <p:nvPr/>
+      </p:nvGrpSpPr>
+      <p:grpSpPr/>
+      <p:sp>
+        <p:nvSpPr>
+          <p:cNvPr id="2" name="TextBox 1"/>
+          <p:cNvSpPr txBox="1"/>
+          <p:nvPr/>
+        </p:nvSpPr>
+        <p:spPr>
+          <a:xfrm>
+            <a:off x="548640" y="320040"/>
+            <a:ext cx="11094415" cy="274320"/>
+          </a:xfrm>
+          <a:prstGeom prst="rect">
+            <a:avLst/>
+          </a:prstGeom>
+          <a:noFill/>
+        </p:spPr>
+        <p:txBody>
+          <a:bodyPr wrap="square" anchor="t" lIns="0" rIns="0" tIns="0" bIns="0"/>
+          <a:lstStyle/>
+          <a:p>
+            <a:pPr algn="l"/>
+            <a:r>
+              <a:rPr sz="1100" b="1" i="0">
+                <a:solidFill>
+                  <a:srgbClr val="54595D"/>
+                </a:solidFill>
+                <a:latin typeface="Calibri"/>
+              </a:rPr>
+              <a:t>OCCUPATIONAL SPECIALISM  ·  Specialism Content Area 7</a:t>
+            </a:r>
+          </a:p>
+        </p:txBody>
+      </p:sp>
+      <p:sp>
+        <p:nvSpPr>
+          <p:cNvPr id="3" name="TextBox 2"/>
+          <p:cNvSpPr txBox="1"/>
+          <p:nvPr/>
+        </p:nvSpPr>
+        <p:spPr>
+          <a:xfrm>
+            <a:off x="548640" y="566928"/>
+            <a:ext cx="11094415" cy="822960"/>
+          </a:xfrm>
+          <a:prstGeom prst="rect">
+            <a:avLst/>
+          </a:prstGeom>
+          <a:noFill/>
+        </p:spPr>
+        <p:txBody>
+          <a:bodyPr wrap="square" anchor="ctr" lIns="0" rIns="0" tIns="0" bIns="0"/>
+          <a:lstStyle/>
+          <a:p>
+            <a:pPr algn="l"/>
+            <a:r>
+              <a:rPr sz="3200" b="1" i="0">
+                <a:solidFill>
+                  <a:srgbClr val="03306E"/>
+                </a:solidFill>
+                <a:latin typeface="Cambria"/>
+              </a:rPr>
+              <a:t>Test data</a:t>
+            </a:r>
+          </a:p>
+        </p:txBody>
+      </p:sp>
+      <p:sp>
+        <p:nvSpPr>
+          <p:cNvPr id="4" name="TextBox 3"/>
+          <p:cNvSpPr txBox="1"/>
+          <p:nvPr/>
+        </p:nvSpPr>
+        <p:spPr>
+          <a:xfrm>
+            <a:off x="548640" y="6446520"/>
+            <a:ext cx="8229600" cy="274320"/>
+          </a:xfrm>
+          <a:prstGeom prst="rect">
+            <a:avLst/>
+          </a:prstGeom>
+          <a:noFill/>
+        </p:spPr>
+        <p:txBody>
+          <a:bodyPr wrap="square" anchor="t" lIns="0" rIns="0" tIns="0" bIns="0"/>
+          <a:lstStyle/>
+          <a:p>
+            <a:pPr algn="l"/>
+            <a:r>
+              <a:rPr sz="1000" b="0" i="0">
+                <a:solidFill>
+                  <a:srgbClr val="54595D"/>
+                </a:solidFill>
+                <a:latin typeface="Calibri"/>
+              </a:rPr>
+              <a:t>Digital Software Development T Level  ·  Testing a Software Solution</a:t>
+            </a:r>
+          </a:p>
+        </p:txBody>
+      </p:sp>
+      <p:sp>
+        <p:nvSpPr>
+          <p:cNvPr id="5" name="TextBox 4"/>
+          <p:cNvSpPr txBox="1"/>
+          <p:nvPr/>
+        </p:nvSpPr>
+        <p:spPr>
+          <a:xfrm>
+            <a:off x="10728655" y="6446520"/>
+            <a:ext cx="914400" cy="274320"/>
+          </a:xfrm>
+          <a:prstGeom prst="rect">
+            <a:avLst/>
+          </a:prstGeom>
+          <a:noFill/>
+        </p:spPr>
+        <p:txBody>
+          <a:bodyPr wrap="square" anchor="t" lIns="0" rIns="0" tIns="0" bIns="0"/>
+          <a:lstStyle/>
+          <a:p>
+            <a:pPr algn="r"/>
+            <a:r>
+              <a:rPr sz="1000" b="0" i="0">
+                <a:solidFill>
+                  <a:srgbClr val="54595D"/>
+                </a:solidFill>
+                <a:latin typeface="Calibri"/>
+              </a:rPr>
+              <a:t>10</a:t>
+            </a:r>
+          </a:p>
+        </p:txBody>
+      </p:sp>
+      <p:sp>
+        <p:nvSpPr>
+          <p:cNvPr id="6" name="Rounded Rectangle 5"/>
+          <p:cNvSpPr/>
+          <p:nvPr/>
+        </p:nvSpPr>
+        <p:spPr>
+          <a:xfrm>
+            <a:off x="548640" y="1600200"/>
+            <a:ext cx="3515258" cy="2148840"/>
+          </a:xfrm>
+          <a:prstGeom prst="roundRect">
+            <a:avLst>
+              <a:gd name="adj" fmla="val 6000"/>
+            </a:avLst>
+          </a:prstGeom>
+          <a:solidFill>
+            <a:srgbClr val="EAF3FF"/>
+          </a:solidFill>
+          <a:ln>
+            <a:noFill/>
+          </a:ln>
+          <a:effectLst/>
+        </p:spPr>
+        <p:style>
+          <a:lnRef idx="1">
+            <a:schemeClr val="accent1"/>
+          </a:lnRef>
+          <a:fillRef idx="3">
+            <a:schemeClr val="accent1"/>
+          </a:fillRef>
+          <a:effectRef idx="2">
+            <a:schemeClr val="accent1"/>
+          </a:effectRef>
+          <a:fontRef idx="minor">
+            <a:schemeClr val="lt1"/>
+          </a:fontRef>
+        </p:style>
+        <p:txBody>
+          <a:bodyPr rtlCol="0" anchor="ctr"/>
+          <a:lstStyle/>
+          <a:p/>
+        </p:txBody>
+      </p:sp>
+      <p:sp>
+        <p:nvSpPr>
+          <p:cNvPr id="7" name="Oval 6"/>
+          <p:cNvSpPr/>
+          <p:nvPr/>
+        </p:nvSpPr>
+        <p:spPr>
+          <a:xfrm>
+            <a:off x="777240" y="1828800"/>
+            <a:ext cx="457200" cy="457200"/>
+          </a:xfrm>
+          <a:prstGeom prst="ellipse">
+            <a:avLst/>
+          </a:prstGeom>
+          <a:solidFill>
+            <a:srgbClr val="33C17A"/>
+          </a:solidFill>
+          <a:ln>
+            <a:noFill/>
+          </a:ln>
+          <a:effectLst/>
+        </p:spPr>
+        <p:style>
+          <a:lnRef idx="1">
+            <a:schemeClr val="accent1"/>
+          </a:lnRef>
+          <a:fillRef idx="3">
+            <a:schemeClr val="accent1"/>
+          </a:fillRef>
+          <a:effectRef idx="2">
+            <a:schemeClr val="accent1"/>
+          </a:effectRef>
+          <a:fontRef idx="minor">
+            <a:schemeClr val="lt1"/>
+          </a:fontRef>
+        </p:style>
+        <p:txBody>
+          <a:bodyPr rtlCol="0" anchor="ctr" lIns="0" rIns="0" tIns="0" bIns="0"/>
+          <a:lstStyle/>
+          <a:p>
+            <a:pPr algn="ctr"/>
+            <a:r>
+              <a:rPr sz="1500" b="1">
+                <a:solidFill>
+                  <a:srgbClr val="202122"/>
+                </a:solidFill>
+                <a:latin typeface="Calibri"/>
+              </a:rPr>
+              <a:t>1</a:t>
+            </a:r>
+          </a:p>
+        </p:txBody>
+      </p:sp>
+      <p:sp>
+        <p:nvSpPr>
+          <p:cNvPr id="8" name="TextBox 7"/>
+          <p:cNvSpPr txBox="1"/>
+          <p:nvPr/>
+        </p:nvSpPr>
+        <p:spPr>
+          <a:xfrm>
+            <a:off x="1371600" y="1801368"/>
+            <a:ext cx="2509418" cy="512064"/>
+          </a:xfrm>
+          <a:prstGeom prst="rect">
+            <a:avLst/>
+          </a:prstGeom>
+          <a:noFill/>
+        </p:spPr>
+        <p:txBody>
+          <a:bodyPr wrap="square" anchor="ctr" lIns="0" rIns="0" tIns="0" bIns="0"/>
+          <a:lstStyle/>
+          <a:p>
+            <a:pPr algn="l"/>
+            <a:r>
+              <a:rPr sz="1900" b="1" i="0">
+                <a:solidFill>
+                  <a:srgbClr val="03306E"/>
+                </a:solidFill>
+                <a:latin typeface="Calibri"/>
+              </a:rPr>
+              <a:t>Valid</a:t>
+            </a:r>
+          </a:p>
+        </p:txBody>
+      </p:sp>
+      <p:sp>
+        <p:nvSpPr>
+          <p:cNvPr id="9" name="TextBox 8"/>
+          <p:cNvSpPr txBox="1"/>
+          <p:nvPr/>
+        </p:nvSpPr>
+        <p:spPr>
+          <a:xfrm>
+            <a:off x="777240" y="2468880"/>
+            <a:ext cx="3058058" cy="1143000"/>
+          </a:xfrm>
+          <a:prstGeom prst="rect">
+            <a:avLst/>
+          </a:prstGeom>
+          <a:noFill/>
+        </p:spPr>
+        <p:txBody>
+          <a:bodyPr wrap="square" anchor="t" lIns="0" rIns="0" tIns="0" bIns="0"/>
+          <a:lstStyle/>
+          <a:p>
+            <a:pPr algn="l"/>
+            <a:r>
+              <a:rPr sz="2000" b="0" i="0">
+                <a:solidFill>
+                  <a:srgbClr val="202122"/>
+                </a:solidFill>
+                <a:latin typeface="Calibri"/>
+              </a:rPr>
+              <a:t>Normal, accepted data.</a:t>
+            </a:r>
+          </a:p>
+        </p:txBody>
+      </p:sp>
+      <p:sp>
+        <p:nvSpPr>
+          <p:cNvPr id="10" name="Rounded Rectangle 9"/>
+          <p:cNvSpPr/>
+          <p:nvPr/>
+        </p:nvSpPr>
+        <p:spPr>
+          <a:xfrm>
+            <a:off x="4338218" y="1600200"/>
+            <a:ext cx="3515258" cy="2148840"/>
+          </a:xfrm>
+          <a:prstGeom prst="roundRect">
+            <a:avLst>
+              <a:gd name="adj" fmla="val 6000"/>
+            </a:avLst>
+          </a:prstGeom>
+          <a:solidFill>
+            <a:srgbClr val="EAF3FF"/>
+          </a:solidFill>
+          <a:ln>
+            <a:noFill/>
+          </a:ln>
+          <a:effectLst/>
+        </p:spPr>
+        <p:style>
+          <a:lnRef idx="1">
+            <a:schemeClr val="accent1"/>
+          </a:lnRef>
+          <a:fillRef idx="3">
+            <a:schemeClr val="accent1"/>
+          </a:fillRef>
+          <a:effectRef idx="2">
+            <a:schemeClr val="accent1"/>
+          </a:effectRef>
+          <a:fontRef idx="minor">
+            <a:schemeClr val="lt1"/>
+          </a:fontRef>
+        </p:style>
+        <p:txBody>
+          <a:bodyPr rtlCol="0" anchor="ctr"/>
+          <a:lstStyle/>
+          <a:p/>
+        </p:txBody>
+      </p:sp>
+      <p:sp>
+        <p:nvSpPr>
+          <p:cNvPr id="11" name="Oval 10"/>
+          <p:cNvSpPr/>
+          <p:nvPr/>
+        </p:nvSpPr>
+        <p:spPr>
+          <a:xfrm>
+            <a:off x="4566818" y="1828800"/>
+            <a:ext cx="457200" cy="457200"/>
+          </a:xfrm>
+          <a:prstGeom prst="ellipse">
+            <a:avLst/>
+          </a:prstGeom>
+          <a:solidFill>
+            <a:srgbClr val="33C17A"/>
+          </a:solidFill>
+          <a:ln>
+            <a:noFill/>
+          </a:ln>
+          <a:effectLst/>
+        </p:spPr>
+        <p:style>
+          <a:lnRef idx="1">
+            <a:schemeClr val="accent1"/>
+          </a:lnRef>
+          <a:fillRef idx="3">
+            <a:schemeClr val="accent1"/>
+          </a:fillRef>
+          <a:effectRef idx="2">
+            <a:schemeClr val="accent1"/>
+          </a:effectRef>
+          <a:fontRef idx="minor">
+            <a:schemeClr val="lt1"/>
+          </a:fontRef>
+        </p:style>
+        <p:txBody>
+          <a:bodyPr rtlCol="0" anchor="ctr" lIns="0" rIns="0" tIns="0" bIns="0"/>
+          <a:lstStyle/>
+          <a:p>
+            <a:pPr algn="ctr"/>
+            <a:r>
+              <a:rPr sz="1500" b="1">
+                <a:solidFill>
+                  <a:srgbClr val="202122"/>
+                </a:solidFill>
+                <a:latin typeface="Calibri"/>
+              </a:rPr>
+              <a:t>2</a:t>
+            </a:r>
+          </a:p>
+        </p:txBody>
+      </p:sp>
+      <p:sp>
+        <p:nvSpPr>
+          <p:cNvPr id="12" name="TextBox 11"/>
+          <p:cNvSpPr txBox="1"/>
+          <p:nvPr/>
+        </p:nvSpPr>
+        <p:spPr>
+          <a:xfrm>
+            <a:off x="5161178" y="1801368"/>
+            <a:ext cx="2509418" cy="512064"/>
+          </a:xfrm>
+          <a:prstGeom prst="rect">
+            <a:avLst/>
+          </a:prstGeom>
+          <a:noFill/>
+        </p:spPr>
+        <p:txBody>
+          <a:bodyPr wrap="square" anchor="ctr" lIns="0" rIns="0" tIns="0" bIns="0"/>
+          <a:lstStyle/>
+          <a:p>
+            <a:pPr algn="l"/>
+            <a:r>
+              <a:rPr sz="1900" b="1" i="0">
+                <a:solidFill>
+                  <a:srgbClr val="03306E"/>
+                </a:solidFill>
+                <a:latin typeface="Calibri"/>
+              </a:rPr>
+              <a:t>Invalid</a:t>
+            </a:r>
+          </a:p>
+        </p:txBody>
+      </p:sp>
+      <p:sp>
+        <p:nvSpPr>
+          <p:cNvPr id="13" name="TextBox 12"/>
+          <p:cNvSpPr txBox="1"/>
+          <p:nvPr/>
+        </p:nvSpPr>
+        <p:spPr>
+          <a:xfrm>
+            <a:off x="4566818" y="2468880"/>
+            <a:ext cx="3058058" cy="1143000"/>
+          </a:xfrm>
+          <a:prstGeom prst="rect">
+            <a:avLst/>
+          </a:prstGeom>
+          <a:noFill/>
+        </p:spPr>
+        <p:txBody>
+          <a:bodyPr wrap="square" anchor="t" lIns="0" rIns="0" tIns="0" bIns="0"/>
+          <a:lstStyle/>
+          <a:p>
+            <a:pPr algn="l"/>
+            <a:r>
+              <a:rPr sz="2000" b="0" i="0">
+                <a:solidFill>
+                  <a:srgbClr val="202122"/>
+                </a:solidFill>
+                <a:latin typeface="Calibri"/>
+              </a:rPr>
+              <a:t>Should be rejected.</a:t>
+            </a:r>
+          </a:p>
+        </p:txBody>
+      </p:sp>
+      <p:sp>
+        <p:nvSpPr>
+          <p:cNvPr id="14" name="Rounded Rectangle 13"/>
+          <p:cNvSpPr/>
+          <p:nvPr/>
+        </p:nvSpPr>
+        <p:spPr>
+          <a:xfrm>
+            <a:off x="8127796" y="1600200"/>
+            <a:ext cx="3515258" cy="2148840"/>
+          </a:xfrm>
+          <a:prstGeom prst="roundRect">
+            <a:avLst>
+              <a:gd name="adj" fmla="val 6000"/>
+            </a:avLst>
+          </a:prstGeom>
+          <a:solidFill>
+            <a:srgbClr val="EAF3FF"/>
+          </a:solidFill>
+          <a:ln>
+            <a:noFill/>
+          </a:ln>
+          <a:effectLst/>
+        </p:spPr>
+        <p:style>
+          <a:lnRef idx="1">
+            <a:schemeClr val="accent1"/>
+          </a:lnRef>
+          <a:fillRef idx="3">
+            <a:schemeClr val="accent1"/>
+          </a:fillRef>
+          <a:effectRef idx="2">
+            <a:schemeClr val="accent1"/>
+          </a:effectRef>
+          <a:fontRef idx="minor">
+            <a:schemeClr val="lt1"/>
+          </a:fontRef>
+        </p:style>
+        <p:txBody>
+          <a:bodyPr rtlCol="0" anchor="ctr"/>
+          <a:lstStyle/>
+          <a:p/>
+        </p:txBody>
+      </p:sp>
+      <p:sp>
+        <p:nvSpPr>
+          <p:cNvPr id="15" name="Oval 14"/>
+          <p:cNvSpPr/>
+          <p:nvPr/>
+        </p:nvSpPr>
+        <p:spPr>
+          <a:xfrm>
+            <a:off x="8356396" y="1828800"/>
+            <a:ext cx="457200" cy="457200"/>
+          </a:xfrm>
+          <a:prstGeom prst="ellipse">
+            <a:avLst/>
+          </a:prstGeom>
+          <a:solidFill>
+            <a:srgbClr val="33C17A"/>
+          </a:solidFill>
+          <a:ln>
+            <a:noFill/>
+          </a:ln>
+          <a:effectLst/>
+        </p:spPr>
+        <p:style>
+          <a:lnRef idx="1">
+            <a:schemeClr val="accent1"/>
+          </a:lnRef>
+          <a:fillRef idx="3">
+            <a:schemeClr val="accent1"/>
+          </a:fillRef>
+          <a:effectRef idx="2">
+            <a:schemeClr val="accent1"/>
+          </a:effectRef>
+          <a:fontRef idx="minor">
+            <a:schemeClr val="lt1"/>
+          </a:fontRef>
+        </p:style>
+        <p:txBody>
+          <a:bodyPr rtlCol="0" anchor="ctr" lIns="0" rIns="0" tIns="0" bIns="0"/>
+          <a:lstStyle/>
+          <a:p>
+            <a:pPr algn="ctr"/>
+            <a:r>
+              <a:rPr sz="1500" b="1">
+                <a:solidFill>
+                  <a:srgbClr val="202122"/>
+                </a:solidFill>
+                <a:latin typeface="Calibri"/>
+              </a:rPr>
+              <a:t>3</a:t>
+            </a:r>
+          </a:p>
+        </p:txBody>
+      </p:sp>
+      <p:sp>
+        <p:nvSpPr>
+          <p:cNvPr id="16" name="TextBox 15"/>
+          <p:cNvSpPr txBox="1"/>
+          <p:nvPr/>
+        </p:nvSpPr>
+        <p:spPr>
+          <a:xfrm>
+            <a:off x="8950756" y="1801368"/>
+            <a:ext cx="2509418" cy="512064"/>
+          </a:xfrm>
+          <a:prstGeom prst="rect">
+            <a:avLst/>
+          </a:prstGeom>
+          <a:noFill/>
+        </p:spPr>
+        <p:txBody>
+          <a:bodyPr wrap="square" anchor="ctr" lIns="0" rIns="0" tIns="0" bIns="0"/>
+          <a:lstStyle/>
+          <a:p>
+            <a:pPr algn="l"/>
+            <a:r>
+              <a:rPr sz="1900" b="1" i="0">
+                <a:solidFill>
+                  <a:srgbClr val="03306E"/>
+                </a:solidFill>
+                <a:latin typeface="Calibri"/>
+              </a:rPr>
+              <a:t>Valid extreme</a:t>
+            </a:r>
+          </a:p>
+        </p:txBody>
+      </p:sp>
+      <p:sp>
+        <p:nvSpPr>
+          <p:cNvPr id="17" name="TextBox 16"/>
+          <p:cNvSpPr txBox="1"/>
+          <p:nvPr/>
+        </p:nvSpPr>
+        <p:spPr>
+          <a:xfrm>
+            <a:off x="8356396" y="2468880"/>
+            <a:ext cx="3058058" cy="1143000"/>
+          </a:xfrm>
+          <a:prstGeom prst="rect">
+            <a:avLst/>
+          </a:prstGeom>
+          <a:noFill/>
+        </p:spPr>
+        <p:txBody>
+          <a:bodyPr wrap="square" anchor="t" lIns="0" rIns="0" tIns="0" bIns="0"/>
+          <a:lstStyle/>
+          <a:p>
+            <a:pPr algn="l"/>
+            <a:r>
+              <a:rPr sz="2000" b="0" i="0">
+                <a:solidFill>
+                  <a:srgbClr val="202122"/>
+                </a:solidFill>
+                <a:latin typeface="Calibri"/>
+              </a:rPr>
+              <a:t>At the edge but allowed.</a:t>
+            </a:r>
+          </a:p>
+        </p:txBody>
+      </p:sp>
+      <p:sp>
+        <p:nvSpPr>
+          <p:cNvPr id="18" name="Rounded Rectangle 17"/>
+          <p:cNvSpPr/>
+          <p:nvPr/>
+        </p:nvSpPr>
+        <p:spPr>
+          <a:xfrm>
+            <a:off x="548640" y="4023360"/>
+            <a:ext cx="3515258" cy="2148840"/>
+          </a:xfrm>
+          <a:prstGeom prst="roundRect">
+            <a:avLst>
+              <a:gd name="adj" fmla="val 6000"/>
+            </a:avLst>
+          </a:prstGeom>
+          <a:solidFill>
+            <a:srgbClr val="EAF3FF"/>
+          </a:solidFill>
+          <a:ln>
+            <a:noFill/>
+          </a:ln>
+          <a:effectLst/>
+        </p:spPr>
+        <p:style>
+          <a:lnRef idx="1">
+            <a:schemeClr val="accent1"/>
+          </a:lnRef>
+          <a:fillRef idx="3">
+            <a:schemeClr val="accent1"/>
+          </a:fillRef>
+          <a:effectRef idx="2">
+            <a:schemeClr val="accent1"/>
+          </a:effectRef>
+          <a:fontRef idx="minor">
+            <a:schemeClr val="lt1"/>
+          </a:fontRef>
+        </p:style>
+        <p:txBody>
+          <a:bodyPr rtlCol="0" anchor="ctr"/>
+          <a:lstStyle/>
+          <a:p/>
+        </p:txBody>
+      </p:sp>
+      <p:sp>
+        <p:nvSpPr>
+          <p:cNvPr id="19" name="Oval 18"/>
+          <p:cNvSpPr/>
+          <p:nvPr/>
+        </p:nvSpPr>
+        <p:spPr>
+          <a:xfrm>
+            <a:off x="777240" y="4251960"/>
+            <a:ext cx="457200" cy="457200"/>
+          </a:xfrm>
+          <a:prstGeom prst="ellipse">
+            <a:avLst/>
+          </a:prstGeom>
+          <a:solidFill>
+            <a:srgbClr val="33C17A"/>
+          </a:solidFill>
+          <a:ln>
+            <a:noFill/>
+          </a:ln>
+          <a:effectLst/>
+        </p:spPr>
+        <p:style>
+          <a:lnRef idx="1">
+            <a:schemeClr val="accent1"/>
+          </a:lnRef>
+          <a:fillRef idx="3">
+            <a:schemeClr val="accent1"/>
+          </a:fillRef>
+          <a:effectRef idx="2">
+            <a:schemeClr val="accent1"/>
+          </a:effectRef>
+          <a:fontRef idx="minor">
+            <a:schemeClr val="lt1"/>
+          </a:fontRef>
+        </p:style>
+        <p:txBody>
+          <a:bodyPr rtlCol="0" anchor="ctr" lIns="0" rIns="0" tIns="0" bIns="0"/>
+          <a:lstStyle/>
+          <a:p>
+            <a:pPr algn="ctr"/>
+            <a:r>
+              <a:rPr sz="1500" b="1">
+                <a:solidFill>
+                  <a:srgbClr val="202122"/>
+                </a:solidFill>
+                <a:latin typeface="Calibri"/>
+              </a:rPr>
+              <a:t>4</a:t>
+            </a:r>
+          </a:p>
+        </p:txBody>
+      </p:sp>
+      <p:sp>
+        <p:nvSpPr>
+          <p:cNvPr id="20" name="TextBox 19"/>
+          <p:cNvSpPr txBox="1"/>
+          <p:nvPr/>
+        </p:nvSpPr>
+        <p:spPr>
+          <a:xfrm>
+            <a:off x="1371600" y="4224528"/>
+            <a:ext cx="2509418" cy="512064"/>
+          </a:xfrm>
+          <a:prstGeom prst="rect">
+            <a:avLst/>
+          </a:prstGeom>
+          <a:noFill/>
+        </p:spPr>
+        <p:txBody>
+          <a:bodyPr wrap="square" anchor="ctr" lIns="0" rIns="0" tIns="0" bIns="0"/>
+          <a:lstStyle/>
+          <a:p>
+            <a:pPr algn="l"/>
+            <a:r>
+              <a:rPr sz="1900" b="1" i="0">
+                <a:solidFill>
+                  <a:srgbClr val="03306E"/>
+                </a:solidFill>
+                <a:latin typeface="Calibri"/>
+              </a:rPr>
+              <a:t>Invalid extreme</a:t>
+            </a:r>
+          </a:p>
+        </p:txBody>
+      </p:sp>
+      <p:sp>
+        <p:nvSpPr>
+          <p:cNvPr id="21" name="TextBox 20"/>
+          <p:cNvSpPr txBox="1"/>
+          <p:nvPr/>
+        </p:nvSpPr>
+        <p:spPr>
+          <a:xfrm>
+            <a:off x="777240" y="4892040"/>
+            <a:ext cx="3058058" cy="1143000"/>
+          </a:xfrm>
+          <a:prstGeom prst="rect">
+            <a:avLst/>
+          </a:prstGeom>
+          <a:noFill/>
+        </p:spPr>
+        <p:txBody>
+          <a:bodyPr wrap="square" anchor="t" lIns="0" rIns="0" tIns="0" bIns="0"/>
+          <a:lstStyle/>
+          <a:p>
+            <a:pPr algn="l"/>
+            <a:r>
+              <a:rPr sz="2000" b="0" i="0">
+                <a:solidFill>
+                  <a:srgbClr val="202122"/>
+                </a:solidFill>
+                <a:latin typeface="Calibri"/>
+              </a:rPr>
+              <a:t>Just outside the limit.</a:t>
+            </a:r>
+          </a:p>
+        </p:txBody>
+      </p:sp>
+      <p:sp>
+        <p:nvSpPr>
+          <p:cNvPr id="22" name="Rounded Rectangle 21"/>
+          <p:cNvSpPr/>
+          <p:nvPr/>
+        </p:nvSpPr>
+        <p:spPr>
+          <a:xfrm>
+            <a:off x="4338218" y="4023360"/>
+            <a:ext cx="3515258" cy="2148840"/>
+          </a:xfrm>
+          <a:prstGeom prst="roundRect">
+            <a:avLst>
+              <a:gd name="adj" fmla="val 6000"/>
+            </a:avLst>
+          </a:prstGeom>
+          <a:solidFill>
+            <a:srgbClr val="EAF3FF"/>
+          </a:solidFill>
+          <a:ln>
+            <a:noFill/>
+          </a:ln>
+          <a:effectLst/>
+        </p:spPr>
+        <p:style>
+          <a:lnRef idx="1">
+            <a:schemeClr val="accent1"/>
+          </a:lnRef>
+          <a:fillRef idx="3">
+            <a:schemeClr val="accent1"/>
+          </a:fillRef>
+          <a:effectRef idx="2">
+            <a:schemeClr val="accent1"/>
+          </a:effectRef>
+          <a:fontRef idx="minor">
+            <a:schemeClr val="lt1"/>
+          </a:fontRef>
+        </p:style>
+        <p:txBody>
+          <a:bodyPr rtlCol="0" anchor="ctr"/>
+          <a:lstStyle/>
+          <a:p/>
+        </p:txBody>
+      </p:sp>
+      <p:sp>
+        <p:nvSpPr>
+          <p:cNvPr id="23" name="Oval 22"/>
+          <p:cNvSpPr/>
+          <p:nvPr/>
+        </p:nvSpPr>
+        <p:spPr>
+          <a:xfrm>
+            <a:off x="4566818" y="4251960"/>
+            <a:ext cx="457200" cy="457200"/>
+          </a:xfrm>
+          <a:prstGeom prst="ellipse">
+            <a:avLst/>
+          </a:prstGeom>
+          <a:solidFill>
+            <a:srgbClr val="33C17A"/>
+          </a:solidFill>
+          <a:ln>
+            <a:noFill/>
+          </a:ln>
+          <a:effectLst/>
+        </p:spPr>
+        <p:style>
+          <a:lnRef idx="1">
+            <a:schemeClr val="accent1"/>
+          </a:lnRef>
+          <a:fillRef idx="3">
+            <a:schemeClr val="accent1"/>
+          </a:fillRef>
+          <a:effectRef idx="2">
+            <a:schemeClr val="accent1"/>
+          </a:effectRef>
+          <a:fontRef idx="minor">
+            <a:schemeClr val="lt1"/>
+          </a:fontRef>
+        </p:style>
+        <p:txBody>
+          <a:bodyPr rtlCol="0" anchor="ctr" lIns="0" rIns="0" tIns="0" bIns="0"/>
+          <a:lstStyle/>
+          <a:p>
+            <a:pPr algn="ctr"/>
+            <a:r>
+              <a:rPr sz="1500" b="1">
+                <a:solidFill>
+                  <a:srgbClr val="202122"/>
+                </a:solidFill>
+                <a:latin typeface="Calibri"/>
+              </a:rPr>
+              <a:t>5</a:t>
+            </a:r>
+          </a:p>
+        </p:txBody>
+      </p:sp>
+      <p:sp>
+        <p:nvSpPr>
+          <p:cNvPr id="24" name="TextBox 23"/>
+          <p:cNvSpPr txBox="1"/>
+          <p:nvPr/>
+        </p:nvSpPr>
+        <p:spPr>
+          <a:xfrm>
+            <a:off x="5161178" y="4224528"/>
+            <a:ext cx="2509418" cy="512064"/>
+          </a:xfrm>
+          <a:prstGeom prst="rect">
+            <a:avLst/>
+          </a:prstGeom>
+          <a:noFill/>
+        </p:spPr>
+        <p:txBody>
+          <a:bodyPr wrap="square" anchor="ctr" lIns="0" rIns="0" tIns="0" bIns="0"/>
+          <a:lstStyle/>
+          <a:p>
+            <a:pPr algn="l"/>
+            <a:r>
+              <a:rPr sz="1900" b="1" i="0">
+                <a:solidFill>
+                  <a:srgbClr val="03306E"/>
+                </a:solidFill>
+                <a:latin typeface="Calibri"/>
+              </a:rPr>
+              <a:t>Erroneous</a:t>
+            </a:r>
+          </a:p>
+        </p:txBody>
+      </p:sp>
+      <p:sp>
+        <p:nvSpPr>
+          <p:cNvPr id="25" name="TextBox 24"/>
+          <p:cNvSpPr txBox="1"/>
+          <p:nvPr/>
+        </p:nvSpPr>
+        <p:spPr>
+          <a:xfrm>
+            <a:off x="4566818" y="4892040"/>
+            <a:ext cx="3058058" cy="1143000"/>
+          </a:xfrm>
+          <a:prstGeom prst="rect">
+            <a:avLst/>
+          </a:prstGeom>
+          <a:noFill/>
+        </p:spPr>
+        <p:txBody>
+          <a:bodyPr wrap="square" anchor="t" lIns="0" rIns="0" tIns="0" bIns="0"/>
+          <a:lstStyle/>
+          <a:p>
+            <a:pPr algn="l"/>
+            <a:r>
+              <a:rPr sz="2000" b="0" i="0">
+                <a:solidFill>
+                  <a:srgbClr val="202122"/>
+                </a:solidFill>
+                <a:latin typeface="Calibri"/>
+              </a:rPr>
+              <a:t>Wrong type entirely.</a:t>
+            </a:r>
+          </a:p>
+        </p:txBody>
+      </p:sp>
+    </p:spTree>
+  </p:cSld>
+  <p:clrMapOvr>
+    <a:masterClrMapping/>
+  </p:clrMapOvr>
+</p:sld>
+</file>
+
+<file path=ppt/slides/slide11.xml><?xml version="1.0" encoding="utf-8"?>
+<p:sld xmlns:a="http://schemas.openxmlformats.org/drawingml/2006/main" xmlns:p="http://schemas.openxmlformats.org/presentationml/2006/main" xmlns:r="http://schemas.openxmlformats.org/officeDocument/2006/relationships">
+  <p:cSld>
+    <p:bg>
+      <p:bgPr>
+        <a:solidFill>
+          <a:srgbClr val="FFFFFF"/>
+        </a:solidFill>
+        <a:effectLst/>
+      </p:bgPr>
+    </p:bg>
+    <p:spTree>
+      <p:nvGrpSpPr>
+        <p:cNvPr id="1" name=""/>
+        <p:cNvGrpSpPr/>
+        <p:nvPr/>
+      </p:nvGrpSpPr>
+      <p:grpSpPr/>
+      <p:sp>
+        <p:nvSpPr>
+          <p:cNvPr id="2" name="TextBox 1"/>
+          <p:cNvSpPr txBox="1"/>
+          <p:nvPr/>
+        </p:nvSpPr>
+        <p:spPr>
+          <a:xfrm>
+            <a:off x="548640" y="320040"/>
+            <a:ext cx="11094415" cy="274320"/>
+          </a:xfrm>
+          <a:prstGeom prst="rect">
+            <a:avLst/>
+          </a:prstGeom>
+          <a:noFill/>
+        </p:spPr>
+        <p:txBody>
+          <a:bodyPr wrap="square" anchor="t" lIns="0" rIns="0" tIns="0" bIns="0"/>
+          <a:lstStyle/>
+          <a:p>
+            <a:pPr algn="l"/>
+            <a:r>
+              <a:rPr sz="1100" b="1" i="0">
+                <a:solidFill>
+                  <a:srgbClr val="54595D"/>
+                </a:solidFill>
+                <a:latin typeface="Calibri"/>
+              </a:rPr>
+              <a:t>OCCUPATIONAL SPECIALISM  ·  Specialism Content Area 7</a:t>
+            </a:r>
+          </a:p>
+        </p:txBody>
+      </p:sp>
+      <p:sp>
+        <p:nvSpPr>
+          <p:cNvPr id="3" name="TextBox 2"/>
+          <p:cNvSpPr txBox="1"/>
+          <p:nvPr/>
+        </p:nvSpPr>
+        <p:spPr>
+          <a:xfrm>
+            <a:off x="548640" y="566928"/>
+            <a:ext cx="11094415" cy="822960"/>
+          </a:xfrm>
+          <a:prstGeom prst="rect">
+            <a:avLst/>
+          </a:prstGeom>
+          <a:noFill/>
+        </p:spPr>
+        <p:txBody>
+          <a:bodyPr wrap="square" anchor="ctr" lIns="0" rIns="0" tIns="0" bIns="0"/>
+          <a:lstStyle/>
+          <a:p>
+            <a:pPr algn="l"/>
+            <a:r>
+              <a:rPr sz="3200" b="1" i="0">
+                <a:solidFill>
+                  <a:srgbClr val="03306E"/>
+                </a:solidFill>
+                <a:latin typeface="Cambria"/>
+              </a:rPr>
+              <a:t>Quick check: Test data</a:t>
+            </a:r>
+          </a:p>
+        </p:txBody>
+      </p:sp>
+      <p:sp>
+        <p:nvSpPr>
+          <p:cNvPr id="4" name="TextBox 3"/>
+          <p:cNvSpPr txBox="1"/>
+          <p:nvPr/>
+        </p:nvSpPr>
+        <p:spPr>
+          <a:xfrm>
+            <a:off x="548640" y="6446520"/>
+            <a:ext cx="8229600" cy="274320"/>
+          </a:xfrm>
+          <a:prstGeom prst="rect">
+            <a:avLst/>
+          </a:prstGeom>
+          <a:noFill/>
+        </p:spPr>
+        <p:txBody>
+          <a:bodyPr wrap="square" anchor="t" lIns="0" rIns="0" tIns="0" bIns="0"/>
+          <a:lstStyle/>
+          <a:p>
+            <a:pPr algn="l"/>
+            <a:r>
+              <a:rPr sz="1000" b="0" i="0">
+                <a:solidFill>
+                  <a:srgbClr val="54595D"/>
+                </a:solidFill>
+                <a:latin typeface="Calibri"/>
+              </a:rPr>
+              <a:t>Digital Software Development T Level  ·  Testing a Software Solution</a:t>
+            </a:r>
+          </a:p>
+        </p:txBody>
+      </p:sp>
+      <p:sp>
+        <p:nvSpPr>
+          <p:cNvPr id="5" name="TextBox 4"/>
+          <p:cNvSpPr txBox="1"/>
+          <p:nvPr/>
+        </p:nvSpPr>
+        <p:spPr>
+          <a:xfrm>
+            <a:off x="10728655" y="6446520"/>
+            <a:ext cx="914400" cy="274320"/>
+          </a:xfrm>
+          <a:prstGeom prst="rect">
+            <a:avLst/>
+          </a:prstGeom>
+          <a:noFill/>
+        </p:spPr>
+        <p:txBody>
+          <a:bodyPr wrap="square" anchor="t" lIns="0" rIns="0" tIns="0" bIns="0"/>
+          <a:lstStyle/>
+          <a:p>
+            <a:pPr algn="r"/>
+            <a:r>
+              <a:rPr sz="1000" b="0" i="0">
+                <a:solidFill>
+                  <a:srgbClr val="54595D"/>
+                </a:solidFill>
+                <a:latin typeface="Calibri"/>
+              </a:rPr>
+              <a:t>11</a:t>
+            </a:r>
+          </a:p>
+        </p:txBody>
+      </p:sp>
+      <p:sp>
+        <p:nvSpPr>
+          <p:cNvPr id="6" name="Oval 5"/>
+          <p:cNvSpPr/>
+          <p:nvPr/>
+        </p:nvSpPr>
+        <p:spPr>
+          <a:xfrm>
+            <a:off x="548640" y="1691640"/>
+            <a:ext cx="502920" cy="502920"/>
+          </a:xfrm>
+          <a:prstGeom prst="ellipse">
+            <a:avLst/>
+          </a:prstGeom>
+          <a:solidFill>
+            <a:srgbClr val="33C17A"/>
+          </a:solidFill>
+          <a:ln>
+            <a:noFill/>
+          </a:ln>
+          <a:effectLst/>
+        </p:spPr>
+        <p:style>
+          <a:lnRef idx="1">
+            <a:schemeClr val="accent1"/>
+          </a:lnRef>
+          <a:fillRef idx="3">
+            <a:schemeClr val="accent1"/>
+          </a:fillRef>
+          <a:effectRef idx="2">
+            <a:schemeClr val="accent1"/>
+          </a:effectRef>
+          <a:fontRef idx="minor">
+            <a:schemeClr val="lt1"/>
+          </a:fontRef>
+        </p:style>
+        <p:txBody>
+          <a:bodyPr rtlCol="0" anchor="ctr" lIns="0" rIns="0" tIns="0" bIns="0"/>
+          <a:lstStyle/>
+          <a:p>
+            <a:pPr algn="ctr"/>
+            <a:r>
+              <a:rPr sz="1600" b="1">
+                <a:solidFill>
+                  <a:srgbClr val="202122"/>
+                </a:solidFill>
+                <a:latin typeface="Calibri"/>
+              </a:rPr>
+              <a:t>1</a:t>
+            </a:r>
+          </a:p>
+        </p:txBody>
+      </p:sp>
+      <p:sp>
+        <p:nvSpPr>
+          <p:cNvPr id="7" name="TextBox 6"/>
+          <p:cNvSpPr txBox="1"/>
+          <p:nvPr/>
+        </p:nvSpPr>
+        <p:spPr>
+          <a:xfrm>
+            <a:off x="1371600" y="1645920"/>
+            <a:ext cx="10271455" cy="1188720"/>
+          </a:xfrm>
+          <a:prstGeom prst="rect">
+            <a:avLst/>
+          </a:prstGeom>
+          <a:noFill/>
+        </p:spPr>
+        <p:txBody>
+          <a:bodyPr wrap="square" anchor="t" lIns="0" rIns="0" tIns="0" bIns="0"/>
+          <a:lstStyle/>
+          <a:p>
+            <a:pPr algn="l"/>
+            <a:r>
+              <a:rPr sz="2400" b="0" i="0">
+                <a:solidFill>
+                  <a:srgbClr val="202122"/>
+                </a:solidFill>
+                <a:latin typeface="Calibri"/>
+              </a:rPr>
+              <a:t>For a range 1 to 100, give an invalid extreme value.</a:t>
+            </a:r>
+          </a:p>
+        </p:txBody>
+      </p:sp>
+      <p:sp>
+        <p:nvSpPr>
+          <p:cNvPr id="8" name="Oval 7"/>
+          <p:cNvSpPr/>
+          <p:nvPr/>
+        </p:nvSpPr>
+        <p:spPr>
+          <a:xfrm>
+            <a:off x="548640" y="3108960"/>
+            <a:ext cx="502920" cy="502920"/>
+          </a:xfrm>
+          <a:prstGeom prst="ellipse">
+            <a:avLst/>
+          </a:prstGeom>
+          <a:solidFill>
+            <a:srgbClr val="33C17A"/>
+          </a:solidFill>
+          <a:ln>
+            <a:noFill/>
+          </a:ln>
+          <a:effectLst/>
+        </p:spPr>
+        <p:style>
+          <a:lnRef idx="1">
+            <a:schemeClr val="accent1"/>
+          </a:lnRef>
+          <a:fillRef idx="3">
+            <a:schemeClr val="accent1"/>
+          </a:fillRef>
+          <a:effectRef idx="2">
+            <a:schemeClr val="accent1"/>
+          </a:effectRef>
+          <a:fontRef idx="minor">
+            <a:schemeClr val="lt1"/>
+          </a:fontRef>
+        </p:style>
+        <p:txBody>
+          <a:bodyPr rtlCol="0" anchor="ctr" lIns="0" rIns="0" tIns="0" bIns="0"/>
+          <a:lstStyle/>
+          <a:p>
+            <a:pPr algn="ctr"/>
+            <a:r>
+              <a:rPr sz="1600" b="1">
+                <a:solidFill>
+                  <a:srgbClr val="202122"/>
+                </a:solidFill>
+                <a:latin typeface="Calibri"/>
+              </a:rPr>
+              <a:t>2</a:t>
+            </a:r>
+          </a:p>
+        </p:txBody>
+      </p:sp>
+      <p:sp>
+        <p:nvSpPr>
+          <p:cNvPr id="9" name="TextBox 8"/>
+          <p:cNvSpPr txBox="1"/>
+          <p:nvPr/>
+        </p:nvSpPr>
+        <p:spPr>
+          <a:xfrm>
+            <a:off x="1371600" y="3063240"/>
+            <a:ext cx="10271455" cy="1188720"/>
+          </a:xfrm>
+          <a:prstGeom prst="rect">
+            <a:avLst/>
+          </a:prstGeom>
+          <a:noFill/>
+        </p:spPr>
+        <p:txBody>
+          <a:bodyPr wrap="square" anchor="t" lIns="0" rIns="0" tIns="0" bIns="0"/>
+          <a:lstStyle/>
+          <a:p>
+            <a:pPr algn="l"/>
+            <a:r>
+              <a:rPr sz="2400" b="0" i="0">
+                <a:solidFill>
+                  <a:srgbClr val="202122"/>
+                </a:solidFill>
+                <a:latin typeface="Calibri"/>
+              </a:rPr>
+              <a:t>What is a prerequisite?</a:t>
+            </a:r>
+          </a:p>
+        </p:txBody>
+      </p:sp>
+      <p:sp>
+        <p:nvSpPr>
+          <p:cNvPr id="10" name="Oval 9"/>
+          <p:cNvSpPr/>
+          <p:nvPr/>
+        </p:nvSpPr>
+        <p:spPr>
+          <a:xfrm>
+            <a:off x="548640" y="4526280"/>
+            <a:ext cx="502920" cy="502920"/>
+          </a:xfrm>
+          <a:prstGeom prst="ellipse">
+            <a:avLst/>
+          </a:prstGeom>
+          <a:solidFill>
+            <a:srgbClr val="33C17A"/>
+          </a:solidFill>
+          <a:ln>
+            <a:noFill/>
+          </a:ln>
+          <a:effectLst/>
+        </p:spPr>
+        <p:style>
+          <a:lnRef idx="1">
+            <a:schemeClr val="accent1"/>
+          </a:lnRef>
+          <a:fillRef idx="3">
+            <a:schemeClr val="accent1"/>
+          </a:fillRef>
+          <a:effectRef idx="2">
+            <a:schemeClr val="accent1"/>
+          </a:effectRef>
+          <a:fontRef idx="minor">
+            <a:schemeClr val="lt1"/>
+          </a:fontRef>
+        </p:style>
+        <p:txBody>
+          <a:bodyPr rtlCol="0" anchor="ctr" lIns="0" rIns="0" tIns="0" bIns="0"/>
+          <a:lstStyle/>
+          <a:p>
+            <a:pPr algn="ctr"/>
+            <a:r>
+              <a:rPr sz="1600" b="1">
+                <a:solidFill>
+                  <a:srgbClr val="202122"/>
+                </a:solidFill>
+                <a:latin typeface="Calibri"/>
+              </a:rPr>
+              <a:t>3</a:t>
+            </a:r>
+          </a:p>
+        </p:txBody>
+      </p:sp>
+      <p:sp>
+        <p:nvSpPr>
+          <p:cNvPr id="11" name="TextBox 10"/>
+          <p:cNvSpPr txBox="1"/>
+          <p:nvPr/>
+        </p:nvSpPr>
+        <p:spPr>
+          <a:xfrm>
+            <a:off x="1371600" y="4480560"/>
+            <a:ext cx="10271455" cy="1188720"/>
+          </a:xfrm>
+          <a:prstGeom prst="rect">
+            <a:avLst/>
+          </a:prstGeom>
+          <a:noFill/>
+        </p:spPr>
+        <p:txBody>
+          <a:bodyPr wrap="square" anchor="t" lIns="0" rIns="0" tIns="0" bIns="0"/>
+          <a:lstStyle/>
+          <a:p>
+            <a:pPr algn="l"/>
+            <a:r>
+              <a:rPr sz="2400" b="0" i="0">
+                <a:solidFill>
+                  <a:srgbClr val="202122"/>
+                </a:solidFill>
+                <a:latin typeface="Calibri"/>
+              </a:rPr>
+              <a:t>What should be recorded after fixing a bug?</a:t>
+            </a:r>
+          </a:p>
+        </p:txBody>
+      </p:sp>
+      <p:sp>
+        <p:nvSpPr>
+          <p:cNvPr id="12" name="TextBox 11"/>
+          <p:cNvSpPr txBox="1"/>
+          <p:nvPr/>
+        </p:nvSpPr>
+        <p:spPr>
+          <a:xfrm>
+            <a:off x="548640" y="5852160"/>
+            <a:ext cx="11094415" cy="365760"/>
+          </a:xfrm>
+          <a:prstGeom prst="rect">
+            <a:avLst/>
+          </a:prstGeom>
+          <a:noFill/>
+        </p:spPr>
+        <p:txBody>
+          <a:bodyPr wrap="square" anchor="t" lIns="0" rIns="0" tIns="0" bIns="0"/>
+          <a:lstStyle/>
+          <a:p>
+            <a:pPr algn="l"/>
+            <a:r>
+              <a:rPr sz="1300" b="0" i="1">
+                <a:solidFill>
+                  <a:srgbClr val="54595D"/>
+                </a:solidFill>
+                <a:latin typeface="Calibri"/>
+              </a:rPr>
+              <a:t>Answer on mini whiteboards or in your book. Answers are in the speaker notes.</a:t>
+            </a:r>
+          </a:p>
+        </p:txBody>
+      </p:sp>
+    </p:spTree>
+  </p:cSld>
+  <p:clrMapOvr>
+    <a:masterClrMapping/>
+  </p:clrMapOvr>
+</p:sld>
+</file>
+
+<file path=ppt/slides/slide12.xml><?xml version="1.0" encoding="utf-8"?>
+<p:sld xmlns:a="http://schemas.openxmlformats.org/drawingml/2006/main" xmlns:p="http://schemas.openxmlformats.org/presentationml/2006/main" xmlns:r="http://schemas.openxmlformats.org/officeDocument/2006/relationships">
+  <p:cSld>
+    <p:bg>
+      <p:bgPr>
+        <a:solidFill>
+          <a:srgbClr val="FFFFFF"/>
+        </a:solidFill>
+        <a:effectLst/>
+      </p:bgPr>
+    </p:bg>
+    <p:spTree>
+      <p:nvGrpSpPr>
+        <p:cNvPr id="1" name=""/>
+        <p:cNvGrpSpPr/>
+        <p:nvPr/>
+      </p:nvGrpSpPr>
+      <p:grpSpPr/>
+      <p:sp>
+        <p:nvSpPr>
+          <p:cNvPr id="2" name="TextBox 1"/>
+          <p:cNvSpPr txBox="1"/>
+          <p:nvPr/>
+        </p:nvSpPr>
+        <p:spPr>
+          <a:xfrm>
+            <a:off x="548640" y="320040"/>
+            <a:ext cx="11094415" cy="274320"/>
+          </a:xfrm>
+          <a:prstGeom prst="rect">
+            <a:avLst/>
+          </a:prstGeom>
+          <a:noFill/>
+        </p:spPr>
+        <p:txBody>
+          <a:bodyPr wrap="square" anchor="t" lIns="0" rIns="0" tIns="0" bIns="0"/>
+          <a:lstStyle/>
+          <a:p>
+            <a:pPr algn="l"/>
+            <a:r>
+              <a:rPr sz="1100" b="1" i="0">
+                <a:solidFill>
+                  <a:srgbClr val="54595D"/>
+                </a:solidFill>
+                <a:latin typeface="Calibri"/>
+              </a:rPr>
+              <a:t>OCCUPATIONAL SPECIALISM  ·  Specialism Content Area 7</a:t>
+            </a:r>
+          </a:p>
+        </p:txBody>
+      </p:sp>
+      <p:sp>
+        <p:nvSpPr>
+          <p:cNvPr id="3" name="TextBox 2"/>
+          <p:cNvSpPr txBox="1"/>
+          <p:nvPr/>
+        </p:nvSpPr>
+        <p:spPr>
+          <a:xfrm>
+            <a:off x="548640" y="566928"/>
+            <a:ext cx="11094415" cy="822960"/>
+          </a:xfrm>
+          <a:prstGeom prst="rect">
+            <a:avLst/>
+          </a:prstGeom>
+          <a:noFill/>
+        </p:spPr>
+        <p:txBody>
+          <a:bodyPr wrap="square" anchor="ctr" lIns="0" rIns="0" tIns="0" bIns="0"/>
+          <a:lstStyle/>
+          <a:p>
+            <a:pPr algn="l"/>
+            <a:r>
+              <a:rPr sz="3200" b="1" i="0">
+                <a:solidFill>
+                  <a:srgbClr val="03306E"/>
+                </a:solidFill>
+                <a:latin typeface="Cambria"/>
+              </a:rPr>
+              <a:t>Check your understanding</a:t>
+            </a:r>
+          </a:p>
+        </p:txBody>
+      </p:sp>
+      <p:sp>
+        <p:nvSpPr>
+          <p:cNvPr id="4" name="TextBox 3"/>
+          <p:cNvSpPr txBox="1"/>
+          <p:nvPr/>
+        </p:nvSpPr>
+        <p:spPr>
+          <a:xfrm>
+            <a:off x="548640" y="6446520"/>
+            <a:ext cx="8229600" cy="274320"/>
+          </a:xfrm>
+          <a:prstGeom prst="rect">
+            <a:avLst/>
+          </a:prstGeom>
+          <a:noFill/>
+        </p:spPr>
+        <p:txBody>
+          <a:bodyPr wrap="square" anchor="t" lIns="0" rIns="0" tIns="0" bIns="0"/>
+          <a:lstStyle/>
+          <a:p>
+            <a:pPr algn="l"/>
+            <a:r>
+              <a:rPr sz="1000" b="0" i="0">
+                <a:solidFill>
+                  <a:srgbClr val="54595D"/>
+                </a:solidFill>
+                <a:latin typeface="Calibri"/>
+              </a:rPr>
+              <a:t>Digital Software Development T Level  ·  Testing a Software Solution</a:t>
+            </a:r>
+          </a:p>
+        </p:txBody>
+      </p:sp>
+      <p:sp>
+        <p:nvSpPr>
+          <p:cNvPr id="5" name="TextBox 4"/>
+          <p:cNvSpPr txBox="1"/>
+          <p:nvPr/>
+        </p:nvSpPr>
+        <p:spPr>
+          <a:xfrm>
+            <a:off x="10728655" y="6446520"/>
+            <a:ext cx="914400" cy="274320"/>
+          </a:xfrm>
+          <a:prstGeom prst="rect">
+            <a:avLst/>
+          </a:prstGeom>
+          <a:noFill/>
+        </p:spPr>
+        <p:txBody>
+          <a:bodyPr wrap="square" anchor="t" lIns="0" rIns="0" tIns="0" bIns="0"/>
+          <a:lstStyle/>
+          <a:p>
+            <a:pPr algn="r"/>
+            <a:r>
+              <a:rPr sz="1000" b="0" i="0">
+                <a:solidFill>
+                  <a:srgbClr val="54595D"/>
+                </a:solidFill>
+                <a:latin typeface="Calibri"/>
+              </a:rPr>
+              <a:t>12</a:t>
+            </a:r>
+          </a:p>
+        </p:txBody>
+      </p:sp>
+      <p:sp>
+        <p:nvSpPr>
+          <p:cNvPr id="6" name="Oval 5"/>
+          <p:cNvSpPr/>
+          <p:nvPr/>
+        </p:nvSpPr>
+        <p:spPr>
+          <a:xfrm>
+            <a:off x="548640" y="1618488"/>
+            <a:ext cx="411480" cy="411480"/>
+          </a:xfrm>
+          <a:prstGeom prst="ellipse">
+            <a:avLst/>
+          </a:prstGeom>
+          <a:solidFill>
+            <a:srgbClr val="33C17A"/>
+          </a:solidFill>
+          <a:ln>
+            <a:noFill/>
+          </a:ln>
+          <a:effectLst/>
+        </p:spPr>
+        <p:style>
+          <a:lnRef idx="1">
+            <a:schemeClr val="accent1"/>
+          </a:lnRef>
+          <a:fillRef idx="3">
+            <a:schemeClr val="accent1"/>
+          </a:fillRef>
+          <a:effectRef idx="2">
+            <a:schemeClr val="accent1"/>
+          </a:effectRef>
+          <a:fontRef idx="minor">
+            <a:schemeClr val="lt1"/>
+          </a:fontRef>
+        </p:style>
+        <p:txBody>
+          <a:bodyPr rtlCol="0" anchor="ctr" lIns="0" rIns="0" tIns="0" bIns="0"/>
+          <a:lstStyle/>
+          <a:p>
+            <a:pPr algn="ctr"/>
+            <a:r>
+              <a:rPr sz="1400" b="1">
+                <a:solidFill>
+                  <a:srgbClr val="202122"/>
+                </a:solidFill>
+                <a:latin typeface="Calibri"/>
+              </a:rPr>
+              <a:t>1</a:t>
+            </a:r>
+          </a:p>
+        </p:txBody>
+      </p:sp>
+      <p:sp>
+        <p:nvSpPr>
+          <p:cNvPr id="7" name="TextBox 6"/>
+          <p:cNvSpPr txBox="1"/>
+          <p:nvPr/>
+        </p:nvSpPr>
+        <p:spPr>
+          <a:xfrm>
+            <a:off x="1234440" y="1600200"/>
+            <a:ext cx="10408615" cy="1030986"/>
+          </a:xfrm>
+          <a:prstGeom prst="rect">
+            <a:avLst/>
+          </a:prstGeom>
+          <a:noFill/>
+        </p:spPr>
+        <p:txBody>
+          <a:bodyPr wrap="square" anchor="t" lIns="0" rIns="0" tIns="0" bIns="0"/>
+          <a:lstStyle/>
+          <a:p>
+            <a:pPr algn="l"/>
+            <a:r>
+              <a:rPr sz="2200" b="0" i="0">
+                <a:solidFill>
+                  <a:srgbClr val="202122"/>
+                </a:solidFill>
+                <a:latin typeface="Calibri"/>
+              </a:rPr>
+              <a:t>What is smoke testing?</a:t>
+            </a:r>
+          </a:p>
+        </p:txBody>
+      </p:sp>
+      <p:sp>
+        <p:nvSpPr>
+          <p:cNvPr id="8" name="Oval 7"/>
+          <p:cNvSpPr/>
+          <p:nvPr/>
+        </p:nvSpPr>
+        <p:spPr>
+          <a:xfrm>
+            <a:off x="548640" y="2814066"/>
+            <a:ext cx="411480" cy="411480"/>
+          </a:xfrm>
+          <a:prstGeom prst="ellipse">
+            <a:avLst/>
+          </a:prstGeom>
+          <a:solidFill>
+            <a:srgbClr val="33C17A"/>
+          </a:solidFill>
+          <a:ln>
+            <a:noFill/>
+          </a:ln>
+          <a:effectLst/>
+        </p:spPr>
+        <p:style>
+          <a:lnRef idx="1">
+            <a:schemeClr val="accent1"/>
+          </a:lnRef>
+          <a:fillRef idx="3">
+            <a:schemeClr val="accent1"/>
+          </a:fillRef>
+          <a:effectRef idx="2">
+            <a:schemeClr val="accent1"/>
+          </a:effectRef>
+          <a:fontRef idx="minor">
+            <a:schemeClr val="lt1"/>
+          </a:fontRef>
+        </p:style>
+        <p:txBody>
+          <a:bodyPr rtlCol="0" anchor="ctr" lIns="0" rIns="0" tIns="0" bIns="0"/>
+          <a:lstStyle/>
+          <a:p>
+            <a:pPr algn="ctr"/>
+            <a:r>
+              <a:rPr sz="1400" b="1">
+                <a:solidFill>
+                  <a:srgbClr val="202122"/>
+                </a:solidFill>
+                <a:latin typeface="Calibri"/>
+              </a:rPr>
+              <a:t>2</a:t>
+            </a:r>
+          </a:p>
+        </p:txBody>
+      </p:sp>
+      <p:sp>
+        <p:nvSpPr>
+          <p:cNvPr id="9" name="TextBox 8"/>
+          <p:cNvSpPr txBox="1"/>
+          <p:nvPr/>
+        </p:nvSpPr>
+        <p:spPr>
+          <a:xfrm>
+            <a:off x="1234440" y="2795778"/>
+            <a:ext cx="10408615" cy="1030986"/>
+          </a:xfrm>
+          <a:prstGeom prst="rect">
+            <a:avLst/>
+          </a:prstGeom>
+          <a:noFill/>
+        </p:spPr>
+        <p:txBody>
+          <a:bodyPr wrap="square" anchor="t" lIns="0" rIns="0" tIns="0" bIns="0"/>
+          <a:lstStyle/>
+          <a:p>
+            <a:pPr algn="l"/>
+            <a:r>
+              <a:rPr sz="2200" b="0" i="0">
+                <a:solidFill>
+                  <a:srgbClr val="202122"/>
+                </a:solidFill>
+                <a:latin typeface="Calibri"/>
+              </a:rPr>
+              <a:t>What is the difference between alpha and beta testing?</a:t>
+            </a:r>
+          </a:p>
+        </p:txBody>
+      </p:sp>
+      <p:sp>
+        <p:nvSpPr>
+          <p:cNvPr id="10" name="Oval 9"/>
+          <p:cNvSpPr/>
+          <p:nvPr/>
+        </p:nvSpPr>
+        <p:spPr>
+          <a:xfrm>
+            <a:off x="548640" y="4009644"/>
+            <a:ext cx="411480" cy="411480"/>
+          </a:xfrm>
+          <a:prstGeom prst="ellipse">
+            <a:avLst/>
+          </a:prstGeom>
+          <a:solidFill>
+            <a:srgbClr val="33C17A"/>
+          </a:solidFill>
+          <a:ln>
+            <a:noFill/>
+          </a:ln>
+          <a:effectLst/>
+        </p:spPr>
+        <p:style>
+          <a:lnRef idx="1">
+            <a:schemeClr val="accent1"/>
+          </a:lnRef>
+          <a:fillRef idx="3">
+            <a:schemeClr val="accent1"/>
+          </a:fillRef>
+          <a:effectRef idx="2">
+            <a:schemeClr val="accent1"/>
+          </a:effectRef>
+          <a:fontRef idx="minor">
+            <a:schemeClr val="lt1"/>
+          </a:fontRef>
+        </p:style>
+        <p:txBody>
+          <a:bodyPr rtlCol="0" anchor="ctr" lIns="0" rIns="0" tIns="0" bIns="0"/>
+          <a:lstStyle/>
+          <a:p>
+            <a:pPr algn="ctr"/>
+            <a:r>
+              <a:rPr sz="1400" b="1">
+                <a:solidFill>
+                  <a:srgbClr val="202122"/>
+                </a:solidFill>
+                <a:latin typeface="Calibri"/>
+              </a:rPr>
+              <a:t>3</a:t>
+            </a:r>
+          </a:p>
+        </p:txBody>
+      </p:sp>
+      <p:sp>
+        <p:nvSpPr>
+          <p:cNvPr id="11" name="TextBox 10"/>
+          <p:cNvSpPr txBox="1"/>
+          <p:nvPr/>
+        </p:nvSpPr>
+        <p:spPr>
+          <a:xfrm>
+            <a:off x="1234440" y="3991356"/>
+            <a:ext cx="10408615" cy="1030986"/>
+          </a:xfrm>
+          <a:prstGeom prst="rect">
+            <a:avLst/>
+          </a:prstGeom>
+          <a:noFill/>
+        </p:spPr>
+        <p:txBody>
+          <a:bodyPr wrap="square" anchor="t" lIns="0" rIns="0" tIns="0" bIns="0"/>
+          <a:lstStyle/>
+          <a:p>
+            <a:pPr algn="l"/>
+            <a:r>
+              <a:rPr sz="2200" b="0" i="0">
+                <a:solidFill>
+                  <a:srgbClr val="202122"/>
+                </a:solidFill>
+                <a:latin typeface="Calibri"/>
+              </a:rPr>
+              <a:t>For a range 1 to 100, give valid extreme and invalid extreme values.</a:t>
+            </a:r>
+          </a:p>
+        </p:txBody>
+      </p:sp>
+      <p:sp>
+        <p:nvSpPr>
+          <p:cNvPr id="12" name="Oval 11"/>
+          <p:cNvSpPr/>
+          <p:nvPr/>
+        </p:nvSpPr>
+        <p:spPr>
+          <a:xfrm>
+            <a:off x="548640" y="5205221"/>
+            <a:ext cx="411480" cy="411480"/>
+          </a:xfrm>
+          <a:prstGeom prst="ellipse">
+            <a:avLst/>
+          </a:prstGeom>
+          <a:solidFill>
+            <a:srgbClr val="33C17A"/>
+          </a:solidFill>
+          <a:ln>
+            <a:noFill/>
+          </a:ln>
+          <a:effectLst/>
+        </p:spPr>
+        <p:style>
+          <a:lnRef idx="1">
+            <a:schemeClr val="accent1"/>
+          </a:lnRef>
+          <a:fillRef idx="3">
+            <a:schemeClr val="accent1"/>
+          </a:fillRef>
+          <a:effectRef idx="2">
+            <a:schemeClr val="accent1"/>
+          </a:effectRef>
+          <a:fontRef idx="minor">
+            <a:schemeClr val="lt1"/>
+          </a:fontRef>
+        </p:style>
+        <p:txBody>
+          <a:bodyPr rtlCol="0" anchor="ctr" lIns="0" rIns="0" tIns="0" bIns="0"/>
+          <a:lstStyle/>
+          <a:p>
+            <a:pPr algn="ctr"/>
+            <a:r>
+              <a:rPr sz="1400" b="1">
+                <a:solidFill>
+                  <a:srgbClr val="202122"/>
+                </a:solidFill>
+                <a:latin typeface="Calibri"/>
+              </a:rPr>
+              <a:t>4</a:t>
+            </a:r>
+          </a:p>
+        </p:txBody>
+      </p:sp>
+      <p:sp>
+        <p:nvSpPr>
+          <p:cNvPr id="13" name="TextBox 12"/>
+          <p:cNvSpPr txBox="1"/>
+          <p:nvPr/>
+        </p:nvSpPr>
+        <p:spPr>
+          <a:xfrm>
+            <a:off x="1234440" y="5186933"/>
+            <a:ext cx="10408615" cy="1030986"/>
+          </a:xfrm>
+          <a:prstGeom prst="rect">
+            <a:avLst/>
+          </a:prstGeom>
+          <a:noFill/>
+        </p:spPr>
+        <p:txBody>
+          <a:bodyPr wrap="square" anchor="t" lIns="0" rIns="0" tIns="0" bIns="0"/>
+          <a:lstStyle/>
+          <a:p>
+            <a:pPr algn="l"/>
+            <a:r>
+              <a:rPr sz="2200" b="0" i="0">
+                <a:solidFill>
+                  <a:srgbClr val="202122"/>
+                </a:solidFill>
+                <a:latin typeface="Calibri"/>
+              </a:rPr>
+              <a:t>What is static analysis?</a:t>
+            </a:r>
+          </a:p>
+        </p:txBody>
+      </p:sp>
+    </p:spTree>
+  </p:cSld>
+  <p:clrMapOvr>
+    <a:masterClrMapping/>
+  </p:clrMapOvr>
+</p:sld>
+</file>
+
+<file path=ppt/slides/slide13.xml><?xml version="1.0" encoding="utf-8"?>
+<p:sld xmlns:a="http://schemas.openxmlformats.org/drawingml/2006/main" xmlns:p="http://schemas.openxmlformats.org/presentationml/2006/main" xmlns:r="http://schemas.openxmlformats.org/officeDocument/2006/relationships">
+  <p:cSld>
+    <p:bg>
+      <p:bgPr>
+        <a:solidFill>
+          <a:srgbClr val="FFFFFF"/>
+        </a:solidFill>
+        <a:effectLst/>
+      </p:bgPr>
+    </p:bg>
+    <p:spTree>
+      <p:nvGrpSpPr>
+        <p:cNvPr id="1" name=""/>
+        <p:cNvGrpSpPr/>
+        <p:nvPr/>
+      </p:nvGrpSpPr>
+      <p:grpSpPr/>
+      <p:sp>
+        <p:nvSpPr>
+          <p:cNvPr id="2" name="TextBox 1"/>
+          <p:cNvSpPr txBox="1"/>
+          <p:nvPr/>
+        </p:nvSpPr>
+        <p:spPr>
+          <a:xfrm>
+            <a:off x="548640" y="320040"/>
+            <a:ext cx="11094415" cy="274320"/>
+          </a:xfrm>
+          <a:prstGeom prst="rect">
+            <a:avLst/>
+          </a:prstGeom>
+          <a:noFill/>
+        </p:spPr>
+        <p:txBody>
+          <a:bodyPr wrap="square" anchor="t" lIns="0" rIns="0" tIns="0" bIns="0"/>
+          <a:lstStyle/>
+          <a:p>
+            <a:pPr algn="l"/>
+            <a:r>
+              <a:rPr sz="1100" b="1" i="0">
+                <a:solidFill>
+                  <a:srgbClr val="54595D"/>
+                </a:solidFill>
+                <a:latin typeface="Calibri"/>
+              </a:rPr>
+              <a:t>OCCUPATIONAL SPECIALISM  ·  Specialism Content Area 7</a:t>
+            </a:r>
+          </a:p>
+        </p:txBody>
+      </p:sp>
+      <p:sp>
+        <p:nvSpPr>
+          <p:cNvPr id="3" name="TextBox 2"/>
+          <p:cNvSpPr txBox="1"/>
+          <p:nvPr/>
+        </p:nvSpPr>
+        <p:spPr>
+          <a:xfrm>
+            <a:off x="548640" y="566928"/>
+            <a:ext cx="11094415" cy="822960"/>
+          </a:xfrm>
+          <a:prstGeom prst="rect">
+            <a:avLst/>
+          </a:prstGeom>
+          <a:noFill/>
+        </p:spPr>
+        <p:txBody>
+          <a:bodyPr wrap="square" anchor="ctr" lIns="0" rIns="0" tIns="0" bIns="0"/>
+          <a:lstStyle/>
+          <a:p>
+            <a:pPr algn="l"/>
+            <a:r>
+              <a:rPr sz="3200" b="1" i="0">
+                <a:solidFill>
+                  <a:srgbClr val="03306E"/>
+                </a:solidFill>
+                <a:latin typeface="Cambria"/>
+              </a:rPr>
+              <a:t>Answers</a:t>
+            </a:r>
+          </a:p>
+        </p:txBody>
+      </p:sp>
+      <p:sp>
+        <p:nvSpPr>
+          <p:cNvPr id="4" name="TextBox 3"/>
+          <p:cNvSpPr txBox="1"/>
+          <p:nvPr/>
+        </p:nvSpPr>
+        <p:spPr>
+          <a:xfrm>
+            <a:off x="548640" y="6446520"/>
+            <a:ext cx="8229600" cy="274320"/>
+          </a:xfrm>
+          <a:prstGeom prst="rect">
+            <a:avLst/>
+          </a:prstGeom>
+          <a:noFill/>
+        </p:spPr>
+        <p:txBody>
+          <a:bodyPr wrap="square" anchor="t" lIns="0" rIns="0" tIns="0" bIns="0"/>
+          <a:lstStyle/>
+          <a:p>
+            <a:pPr algn="l"/>
+            <a:r>
+              <a:rPr sz="1000" b="0" i="0">
+                <a:solidFill>
+                  <a:srgbClr val="54595D"/>
+                </a:solidFill>
+                <a:latin typeface="Calibri"/>
+              </a:rPr>
+              <a:t>Digital Software Development T Level  ·  Testing a Software Solution</a:t>
+            </a:r>
+          </a:p>
+        </p:txBody>
+      </p:sp>
+      <p:sp>
+        <p:nvSpPr>
+          <p:cNvPr id="5" name="TextBox 4"/>
+          <p:cNvSpPr txBox="1"/>
+          <p:nvPr/>
+        </p:nvSpPr>
+        <p:spPr>
+          <a:xfrm>
+            <a:off x="10728655" y="6446520"/>
+            <a:ext cx="914400" cy="274320"/>
+          </a:xfrm>
+          <a:prstGeom prst="rect">
+            <a:avLst/>
+          </a:prstGeom>
+          <a:noFill/>
+        </p:spPr>
+        <p:txBody>
+          <a:bodyPr wrap="square" anchor="t" lIns="0" rIns="0" tIns="0" bIns="0"/>
+          <a:lstStyle/>
+          <a:p>
+            <a:pPr algn="r"/>
+            <a:r>
+              <a:rPr sz="1000" b="0" i="0">
+                <a:solidFill>
+                  <a:srgbClr val="54595D"/>
+                </a:solidFill>
+                <a:latin typeface="Calibri"/>
+              </a:rPr>
+              <a:t>13</a:t>
+            </a:r>
+          </a:p>
+        </p:txBody>
+      </p:sp>
+      <p:sp>
+        <p:nvSpPr>
+          <p:cNvPr id="6" name="Oval 5"/>
+          <p:cNvSpPr/>
+          <p:nvPr/>
+        </p:nvSpPr>
+        <p:spPr>
+          <a:xfrm>
+            <a:off x="548640" y="1618488"/>
+            <a:ext cx="411480" cy="411480"/>
+          </a:xfrm>
+          <a:prstGeom prst="ellipse">
+            <a:avLst/>
+          </a:prstGeom>
+          <a:solidFill>
+            <a:srgbClr val="33C17A"/>
+          </a:solidFill>
+          <a:ln>
+            <a:noFill/>
+          </a:ln>
+          <a:effectLst/>
+        </p:spPr>
+        <p:style>
+          <a:lnRef idx="1">
+            <a:schemeClr val="accent1"/>
+          </a:lnRef>
+          <a:fillRef idx="3">
+            <a:schemeClr val="accent1"/>
+          </a:fillRef>
+          <a:effectRef idx="2">
+            <a:schemeClr val="accent1"/>
+          </a:effectRef>
+          <a:fontRef idx="minor">
+            <a:schemeClr val="lt1"/>
+          </a:fontRef>
+        </p:style>
+        <p:txBody>
+          <a:bodyPr rtlCol="0" anchor="ctr" lIns="0" rIns="0" tIns="0" bIns="0"/>
+          <a:lstStyle/>
+          <a:p>
+            <a:pPr algn="ctr"/>
+            <a:r>
+              <a:rPr sz="1400" b="1">
+                <a:solidFill>
+                  <a:srgbClr val="202122"/>
+                </a:solidFill>
+                <a:latin typeface="Calibri"/>
+              </a:rPr>
+              <a:t>1</a:t>
+            </a:r>
+          </a:p>
+        </p:txBody>
+      </p:sp>
+      <p:sp>
+        <p:nvSpPr>
+          <p:cNvPr id="7" name="TextBox 6"/>
+          <p:cNvSpPr txBox="1"/>
+          <p:nvPr/>
+        </p:nvSpPr>
+        <p:spPr>
+          <a:xfrm>
+            <a:off x="1234440" y="1600200"/>
+            <a:ext cx="10408615" cy="1030986"/>
+          </a:xfrm>
+          <a:prstGeom prst="rect">
+            <a:avLst/>
+          </a:prstGeom>
+          <a:noFill/>
+        </p:spPr>
+        <p:txBody>
+          <a:bodyPr wrap="square" anchor="t" lIns="0" rIns="0" tIns="0" bIns="0"/>
+          <a:lstStyle/>
+          <a:p>
+            <a:pPr algn="l"/>
+            <a:r>
+              <a:rPr sz="1800" b="0" i="0">
+                <a:solidFill>
+                  <a:srgbClr val="54595D"/>
+                </a:solidFill>
+                <a:latin typeface="Calibri"/>
+              </a:rPr>
+              <a:t>What is smoke testing?</a:t>
+            </a:r>
+          </a:p>
+          <a:p>
+            <a:r>
+              <a:rPr sz="1800" b="1">
+                <a:solidFill>
+                  <a:srgbClr val="03306E"/>
+                </a:solidFill>
+                <a:latin typeface="Calibri"/>
+              </a:rPr>
+              <a:t>A quick check that the main functions work before deeper testing.</a:t>
+            </a:r>
+          </a:p>
+        </p:txBody>
+      </p:sp>
+      <p:sp>
+        <p:nvSpPr>
+          <p:cNvPr id="8" name="Oval 7"/>
+          <p:cNvSpPr/>
+          <p:nvPr/>
+        </p:nvSpPr>
+        <p:spPr>
+          <a:xfrm>
+            <a:off x="548640" y="2814066"/>
+            <a:ext cx="411480" cy="411480"/>
+          </a:xfrm>
+          <a:prstGeom prst="ellipse">
+            <a:avLst/>
+          </a:prstGeom>
+          <a:solidFill>
+            <a:srgbClr val="33C17A"/>
+          </a:solidFill>
+          <a:ln>
+            <a:noFill/>
+          </a:ln>
+          <a:effectLst/>
+        </p:spPr>
+        <p:style>
+          <a:lnRef idx="1">
+            <a:schemeClr val="accent1"/>
+          </a:lnRef>
+          <a:fillRef idx="3">
+            <a:schemeClr val="accent1"/>
+          </a:fillRef>
+          <a:effectRef idx="2">
+            <a:schemeClr val="accent1"/>
+          </a:effectRef>
+          <a:fontRef idx="minor">
+            <a:schemeClr val="lt1"/>
+          </a:fontRef>
+        </p:style>
+        <p:txBody>
+          <a:bodyPr rtlCol="0" anchor="ctr" lIns="0" rIns="0" tIns="0" bIns="0"/>
+          <a:lstStyle/>
+          <a:p>
+            <a:pPr algn="ctr"/>
+            <a:r>
+              <a:rPr sz="1400" b="1">
+                <a:solidFill>
+                  <a:srgbClr val="202122"/>
+                </a:solidFill>
+                <a:latin typeface="Calibri"/>
+              </a:rPr>
+              <a:t>2</a:t>
+            </a:r>
+          </a:p>
+        </p:txBody>
+      </p:sp>
+      <p:sp>
+        <p:nvSpPr>
+          <p:cNvPr id="9" name="TextBox 8"/>
+          <p:cNvSpPr txBox="1"/>
+          <p:nvPr/>
+        </p:nvSpPr>
+        <p:spPr>
+          <a:xfrm>
+            <a:off x="1234440" y="2795778"/>
+            <a:ext cx="10408615" cy="1030986"/>
+          </a:xfrm>
+          <a:prstGeom prst="rect">
+            <a:avLst/>
+          </a:prstGeom>
+          <a:noFill/>
+        </p:spPr>
+        <p:txBody>
+          <a:bodyPr wrap="square" anchor="t" lIns="0" rIns="0" tIns="0" bIns="0"/>
+          <a:lstStyle/>
+          <a:p>
+            <a:pPr algn="l"/>
+            <a:r>
+              <a:rPr sz="1800" b="0" i="0">
+                <a:solidFill>
+                  <a:srgbClr val="54595D"/>
+                </a:solidFill>
+                <a:latin typeface="Calibri"/>
+              </a:rPr>
+              <a:t>What is the difference between alpha and beta testing?</a:t>
+            </a:r>
+          </a:p>
+          <a:p>
+            <a:r>
+              <a:rPr sz="1800" b="1">
+                <a:solidFill>
+                  <a:srgbClr val="03306E"/>
+                </a:solidFill>
+                <a:latin typeface="Calibri"/>
+              </a:rPr>
+              <a:t>Alpha is internal; beta uses a limited group of real external users.</a:t>
+            </a:r>
+          </a:p>
+        </p:txBody>
+      </p:sp>
+      <p:sp>
+        <p:nvSpPr>
+          <p:cNvPr id="10" name="Oval 9"/>
+          <p:cNvSpPr/>
+          <p:nvPr/>
+        </p:nvSpPr>
+        <p:spPr>
+          <a:xfrm>
+            <a:off x="548640" y="4009644"/>
+            <a:ext cx="411480" cy="411480"/>
+          </a:xfrm>
+          <a:prstGeom prst="ellipse">
+            <a:avLst/>
+          </a:prstGeom>
+          <a:solidFill>
+            <a:srgbClr val="33C17A"/>
+          </a:solidFill>
+          <a:ln>
+            <a:noFill/>
+          </a:ln>
+          <a:effectLst/>
+        </p:spPr>
+        <p:style>
+          <a:lnRef idx="1">
+            <a:schemeClr val="accent1"/>
+          </a:lnRef>
+          <a:fillRef idx="3">
+            <a:schemeClr val="accent1"/>
+          </a:fillRef>
+          <a:effectRef idx="2">
+            <a:schemeClr val="accent1"/>
+          </a:effectRef>
+          <a:fontRef idx="minor">
+            <a:schemeClr val="lt1"/>
+          </a:fontRef>
+        </p:style>
+        <p:txBody>
+          <a:bodyPr rtlCol="0" anchor="ctr" lIns="0" rIns="0" tIns="0" bIns="0"/>
+          <a:lstStyle/>
+          <a:p>
+            <a:pPr algn="ctr"/>
+            <a:r>
+              <a:rPr sz="1400" b="1">
+                <a:solidFill>
+                  <a:srgbClr val="202122"/>
+                </a:solidFill>
+                <a:latin typeface="Calibri"/>
+              </a:rPr>
+              <a:t>3</a:t>
+            </a:r>
+          </a:p>
+        </p:txBody>
+      </p:sp>
+      <p:sp>
+        <p:nvSpPr>
+          <p:cNvPr id="11" name="TextBox 10"/>
+          <p:cNvSpPr txBox="1"/>
+          <p:nvPr/>
+        </p:nvSpPr>
+        <p:spPr>
+          <a:xfrm>
+            <a:off x="1234440" y="3991356"/>
+            <a:ext cx="10408615" cy="1030986"/>
+          </a:xfrm>
+          <a:prstGeom prst="rect">
+            <a:avLst/>
+          </a:prstGeom>
+          <a:noFill/>
+        </p:spPr>
+        <p:txBody>
+          <a:bodyPr wrap="square" anchor="t" lIns="0" rIns="0" tIns="0" bIns="0"/>
+          <a:lstStyle/>
+          <a:p>
+            <a:pPr algn="l"/>
+            <a:r>
+              <a:rPr sz="1800" b="0" i="0">
+                <a:solidFill>
+                  <a:srgbClr val="54595D"/>
+                </a:solidFill>
+                <a:latin typeface="Calibri"/>
+              </a:rPr>
+              <a:t>For a range 1 to 100, give valid extreme and invalid extreme values.</a:t>
+            </a:r>
+          </a:p>
+          <a:p>
+            <a:r>
+              <a:rPr sz="1800" b="1">
+                <a:solidFill>
+                  <a:srgbClr val="03306E"/>
+                </a:solidFill>
+                <a:latin typeface="Calibri"/>
+              </a:rPr>
+              <a:t>Valid extreme: 1 or 100. Invalid extreme: 0 or 101.</a:t>
+            </a:r>
+          </a:p>
+        </p:txBody>
+      </p:sp>
+      <p:sp>
+        <p:nvSpPr>
+          <p:cNvPr id="12" name="Oval 11"/>
+          <p:cNvSpPr/>
+          <p:nvPr/>
+        </p:nvSpPr>
+        <p:spPr>
+          <a:xfrm>
+            <a:off x="548640" y="5205221"/>
+            <a:ext cx="411480" cy="411480"/>
+          </a:xfrm>
+          <a:prstGeom prst="ellipse">
+            <a:avLst/>
+          </a:prstGeom>
+          <a:solidFill>
+            <a:srgbClr val="33C17A"/>
+          </a:solidFill>
+          <a:ln>
+            <a:noFill/>
+          </a:ln>
+          <a:effectLst/>
+        </p:spPr>
+        <p:style>
+          <a:lnRef idx="1">
+            <a:schemeClr val="accent1"/>
+          </a:lnRef>
+          <a:fillRef idx="3">
+            <a:schemeClr val="accent1"/>
+          </a:fillRef>
+          <a:effectRef idx="2">
+            <a:schemeClr val="accent1"/>
+          </a:effectRef>
+          <a:fontRef idx="minor">
+            <a:schemeClr val="lt1"/>
+          </a:fontRef>
+        </p:style>
+        <p:txBody>
+          <a:bodyPr rtlCol="0" anchor="ctr" lIns="0" rIns="0" tIns="0" bIns="0"/>
+          <a:lstStyle/>
+          <a:p>
+            <a:pPr algn="ctr"/>
+            <a:r>
+              <a:rPr sz="1400" b="1">
+                <a:solidFill>
+                  <a:srgbClr val="202122"/>
+                </a:solidFill>
+                <a:latin typeface="Calibri"/>
+              </a:rPr>
+              <a:t>4</a:t>
+            </a:r>
+          </a:p>
+        </p:txBody>
+      </p:sp>
+      <p:sp>
+        <p:nvSpPr>
+          <p:cNvPr id="13" name="TextBox 12"/>
+          <p:cNvSpPr txBox="1"/>
+          <p:nvPr/>
+        </p:nvSpPr>
+        <p:spPr>
+          <a:xfrm>
+            <a:off x="1234440" y="5186933"/>
+            <a:ext cx="10408615" cy="1030986"/>
+          </a:xfrm>
+          <a:prstGeom prst="rect">
+            <a:avLst/>
+          </a:prstGeom>
+          <a:noFill/>
+        </p:spPr>
+        <p:txBody>
+          <a:bodyPr wrap="square" anchor="t" lIns="0" rIns="0" tIns="0" bIns="0"/>
+          <a:lstStyle/>
+          <a:p>
+            <a:pPr algn="l"/>
+            <a:r>
+              <a:rPr sz="1800" b="0" i="0">
+                <a:solidFill>
+                  <a:srgbClr val="54595D"/>
+                </a:solidFill>
+                <a:latin typeface="Calibri"/>
+              </a:rPr>
+              <a:t>What is static analysis?</a:t>
+            </a:r>
+          </a:p>
+          <a:p>
+            <a:r>
+              <a:rPr sz="1800" b="1">
+                <a:solidFill>
+                  <a:srgbClr val="03306E"/>
+                </a:solidFill>
+                <a:latin typeface="Calibri"/>
+              </a:rPr>
+              <a:t>Checking code for problems without running it.</a:t>
+            </a:r>
+          </a:p>
+        </p:txBody>
+      </p:sp>
+    </p:spTree>
+  </p:cSld>
+  <p:clrMapOvr>
+    <a:masterClrMapping/>
+  </p:clrMapOvr>
+</p:sld>
+</file>
+
+<file path=ppt/slides/slide14.xml><?xml version="1.0" encoding="utf-8"?>
+<p:sld xmlns:a="http://schemas.openxmlformats.org/drawingml/2006/main" xmlns:p="http://schemas.openxmlformats.org/presentationml/2006/main" xmlns:r="http://schemas.openxmlformats.org/officeDocument/2006/relationships">
+  <p:cSld>
+    <p:bg>
+      <p:bgPr>
+        <a:solidFill>
+          <a:srgbClr val="FFFFFF"/>
+        </a:solidFill>
+        <a:effectLst/>
+      </p:bgPr>
+    </p:bg>
+    <p:spTree>
+      <p:nvGrpSpPr>
+        <p:cNvPr id="1" name=""/>
+        <p:cNvGrpSpPr/>
+        <p:nvPr/>
+      </p:nvGrpSpPr>
+      <p:grpSpPr/>
+      <p:sp>
+        <p:nvSpPr>
+          <p:cNvPr id="2" name="TextBox 1"/>
+          <p:cNvSpPr txBox="1"/>
+          <p:nvPr/>
+        </p:nvSpPr>
+        <p:spPr>
+          <a:xfrm>
+            <a:off x="548640" y="320040"/>
+            <a:ext cx="11094415" cy="274320"/>
+          </a:xfrm>
+          <a:prstGeom prst="rect">
+            <a:avLst/>
+          </a:prstGeom>
+          <a:noFill/>
+        </p:spPr>
+        <p:txBody>
+          <a:bodyPr wrap="square" anchor="t" lIns="0" rIns="0" tIns="0" bIns="0"/>
+          <a:lstStyle/>
+          <a:p>
+            <a:pPr algn="l"/>
+            <a:r>
+              <a:rPr sz="1100" b="1" i="0">
+                <a:solidFill>
+                  <a:srgbClr val="54595D"/>
+                </a:solidFill>
+                <a:latin typeface="Calibri"/>
+              </a:rPr>
+              <a:t>OCCUPATIONAL SPECIALISM  ·  Specialism Content Area 7</a:t>
+            </a:r>
+          </a:p>
+        </p:txBody>
+      </p:sp>
+      <p:sp>
+        <p:nvSpPr>
+          <p:cNvPr id="3" name="TextBox 2"/>
+          <p:cNvSpPr txBox="1"/>
+          <p:nvPr/>
+        </p:nvSpPr>
+        <p:spPr>
+          <a:xfrm>
+            <a:off x="548640" y="566928"/>
+            <a:ext cx="11094415" cy="822960"/>
+          </a:xfrm>
+          <a:prstGeom prst="rect">
+            <a:avLst/>
+          </a:prstGeom>
+          <a:noFill/>
+        </p:spPr>
+        <p:txBody>
+          <a:bodyPr wrap="square" anchor="ctr" lIns="0" rIns="0" tIns="0" bIns="0"/>
+          <a:lstStyle/>
+          <a:p>
+            <a:pPr algn="l"/>
+            <a:r>
+              <a:rPr sz="3200" b="1" i="0">
+                <a:solidFill>
+                  <a:srgbClr val="03306E"/>
+                </a:solidFill>
+                <a:latin typeface="Cambria"/>
+              </a:rPr>
+              <a:t>Activity: Full test plan</a:t>
+            </a:r>
+          </a:p>
+        </p:txBody>
+      </p:sp>
+      <p:sp>
+        <p:nvSpPr>
+          <p:cNvPr id="4" name="TextBox 3"/>
+          <p:cNvSpPr txBox="1"/>
+          <p:nvPr/>
+        </p:nvSpPr>
+        <p:spPr>
+          <a:xfrm>
+            <a:off x="548640" y="6446520"/>
+            <a:ext cx="8229600" cy="274320"/>
+          </a:xfrm>
+          <a:prstGeom prst="rect">
+            <a:avLst/>
+          </a:prstGeom>
+          <a:noFill/>
+        </p:spPr>
+        <p:txBody>
+          <a:bodyPr wrap="square" anchor="t" lIns="0" rIns="0" tIns="0" bIns="0"/>
+          <a:lstStyle/>
+          <a:p>
+            <a:pPr algn="l"/>
+            <a:r>
+              <a:rPr sz="1000" b="0" i="0">
+                <a:solidFill>
+                  <a:srgbClr val="54595D"/>
+                </a:solidFill>
+                <a:latin typeface="Calibri"/>
+              </a:rPr>
+              <a:t>Digital Software Development T Level  ·  Testing a Software Solution</a:t>
+            </a:r>
+          </a:p>
+        </p:txBody>
+      </p:sp>
+      <p:sp>
+        <p:nvSpPr>
+          <p:cNvPr id="5" name="TextBox 4"/>
+          <p:cNvSpPr txBox="1"/>
+          <p:nvPr/>
+        </p:nvSpPr>
+        <p:spPr>
+          <a:xfrm>
+            <a:off x="10728655" y="6446520"/>
+            <a:ext cx="914400" cy="274320"/>
+          </a:xfrm>
+          <a:prstGeom prst="rect">
+            <a:avLst/>
+          </a:prstGeom>
+          <a:noFill/>
+        </p:spPr>
+        <p:txBody>
+          <a:bodyPr wrap="square" anchor="t" lIns="0" rIns="0" tIns="0" bIns="0"/>
+          <a:lstStyle/>
+          <a:p>
+            <a:pPr algn="r"/>
+            <a:r>
+              <a:rPr sz="1000" b="0" i="0">
+                <a:solidFill>
+                  <a:srgbClr val="54595D"/>
+                </a:solidFill>
+                <a:latin typeface="Calibri"/>
+              </a:rPr>
+              <a:t>14</a:t>
+            </a:r>
+          </a:p>
+        </p:txBody>
+      </p:sp>
+      <p:sp>
+        <p:nvSpPr>
+          <p:cNvPr id="6" name="Rounded Rectangle 5"/>
+          <p:cNvSpPr/>
+          <p:nvPr/>
+        </p:nvSpPr>
+        <p:spPr>
+          <a:xfrm>
+            <a:off x="548640" y="1508760"/>
+            <a:ext cx="2011680" cy="457200"/>
+          </a:xfrm>
+          <a:prstGeom prst="roundRect">
+            <a:avLst>
+              <a:gd name="adj" fmla="val 50000"/>
+            </a:avLst>
+          </a:prstGeom>
+          <a:solidFill>
+            <a:srgbClr val="33C17A"/>
+          </a:solidFill>
+          <a:ln>
+            <a:noFill/>
+          </a:ln>
+          <a:effectLst/>
+        </p:spPr>
+        <p:style>
+          <a:lnRef idx="1">
+            <a:schemeClr val="accent1"/>
+          </a:lnRef>
+          <a:fillRef idx="3">
+            <a:schemeClr val="accent1"/>
+          </a:fillRef>
+          <a:effectRef idx="2">
+            <a:schemeClr val="accent1"/>
+          </a:effectRef>
+          <a:fontRef idx="minor">
+            <a:schemeClr val="lt1"/>
+          </a:fontRef>
+        </p:style>
+        <p:txBody>
+          <a:bodyPr rtlCol="0" anchor="ctr"/>
+          <a:lstStyle/>
+          <a:p/>
+        </p:txBody>
+      </p:sp>
+      <p:sp>
+        <p:nvSpPr>
+          <p:cNvPr id="7" name="TextBox 6"/>
+          <p:cNvSpPr txBox="1"/>
+          <p:nvPr/>
+        </p:nvSpPr>
+        <p:spPr>
+          <a:xfrm>
+            <a:off x="548640" y="1508760"/>
+            <a:ext cx="2011680" cy="457200"/>
+          </a:xfrm>
+          <a:prstGeom prst="rect">
+            <a:avLst/>
+          </a:prstGeom>
+          <a:noFill/>
+        </p:spPr>
+        <p:txBody>
+          <a:bodyPr wrap="square" anchor="ctr" lIns="0" rIns="0" tIns="0" bIns="0"/>
+          <a:lstStyle/>
+          <a:p>
+            <a:pPr algn="ctr"/>
+            <a:r>
+              <a:rPr sz="1400" b="1" i="0">
+                <a:solidFill>
+                  <a:srgbClr val="202122"/>
+                </a:solidFill>
+                <a:latin typeface="Calibri"/>
+              </a:rPr>
+              <a:t>35 minutes</a:t>
+            </a:r>
+          </a:p>
+        </p:txBody>
+      </p:sp>
+      <p:sp>
+        <p:nvSpPr>
+          <p:cNvPr id="8" name="TextBox 7"/>
+          <p:cNvSpPr txBox="1"/>
+          <p:nvPr/>
+        </p:nvSpPr>
+        <p:spPr>
+          <a:xfrm>
+            <a:off x="2743200" y="1508760"/>
+            <a:ext cx="4754880" cy="457200"/>
+          </a:xfrm>
+          <a:prstGeom prst="rect">
+            <a:avLst/>
+          </a:prstGeom>
+          <a:noFill/>
+        </p:spPr>
+        <p:txBody>
+          <a:bodyPr wrap="square" anchor="ctr" lIns="0" rIns="0" tIns="0" bIns="0"/>
+          <a:lstStyle/>
+          <a:p>
+            <a:pPr algn="l"/>
+            <a:r>
+              <a:rPr sz="1400" b="0" i="1">
+                <a:solidFill>
+                  <a:srgbClr val="54595D"/>
+                </a:solidFill>
+                <a:latin typeface="Calibri"/>
+              </a:rPr>
+              <a:t>Pairs</a:t>
+            </a:r>
+          </a:p>
+        </p:txBody>
+      </p:sp>
+      <p:sp>
+        <p:nvSpPr>
+          <p:cNvPr id="9" name="Oval 8"/>
+          <p:cNvSpPr/>
+          <p:nvPr/>
+        </p:nvSpPr>
+        <p:spPr>
+          <a:xfrm>
+            <a:off x="548640" y="2482596"/>
+            <a:ext cx="384048" cy="384048"/>
+          </a:xfrm>
+          <a:prstGeom prst="ellipse">
+            <a:avLst/>
+          </a:prstGeom>
+          <a:solidFill>
+            <a:srgbClr val="0645AD"/>
+          </a:solidFill>
+          <a:ln>
+            <a:noFill/>
+          </a:ln>
+          <a:effectLst/>
+        </p:spPr>
+        <p:style>
+          <a:lnRef idx="1">
+            <a:schemeClr val="accent1"/>
+          </a:lnRef>
+          <a:fillRef idx="3">
+            <a:schemeClr val="accent1"/>
+          </a:fillRef>
+          <a:effectRef idx="2">
+            <a:schemeClr val="accent1"/>
+          </a:effectRef>
+          <a:fontRef idx="minor">
+            <a:schemeClr val="lt1"/>
+          </a:fontRef>
+        </p:style>
+        <p:txBody>
+          <a:bodyPr rtlCol="0" anchor="ctr" lIns="0" rIns="0" tIns="0" bIns="0"/>
+          <a:lstStyle/>
+          <a:p>
+            <a:pPr algn="ctr"/>
+            <a:r>
+              <a:rPr sz="1300" b="1">
+                <a:solidFill>
+                  <a:srgbClr val="FFFFFF"/>
+                </a:solidFill>
+                <a:latin typeface="Calibri"/>
+              </a:rPr>
+              <a:t>1</a:t>
+            </a:r>
+          </a:p>
+        </p:txBody>
+      </p:sp>
+      <p:sp>
+        <p:nvSpPr>
+          <p:cNvPr id="10" name="TextBox 9"/>
+          <p:cNvSpPr txBox="1"/>
+          <p:nvPr/>
+        </p:nvSpPr>
+        <p:spPr>
+          <a:xfrm>
+            <a:off x="1143000" y="2240280"/>
+            <a:ext cx="5943600" cy="868680"/>
+          </a:xfrm>
+          <a:prstGeom prst="rect">
+            <a:avLst/>
+          </a:prstGeom>
+          <a:noFill/>
+        </p:spPr>
+        <p:txBody>
+          <a:bodyPr wrap="square" anchor="ctr" lIns="0" rIns="0" tIns="0" bIns="0"/>
+          <a:lstStyle/>
+          <a:p>
+            <a:pPr algn="l"/>
+            <a:r>
+              <a:rPr sz="1700" b="0" i="0">
+                <a:solidFill>
+                  <a:srgbClr val="202122"/>
+                </a:solidFill>
+                <a:latin typeface="Calibri"/>
+              </a:rPr>
+              <a:t>Choose a feature from your own project.</a:t>
+            </a:r>
+          </a:p>
+        </p:txBody>
+      </p:sp>
+      <p:sp>
+        <p:nvSpPr>
+          <p:cNvPr id="11" name="Oval 10"/>
+          <p:cNvSpPr/>
+          <p:nvPr/>
+        </p:nvSpPr>
+        <p:spPr>
+          <a:xfrm>
+            <a:off x="548640" y="3461004"/>
+            <a:ext cx="384048" cy="384048"/>
+          </a:xfrm>
+          <a:prstGeom prst="ellipse">
+            <a:avLst/>
+          </a:prstGeom>
+          <a:solidFill>
+            <a:srgbClr val="0645AD"/>
+          </a:solidFill>
+          <a:ln>
+            <a:noFill/>
+          </a:ln>
+          <a:effectLst/>
+        </p:spPr>
+        <p:style>
+          <a:lnRef idx="1">
+            <a:schemeClr val="accent1"/>
+          </a:lnRef>
+          <a:fillRef idx="3">
+            <a:schemeClr val="accent1"/>
+          </a:fillRef>
+          <a:effectRef idx="2">
+            <a:schemeClr val="accent1"/>
+          </a:effectRef>
+          <a:fontRef idx="minor">
+            <a:schemeClr val="lt1"/>
+          </a:fontRef>
+        </p:style>
+        <p:txBody>
+          <a:bodyPr rtlCol="0" anchor="ctr" lIns="0" rIns="0" tIns="0" bIns="0"/>
+          <a:lstStyle/>
+          <a:p>
+            <a:pPr algn="ctr"/>
+            <a:r>
+              <a:rPr sz="1300" b="1">
+                <a:solidFill>
+                  <a:srgbClr val="FFFFFF"/>
+                </a:solidFill>
+                <a:latin typeface="Calibri"/>
+              </a:rPr>
+              <a:t>2</a:t>
+            </a:r>
+          </a:p>
+        </p:txBody>
+      </p:sp>
+      <p:sp>
+        <p:nvSpPr>
+          <p:cNvPr id="12" name="TextBox 11"/>
+          <p:cNvSpPr txBox="1"/>
+          <p:nvPr/>
+        </p:nvSpPr>
+        <p:spPr>
+          <a:xfrm>
+            <a:off x="1143000" y="3218688"/>
+            <a:ext cx="5943600" cy="868680"/>
+          </a:xfrm>
+          <a:prstGeom prst="rect">
+            <a:avLst/>
+          </a:prstGeom>
+          <a:noFill/>
+        </p:spPr>
+        <p:txBody>
+          <a:bodyPr wrap="square" anchor="ctr" lIns="0" rIns="0" tIns="0" bIns="0"/>
+          <a:lstStyle/>
+          <a:p>
+            <a:pPr algn="l"/>
+            <a:r>
+              <a:rPr sz="1700" b="0" i="0">
+                <a:solidFill>
+                  <a:srgbClr val="202122"/>
+                </a:solidFill>
+                <a:latin typeface="Calibri"/>
+              </a:rPr>
+              <a:t>Write tests using all five test data types.</a:t>
+            </a:r>
+          </a:p>
+        </p:txBody>
+      </p:sp>
+      <p:sp>
+        <p:nvSpPr>
+          <p:cNvPr id="13" name="Oval 12"/>
+          <p:cNvSpPr/>
+          <p:nvPr/>
+        </p:nvSpPr>
+        <p:spPr>
+          <a:xfrm>
+            <a:off x="548640" y="4439412"/>
+            <a:ext cx="384048" cy="384048"/>
+          </a:xfrm>
+          <a:prstGeom prst="ellipse">
+            <a:avLst/>
+          </a:prstGeom>
+          <a:solidFill>
+            <a:srgbClr val="0645AD"/>
+          </a:solidFill>
+          <a:ln>
+            <a:noFill/>
+          </a:ln>
+          <a:effectLst/>
+        </p:spPr>
+        <p:style>
+          <a:lnRef idx="1">
+            <a:schemeClr val="accent1"/>
+          </a:lnRef>
+          <a:fillRef idx="3">
+            <a:schemeClr val="accent1"/>
+          </a:fillRef>
+          <a:effectRef idx="2">
+            <a:schemeClr val="accent1"/>
+          </a:effectRef>
+          <a:fontRef idx="minor">
+            <a:schemeClr val="lt1"/>
+          </a:fontRef>
+        </p:style>
+        <p:txBody>
+          <a:bodyPr rtlCol="0" anchor="ctr" lIns="0" rIns="0" tIns="0" bIns="0"/>
+          <a:lstStyle/>
+          <a:p>
+            <a:pPr algn="ctr"/>
+            <a:r>
+              <a:rPr sz="1300" b="1">
+                <a:solidFill>
+                  <a:srgbClr val="FFFFFF"/>
+                </a:solidFill>
+                <a:latin typeface="Calibri"/>
+              </a:rPr>
+              <a:t>3</a:t>
+            </a:r>
+          </a:p>
+        </p:txBody>
+      </p:sp>
+      <p:sp>
+        <p:nvSpPr>
+          <p:cNvPr id="14" name="TextBox 13"/>
+          <p:cNvSpPr txBox="1"/>
+          <p:nvPr/>
+        </p:nvSpPr>
+        <p:spPr>
+          <a:xfrm>
+            <a:off x="1143000" y="4197096"/>
+            <a:ext cx="5943600" cy="868680"/>
+          </a:xfrm>
+          <a:prstGeom prst="rect">
+            <a:avLst/>
+          </a:prstGeom>
+          <a:noFill/>
+        </p:spPr>
+        <p:txBody>
+          <a:bodyPr wrap="square" anchor="ctr" lIns="0" rIns="0" tIns="0" bIns="0"/>
+          <a:lstStyle/>
+          <a:p>
+            <a:pPr algn="l"/>
+            <a:r>
+              <a:rPr sz="1700" b="0" i="0">
+                <a:solidFill>
+                  <a:srgbClr val="202122"/>
+                </a:solidFill>
+                <a:latin typeface="Calibri"/>
+              </a:rPr>
+              <a:t>Add one front-end and one security test.</a:t>
+            </a:r>
+          </a:p>
+        </p:txBody>
+      </p:sp>
+      <p:sp>
+        <p:nvSpPr>
+          <p:cNvPr id="15" name="Oval 14"/>
+          <p:cNvSpPr/>
+          <p:nvPr/>
+        </p:nvSpPr>
+        <p:spPr>
+          <a:xfrm>
+            <a:off x="548640" y="5417820"/>
+            <a:ext cx="384048" cy="384048"/>
+          </a:xfrm>
+          <a:prstGeom prst="ellipse">
+            <a:avLst/>
+          </a:prstGeom>
+          <a:solidFill>
+            <a:srgbClr val="0645AD"/>
+          </a:solidFill>
+          <a:ln>
+            <a:noFill/>
+          </a:ln>
+          <a:effectLst/>
+        </p:spPr>
+        <p:style>
+          <a:lnRef idx="1">
+            <a:schemeClr val="accent1"/>
+          </a:lnRef>
+          <a:fillRef idx="3">
+            <a:schemeClr val="accent1"/>
+          </a:fillRef>
+          <a:effectRef idx="2">
+            <a:schemeClr val="accent1"/>
+          </a:effectRef>
+          <a:fontRef idx="minor">
+            <a:schemeClr val="lt1"/>
+          </a:fontRef>
+        </p:style>
+        <p:txBody>
+          <a:bodyPr rtlCol="0" anchor="ctr" lIns="0" rIns="0" tIns="0" bIns="0"/>
+          <a:lstStyle/>
+          <a:p>
+            <a:pPr algn="ctr"/>
+            <a:r>
+              <a:rPr sz="1300" b="1">
+                <a:solidFill>
+                  <a:srgbClr val="FFFFFF"/>
+                </a:solidFill>
+                <a:latin typeface="Calibri"/>
+              </a:rPr>
+              <a:t>4</a:t>
+            </a:r>
+          </a:p>
+        </p:txBody>
+      </p:sp>
+      <p:sp>
+        <p:nvSpPr>
+          <p:cNvPr id="16" name="TextBox 15"/>
+          <p:cNvSpPr txBox="1"/>
+          <p:nvPr/>
+        </p:nvSpPr>
+        <p:spPr>
+          <a:xfrm>
+            <a:off x="1143000" y="5175504"/>
+            <a:ext cx="5943600" cy="868680"/>
+          </a:xfrm>
+          <a:prstGeom prst="rect">
+            <a:avLst/>
+          </a:prstGeom>
+          <a:noFill/>
+        </p:spPr>
+        <p:txBody>
+          <a:bodyPr wrap="square" anchor="ctr" lIns="0" rIns="0" tIns="0" bIns="0"/>
+          <a:lstStyle/>
+          <a:p>
+            <a:pPr algn="l"/>
+            <a:r>
+              <a:rPr sz="1700" b="0" i="0">
+                <a:solidFill>
+                  <a:srgbClr val="202122"/>
+                </a:solidFill>
+                <a:latin typeface="Calibri"/>
+              </a:rPr>
+              <a:t>Run them, record results and plan regression tests.</a:t>
+            </a:r>
+          </a:p>
+        </p:txBody>
+      </p:sp>
+      <p:sp>
+        <p:nvSpPr>
+          <p:cNvPr id="17" name="Rounded Rectangle 16"/>
+          <p:cNvSpPr/>
+          <p:nvPr/>
+        </p:nvSpPr>
+        <p:spPr>
+          <a:xfrm>
+            <a:off x="7772400" y="1508760"/>
+            <a:ext cx="3867912" cy="4572000"/>
+          </a:xfrm>
+          <a:prstGeom prst="roundRect">
+            <a:avLst>
+              <a:gd name="adj" fmla="val 8000"/>
+            </a:avLst>
+          </a:prstGeom>
+          <a:solidFill>
+            <a:srgbClr val="EAF3FF"/>
+          </a:solidFill>
+          <a:ln>
+            <a:noFill/>
+          </a:ln>
+          <a:effectLst/>
+        </p:spPr>
+        <p:style>
+          <a:lnRef idx="1">
+            <a:schemeClr val="accent1"/>
+          </a:lnRef>
+          <a:fillRef idx="3">
+            <a:schemeClr val="accent1"/>
+          </a:fillRef>
+          <a:effectRef idx="2">
+            <a:schemeClr val="accent1"/>
+          </a:effectRef>
+          <a:fontRef idx="minor">
+            <a:schemeClr val="lt1"/>
+          </a:fontRef>
+        </p:style>
+        <p:txBody>
+          <a:bodyPr rtlCol="0" anchor="ctr"/>
+          <a:lstStyle/>
+          <a:p/>
+        </p:txBody>
+      </p:sp>
+      <p:sp>
+        <p:nvSpPr>
+          <p:cNvPr id="18" name="TextBox 17"/>
+          <p:cNvSpPr txBox="1"/>
+          <p:nvPr/>
+        </p:nvSpPr>
+        <p:spPr>
+          <a:xfrm>
+            <a:off x="8046720" y="1737360"/>
+            <a:ext cx="3291840" cy="365760"/>
+          </a:xfrm>
+          <a:prstGeom prst="rect">
+            <a:avLst/>
+          </a:prstGeom>
+          <a:noFill/>
+        </p:spPr>
+        <p:txBody>
+          <a:bodyPr wrap="square" anchor="t" lIns="0" rIns="0" tIns="0" bIns="0"/>
+          <a:lstStyle/>
+          <a:p>
+            <a:pPr algn="l"/>
+            <a:r>
+              <a:rPr sz="1300" b="1" i="0">
+                <a:solidFill>
+                  <a:srgbClr val="0645AD"/>
+                </a:solidFill>
+                <a:latin typeface="Calibri"/>
+              </a:rPr>
+              <a:t>SUCCESS CRITERIA</a:t>
+            </a:r>
+          </a:p>
+        </p:txBody>
+      </p:sp>
+      <p:sp>
+        <p:nvSpPr>
+          <p:cNvPr id="19" name="TextBox 18"/>
+          <p:cNvSpPr txBox="1"/>
+          <p:nvPr/>
+        </p:nvSpPr>
+        <p:spPr>
+          <a:xfrm>
+            <a:off x="8046720" y="2240280"/>
+            <a:ext cx="3337560" cy="3657600"/>
+          </a:xfrm>
+          <a:prstGeom prst="rect">
+            <a:avLst/>
+          </a:prstGeom>
+          <a:noFill/>
+        </p:spPr>
+        <p:txBody>
+          <a:bodyPr wrap="square" lIns="0" rIns="0" tIns="0" bIns="0">
+            <a:spAutoFit/>
+          </a:bodyPr>
+          <a:lstStyle/>
+          <a:p>
+            <a:pPr marL="274320" indent="-274320">
+              <a:spcAft>
+                <a:spcPts val="810"/>
+              </a:spcAft>
+              <a:buClr>
+                <a:srgbClr val="0645AD"/>
+              </a:buClr>
+              <a:buFont typeface="Arial"/>
+              <a:buChar char="•"/>
+            </a:pPr>
+            <a:r>
+              <a:rPr sz="1800" b="0">
+                <a:solidFill>
+                  <a:srgbClr val="202122"/>
+                </a:solidFill>
+                <a:latin typeface="Calibri"/>
+              </a:rPr>
+              <a:t>Pre-requisites stated</a:t>
+            </a:r>
+          </a:p>
+          <a:p>
+            <a:pPr marL="274320" indent="-274320">
+              <a:spcAft>
+                <a:spcPts val="810"/>
+              </a:spcAft>
+              <a:buClr>
+                <a:srgbClr val="0645AD"/>
+              </a:buClr>
+              <a:buFont typeface="Arial"/>
+              <a:buChar char="•"/>
+            </a:pPr>
+            <a:r>
+              <a:rPr sz="1800" b="0">
+                <a:solidFill>
+                  <a:srgbClr val="202122"/>
+                </a:solidFill>
+                <a:latin typeface="Calibri"/>
+              </a:rPr>
+              <a:t>All data types used</a:t>
+            </a:r>
+          </a:p>
+          <a:p>
+            <a:pPr marL="274320" indent="-274320">
+              <a:spcAft>
+                <a:spcPts val="810"/>
+              </a:spcAft>
+              <a:buClr>
+                <a:srgbClr val="0645AD"/>
+              </a:buClr>
+              <a:buFont typeface="Arial"/>
+              <a:buChar char="•"/>
+            </a:pPr>
+            <a:r>
+              <a:rPr sz="1800" b="0">
+                <a:solidFill>
+                  <a:srgbClr val="202122"/>
+                </a:solidFill>
+                <a:latin typeface="Calibri"/>
+              </a:rPr>
+              <a:t>Regression testing planned</a:t>
+            </a:r>
+          </a:p>
+        </p:txBody>
+      </p:sp>
+    </p:spTree>
+  </p:cSld>
+  <p:clrMapOvr>
+    <a:masterClrMapping/>
+  </p:clrMapOvr>
+</p:sld>
+</file>
+
+<file path=ppt/slides/slide15.xml><?xml version="1.0" encoding="utf-8"?>
+<p:sld xmlns:a="http://schemas.openxmlformats.org/drawingml/2006/main" xmlns:p="http://schemas.openxmlformats.org/presentationml/2006/main" xmlns:r="http://schemas.openxmlformats.org/officeDocument/2006/relationships">
+  <p:cSld>
+    <p:bg>
+      <p:bgPr>
+        <a:solidFill>
+          <a:srgbClr val="03306E"/>
+        </a:solidFill>
+        <a:effectLst/>
+      </p:bgPr>
+    </p:bg>
+    <p:spTree>
+      <p:nvGrpSpPr>
+        <p:cNvPr id="1" name=""/>
+        <p:cNvGrpSpPr/>
+        <p:nvPr/>
+      </p:nvGrpSpPr>
+      <p:grpSpPr/>
+      <p:sp>
+        <p:nvSpPr>
+          <p:cNvPr id="2" name="TextBox 1"/>
+          <p:cNvSpPr txBox="1"/>
+          <p:nvPr/>
+        </p:nvSpPr>
+        <p:spPr>
+          <a:xfrm>
+            <a:off x="548640" y="320040"/>
+            <a:ext cx="11094415" cy="274320"/>
+          </a:xfrm>
+          <a:prstGeom prst="rect">
+            <a:avLst/>
+          </a:prstGeom>
+          <a:noFill/>
+        </p:spPr>
+        <p:txBody>
+          <a:bodyPr wrap="square" anchor="t" lIns="0" rIns="0" tIns="0" bIns="0"/>
+          <a:lstStyle/>
+          <a:p>
+            <a:pPr algn="l"/>
+            <a:r>
+              <a:rPr sz="1100" b="1" i="0">
+                <a:solidFill>
+                  <a:srgbClr val="A9C8F0"/>
+                </a:solidFill>
+                <a:latin typeface="Calibri"/>
+              </a:rPr>
+              <a:t>OCCUPATIONAL SPECIALISM  ·  Specialism Content Area 7</a:t>
+            </a:r>
+          </a:p>
+        </p:txBody>
+      </p:sp>
+      <p:sp>
+        <p:nvSpPr>
+          <p:cNvPr id="3" name="TextBox 2"/>
+          <p:cNvSpPr txBox="1"/>
+          <p:nvPr/>
+        </p:nvSpPr>
+        <p:spPr>
+          <a:xfrm>
+            <a:off x="548640" y="566928"/>
+            <a:ext cx="11094415" cy="822960"/>
+          </a:xfrm>
+          <a:prstGeom prst="rect">
+            <a:avLst/>
+          </a:prstGeom>
+          <a:noFill/>
+        </p:spPr>
+        <p:txBody>
+          <a:bodyPr wrap="square" anchor="ctr" lIns="0" rIns="0" tIns="0" bIns="0"/>
+          <a:lstStyle/>
+          <a:p>
+            <a:pPr algn="l"/>
+            <a:r>
+              <a:rPr sz="3200" b="1" i="0">
+                <a:solidFill>
+                  <a:srgbClr val="FFFFFF"/>
+                </a:solidFill>
+                <a:latin typeface="Cambria"/>
+              </a:rPr>
+              <a:t>Exit ticket</a:t>
+            </a:r>
+          </a:p>
+        </p:txBody>
+      </p:sp>
+      <p:sp>
+        <p:nvSpPr>
+          <p:cNvPr id="4" name="Oval 3"/>
+          <p:cNvSpPr/>
+          <p:nvPr/>
+        </p:nvSpPr>
+        <p:spPr>
+          <a:xfrm>
+            <a:off x="548640" y="1737360"/>
+            <a:ext cx="502920" cy="502920"/>
+          </a:xfrm>
+          <a:prstGeom prst="ellipse">
+            <a:avLst/>
+          </a:prstGeom>
+          <a:solidFill>
+            <a:srgbClr val="33C17A"/>
+          </a:solidFill>
+          <a:ln>
+            <a:noFill/>
+          </a:ln>
+          <a:effectLst/>
+        </p:spPr>
+        <p:style>
+          <a:lnRef idx="1">
+            <a:schemeClr val="accent1"/>
+          </a:lnRef>
+          <a:fillRef idx="3">
+            <a:schemeClr val="accent1"/>
+          </a:fillRef>
+          <a:effectRef idx="2">
+            <a:schemeClr val="accent1"/>
+          </a:effectRef>
+          <a:fontRef idx="minor">
+            <a:schemeClr val="lt1"/>
+          </a:fontRef>
+        </p:style>
+        <p:txBody>
+          <a:bodyPr rtlCol="0" anchor="ctr" lIns="0" rIns="0" tIns="0" bIns="0"/>
+          <a:lstStyle/>
+          <a:p>
+            <a:pPr algn="ctr"/>
+            <a:r>
+              <a:rPr sz="1700" b="1">
+                <a:solidFill>
+                  <a:srgbClr val="202122"/>
+                </a:solidFill>
+                <a:latin typeface="Calibri"/>
+              </a:rPr>
+              <a:t>1</a:t>
+            </a:r>
+          </a:p>
+        </p:txBody>
+      </p:sp>
+      <p:sp>
+        <p:nvSpPr>
+          <p:cNvPr id="5" name="TextBox 4"/>
+          <p:cNvSpPr txBox="1"/>
+          <p:nvPr/>
+        </p:nvSpPr>
+        <p:spPr>
+          <a:xfrm>
+            <a:off x="1325880" y="1645920"/>
+            <a:ext cx="6583680" cy="822960"/>
+          </a:xfrm>
+          <a:prstGeom prst="rect">
+            <a:avLst/>
+          </a:prstGeom>
+          <a:noFill/>
+        </p:spPr>
+        <p:txBody>
+          <a:bodyPr wrap="square" anchor="ctr" lIns="0" rIns="0" tIns="0" bIns="0"/>
+          <a:lstStyle/>
+          <a:p>
+            <a:pPr algn="l"/>
+            <a:r>
+              <a:rPr sz="2000" b="0" i="0">
+                <a:solidFill>
+                  <a:srgbClr val="FFFFFF"/>
+                </a:solidFill>
+                <a:latin typeface="Calibri"/>
+              </a:rPr>
+              <a:t>Why run beta tests with real users?</a:t>
+            </a:r>
+          </a:p>
+        </p:txBody>
+      </p:sp>
+      <p:sp>
+        <p:nvSpPr>
+          <p:cNvPr id="6" name="Oval 5"/>
+          <p:cNvSpPr/>
+          <p:nvPr/>
+        </p:nvSpPr>
+        <p:spPr>
+          <a:xfrm>
+            <a:off x="548640" y="2697480"/>
+            <a:ext cx="502920" cy="502920"/>
+          </a:xfrm>
+          <a:prstGeom prst="ellipse">
+            <a:avLst/>
+          </a:prstGeom>
+          <a:solidFill>
+            <a:srgbClr val="33C17A"/>
+          </a:solidFill>
+          <a:ln>
+            <a:noFill/>
+          </a:ln>
+          <a:effectLst/>
+        </p:spPr>
+        <p:style>
+          <a:lnRef idx="1">
+            <a:schemeClr val="accent1"/>
+          </a:lnRef>
+          <a:fillRef idx="3">
+            <a:schemeClr val="accent1"/>
+          </a:fillRef>
+          <a:effectRef idx="2">
+            <a:schemeClr val="accent1"/>
+          </a:effectRef>
+          <a:fontRef idx="minor">
+            <a:schemeClr val="lt1"/>
+          </a:fontRef>
+        </p:style>
+        <p:txBody>
+          <a:bodyPr rtlCol="0" anchor="ctr" lIns="0" rIns="0" tIns="0" bIns="0"/>
+          <a:lstStyle/>
+          <a:p>
+            <a:pPr algn="ctr"/>
+            <a:r>
+              <a:rPr sz="1700" b="1">
+                <a:solidFill>
+                  <a:srgbClr val="202122"/>
+                </a:solidFill>
+                <a:latin typeface="Calibri"/>
+              </a:rPr>
+              <a:t>2</a:t>
+            </a:r>
+          </a:p>
+        </p:txBody>
+      </p:sp>
+      <p:sp>
+        <p:nvSpPr>
+          <p:cNvPr id="7" name="TextBox 6"/>
+          <p:cNvSpPr txBox="1"/>
+          <p:nvPr/>
+        </p:nvSpPr>
+        <p:spPr>
+          <a:xfrm>
+            <a:off x="1325880" y="2606040"/>
+            <a:ext cx="6583680" cy="822960"/>
+          </a:xfrm>
+          <a:prstGeom prst="rect">
+            <a:avLst/>
+          </a:prstGeom>
+          <a:noFill/>
+        </p:spPr>
+        <p:txBody>
+          <a:bodyPr wrap="square" anchor="ctr" lIns="0" rIns="0" tIns="0" bIns="0"/>
+          <a:lstStyle/>
+          <a:p>
+            <a:pPr algn="l"/>
+            <a:r>
+              <a:rPr sz="2000" b="0" i="0">
+                <a:solidFill>
+                  <a:srgbClr val="FFFFFF"/>
+                </a:solidFill>
+                <a:latin typeface="Calibri"/>
+              </a:rPr>
+              <a:t>What is open box testing?</a:t>
+            </a:r>
+          </a:p>
+        </p:txBody>
+      </p:sp>
+      <p:sp>
+        <p:nvSpPr>
+          <p:cNvPr id="8" name="Oval 7"/>
+          <p:cNvSpPr/>
+          <p:nvPr/>
+        </p:nvSpPr>
+        <p:spPr>
+          <a:xfrm>
+            <a:off x="548640" y="3657600"/>
+            <a:ext cx="502920" cy="502920"/>
+          </a:xfrm>
+          <a:prstGeom prst="ellipse">
+            <a:avLst/>
+          </a:prstGeom>
+          <a:solidFill>
+            <a:srgbClr val="33C17A"/>
+          </a:solidFill>
+          <a:ln>
+            <a:noFill/>
+          </a:ln>
+          <a:effectLst/>
+        </p:spPr>
+        <p:style>
+          <a:lnRef idx="1">
+            <a:schemeClr val="accent1"/>
+          </a:lnRef>
+          <a:fillRef idx="3">
+            <a:schemeClr val="accent1"/>
+          </a:fillRef>
+          <a:effectRef idx="2">
+            <a:schemeClr val="accent1"/>
+          </a:effectRef>
+          <a:fontRef idx="minor">
+            <a:schemeClr val="lt1"/>
+          </a:fontRef>
+        </p:style>
+        <p:txBody>
+          <a:bodyPr rtlCol="0" anchor="ctr" lIns="0" rIns="0" tIns="0" bIns="0"/>
+          <a:lstStyle/>
+          <a:p>
+            <a:pPr algn="ctr"/>
+            <a:r>
+              <a:rPr sz="1700" b="1">
+                <a:solidFill>
+                  <a:srgbClr val="202122"/>
+                </a:solidFill>
+                <a:latin typeface="Calibri"/>
+              </a:rPr>
+              <a:t>3</a:t>
+            </a:r>
+          </a:p>
+        </p:txBody>
+      </p:sp>
+      <p:sp>
+        <p:nvSpPr>
+          <p:cNvPr id="9" name="TextBox 8"/>
+          <p:cNvSpPr txBox="1"/>
+          <p:nvPr/>
+        </p:nvSpPr>
+        <p:spPr>
+          <a:xfrm>
+            <a:off x="1325880" y="3566160"/>
+            <a:ext cx="6583680" cy="822960"/>
+          </a:xfrm>
+          <a:prstGeom prst="rect">
+            <a:avLst/>
+          </a:prstGeom>
+          <a:noFill/>
+        </p:spPr>
+        <p:txBody>
+          <a:bodyPr wrap="square" anchor="ctr" lIns="0" rIns="0" tIns="0" bIns="0"/>
+          <a:lstStyle/>
+          <a:p>
+            <a:pPr algn="l"/>
+            <a:r>
+              <a:rPr sz="2000" b="0" i="0">
+                <a:solidFill>
+                  <a:srgbClr val="FFFFFF"/>
+                </a:solidFill>
+                <a:latin typeface="Calibri"/>
+              </a:rPr>
+              <a:t>When should regression tests run?</a:t>
+            </a:r>
+          </a:p>
+        </p:txBody>
+      </p:sp>
+      <p:sp>
+        <p:nvSpPr>
+          <p:cNvPr id="10" name="Rounded Rectangle 9"/>
+          <p:cNvSpPr/>
+          <p:nvPr/>
+        </p:nvSpPr>
+        <p:spPr>
+          <a:xfrm>
+            <a:off x="8229600" y="1645920"/>
+            <a:ext cx="3410712" cy="2926080"/>
+          </a:xfrm>
+          <a:prstGeom prst="roundRect">
+            <a:avLst>
+              <a:gd name="adj" fmla="val 8000"/>
+            </a:avLst>
+          </a:prstGeom>
+          <a:solidFill>
+            <a:srgbClr val="0645AD"/>
+          </a:solidFill>
+          <a:ln>
+            <a:noFill/>
+          </a:ln>
+          <a:effectLst/>
+        </p:spPr>
+        <p:style>
+          <a:lnRef idx="1">
+            <a:schemeClr val="accent1"/>
+          </a:lnRef>
+          <a:fillRef idx="3">
+            <a:schemeClr val="accent1"/>
+          </a:fillRef>
+          <a:effectRef idx="2">
+            <a:schemeClr val="accent1"/>
+          </a:effectRef>
+          <a:fontRef idx="minor">
+            <a:schemeClr val="lt1"/>
+          </a:fontRef>
+        </p:style>
+        <p:txBody>
+          <a:bodyPr rtlCol="0" anchor="ctr"/>
+          <a:lstStyle/>
+          <a:p/>
+        </p:txBody>
+      </p:sp>
+      <p:sp>
+        <p:nvSpPr>
+          <p:cNvPr id="11" name="TextBox 10"/>
+          <p:cNvSpPr txBox="1"/>
+          <p:nvPr/>
+        </p:nvSpPr>
+        <p:spPr>
+          <a:xfrm>
+            <a:off x="8503920" y="1874519"/>
+            <a:ext cx="2926080" cy="365760"/>
+          </a:xfrm>
+          <a:prstGeom prst="rect">
+            <a:avLst/>
+          </a:prstGeom>
+          <a:noFill/>
+        </p:spPr>
+        <p:txBody>
+          <a:bodyPr wrap="square" anchor="t" lIns="0" rIns="0" tIns="0" bIns="0"/>
+          <a:lstStyle/>
+          <a:p>
+            <a:pPr algn="l"/>
+            <a:r>
+              <a:rPr sz="1300" b="1" i="0">
+                <a:solidFill>
+                  <a:srgbClr val="A9C8F0"/>
+                </a:solidFill>
+                <a:latin typeface="Calibri"/>
+              </a:rPr>
+              <a:t>REVISE THIS TOPIC</a:t>
+            </a:r>
+          </a:p>
+        </p:txBody>
+      </p:sp>
+      <p:sp>
+        <p:nvSpPr>
+          <p:cNvPr id="12" name="TextBox 11"/>
+          <p:cNvSpPr txBox="1"/>
+          <p:nvPr/>
+        </p:nvSpPr>
+        <p:spPr>
+          <a:xfrm>
+            <a:off x="8503920" y="2286000"/>
+            <a:ext cx="2926080" cy="548640"/>
+          </a:xfrm>
+          <a:prstGeom prst="rect">
+            <a:avLst/>
+          </a:prstGeom>
+          <a:noFill/>
+        </p:spPr>
+        <p:txBody>
+          <a:bodyPr wrap="square" anchor="t" lIns="0" rIns="0" tIns="0" bIns="0"/>
+          <a:lstStyle/>
+          <a:p>
+            <a:pPr algn="l"/>
+            <a:r>
+              <a:rPr sz="1400" b="0" i="0">
+                <a:solidFill>
+                  <a:srgbClr val="FFFFFF"/>
+                </a:solidFill>
+                <a:latin typeface="Calibri"/>
+              </a:rPr>
+              <a:t>Revision notes for this lesson are on the study wiki:</a:t>
+            </a:r>
+          </a:p>
+        </p:txBody>
+      </p:sp>
+      <p:sp>
+        <p:nvSpPr>
+          <p:cNvPr id="13" name="TextBox 12"/>
+          <p:cNvSpPr txBox="1"/>
+          <p:nvPr/>
+        </p:nvSpPr>
+        <p:spPr>
+          <a:xfrm>
+            <a:off x="8503920" y="2926080"/>
+            <a:ext cx="2926080" cy="1463040"/>
+          </a:xfrm>
+          <a:prstGeom prst="rect">
+            <a:avLst/>
+          </a:prstGeom>
+          <a:noFill/>
+        </p:spPr>
+        <p:txBody>
+          <a:bodyPr wrap="square" anchor="t" lIns="0" rIns="0" tIns="0" bIns="0"/>
+          <a:lstStyle/>
+          <a:p>
+            <a:pPr algn="l"/>
+            <a:r>
+              <a:rPr sz="2000" b="1" i="0">
+                <a:solidFill>
+                  <a:srgbClr val="FFFFFF"/>
+                </a:solidFill>
+                <a:latin typeface="Cambria"/>
+              </a:rPr>
+              <a:t>Testing a Software Solution</a:t>
+            </a:r>
+          </a:p>
+        </p:txBody>
+      </p:sp>
+      <p:sp>
+        <p:nvSpPr>
+          <p:cNvPr id="14" name="TextBox 13"/>
+          <p:cNvSpPr txBox="1"/>
+          <p:nvPr/>
+        </p:nvSpPr>
+        <p:spPr>
+          <a:xfrm>
+            <a:off x="548640" y="5669280"/>
+            <a:ext cx="11094415" cy="548640"/>
+          </a:xfrm>
+          <a:prstGeom prst="rect">
+            <a:avLst/>
+          </a:prstGeom>
+          <a:noFill/>
+        </p:spPr>
+        <p:txBody>
+          <a:bodyPr wrap="square" anchor="t" lIns="0" rIns="0" tIns="0" bIns="0"/>
+          <a:lstStyle/>
+          <a:p>
+            <a:pPr algn="l"/>
+            <a:r>
+              <a:rPr sz="1200" b="0" i="0">
+                <a:solidFill>
+                  <a:srgbClr val="A9C8F0"/>
+                </a:solidFill>
+                <a:latin typeface="Calibri"/>
+              </a:rPr>
+              <a:t>https://lana6478.github.io/T-level-Digital-Software-Development/#/02-occupational-specialism/07-testing.md</a:t>
+            </a:r>
+          </a:p>
+        </p:txBody>
+      </p:sp>
+    </p:spTree>
+  </p:cSld>
+  <p:clrMapOvr>
+    <a:masterClrMapping/>
+  </p:clrMapOvr>
+</p:sld>
+</file>
+
 <file path=ppt/slides/slide2.xml><?xml version="1.0" encoding="utf-8"?>
 <p:sld xmlns:a="http://schemas.openxmlformats.org/drawingml/2006/main" xmlns:p="http://schemas.openxmlformats.org/presentationml/2006/main" xmlns:r="http://schemas.openxmlformats.org/officeDocument/2006/relationships">
   <p:cSld>
@@ -4842,22 +8874,134 @@
       </p:sp>
       <p:sp>
         <p:nvSpPr>
-          <p:cNvPr id="6" name="Rounded Rectangle 5"/>
+          <p:cNvPr id="6" name="TextBox 5"/>
+          <p:cNvSpPr txBox="1"/>
+          <p:nvPr/>
+        </p:nvSpPr>
+        <p:spPr>
+          <a:xfrm>
+            <a:off x="548640" y="1554480"/>
+            <a:ext cx="6720840" cy="4617720"/>
+          </a:xfrm>
+          <a:prstGeom prst="rect">
+            <a:avLst/>
+          </a:prstGeom>
+          <a:noFill/>
+        </p:spPr>
+        <p:txBody>
+          <a:bodyPr wrap="square" lIns="0" rIns="0" tIns="0" bIns="0">
+            <a:spAutoFit/>
+          </a:bodyPr>
+          <a:lstStyle/>
+          <a:p>
+            <a:pPr>
+              <a:spcAft>
+                <a:spcPts val="1140"/>
+              </a:spcAft>
+            </a:pPr>
+            <a:r>
+              <a:rPr sz="1900" b="0">
+                <a:solidFill>
+                  <a:srgbClr val="202122"/>
+                </a:solidFill>
+                <a:latin typeface="Calibri"/>
+              </a:rPr>
+              <a:t>Different tests check different things.</a:t>
+            </a:r>
+          </a:p>
+          <a:p>
+            <a:pPr>
+              <a:spcAft>
+                <a:spcPts val="1140"/>
+              </a:spcAft>
+            </a:pPr>
+            <a:r>
+              <a:rPr sz="1900" b="0">
+                <a:solidFill>
+                  <a:srgbClr val="202122"/>
+                </a:solidFill>
+                <a:latin typeface="Calibri"/>
+              </a:rPr>
+              <a:t>Functional testing checks the software does what it should: unit (one piece), smoke (a quick check that the main features work), integration (pieces together) and system (the whole).</a:t>
+            </a:r>
+          </a:p>
+          <a:p>
+            <a:pPr>
+              <a:spcAft>
+                <a:spcPts val="1140"/>
+              </a:spcAft>
+            </a:pPr>
+            <a:r>
+              <a:rPr sz="1900" b="1">
+                <a:solidFill>
+                  <a:srgbClr val="202122"/>
+                </a:solidFill>
+                <a:latin typeface="Calibri"/>
+              </a:rPr>
+              <a:t>Non-functional testing checks how well:</a:t>
+            </a:r>
+            <a:r>
+              <a:rPr sz="1900" b="0">
+                <a:solidFill>
+                  <a:srgbClr val="202122"/>
+                </a:solidFill>
+                <a:latin typeface="Calibri"/>
+              </a:rPr>
+              <a:t> availability, compatibility, configuration and load.</a:t>
+            </a:r>
+          </a:p>
+          <a:p>
+            <a:pPr>
+              <a:spcAft>
+                <a:spcPts val="1140"/>
+              </a:spcAft>
+            </a:pPr>
+            <a:r>
+              <a:rPr sz="1900" b="0">
+                <a:solidFill>
+                  <a:srgbClr val="202122"/>
+                </a:solidFill>
+                <a:latin typeface="Calibri"/>
+              </a:rPr>
+              <a:t>Front-end testing checks performance, browser and OS compatibility, rendering, loading times and responsiveness.</a:t>
+            </a:r>
+          </a:p>
+          <a:p>
+            <a:pPr>
+              <a:spcAft>
+                <a:spcPts val="1140"/>
+              </a:spcAft>
+            </a:pPr>
+            <a:r>
+              <a:rPr sz="1900" b="0">
+                <a:solidFill>
+                  <a:srgbClr val="202122"/>
+                </a:solidFill>
+                <a:latin typeface="Calibri"/>
+              </a:rPr>
+              <a:t>Security testing uses vulnerability scanning, static analysis (examining code without running it), dynamic analysis (testing it running) and integration analysis.</a:t>
+            </a:r>
+          </a:p>
+        </p:txBody>
+      </p:sp>
+      <p:sp>
+        <p:nvSpPr>
+          <p:cNvPr id="7" name="Rounded Rectangle 6"/>
           <p:cNvSpPr/>
           <p:nvPr/>
         </p:nvSpPr>
         <p:spPr>
           <a:xfrm>
-            <a:off x="548640" y="1600200"/>
-            <a:ext cx="5410047" cy="2148840"/>
+            <a:off x="7772400" y="1554480"/>
+            <a:ext cx="3867912" cy="4526280"/>
           </a:xfrm>
           <a:prstGeom prst="roundRect">
             <a:avLst>
-              <a:gd name="adj" fmla="val 6000"/>
+              <a:gd name="adj" fmla="val 8000"/>
             </a:avLst>
           </a:prstGeom>
           <a:solidFill>
-            <a:srgbClr val="EAF3FF"/>
+            <a:srgbClr val="03306E"/>
           </a:solidFill>
           <a:ln>
             <a:noFill/>
@@ -4886,14 +9030,14 @@
       </p:sp>
       <p:sp>
         <p:nvSpPr>
-          <p:cNvPr id="7" name="Oval 6"/>
+          <p:cNvPr id="8" name="Oval 7"/>
           <p:cNvSpPr/>
           <p:nvPr/>
         </p:nvSpPr>
         <p:spPr>
           <a:xfrm>
-            <a:off x="777240" y="1828800"/>
-            <a:ext cx="457200" cy="457200"/>
+            <a:off x="8046720" y="1828800"/>
+            <a:ext cx="548640" cy="548640"/>
           </a:xfrm>
           <a:prstGeom prst="ellipse">
             <a:avLst/>
@@ -4926,60 +9070,60 @@
           <a:p>
             <a:pPr algn="ctr"/>
             <a:r>
-              <a:rPr sz="1500" b="1">
+              <a:rPr sz="1300" b="1">
                 <a:solidFill>
                   <a:srgbClr val="202122"/>
                 </a:solidFill>
                 <a:latin typeface="Calibri"/>
               </a:rPr>
-              <a:t>1</a:t>
-            </a:r>
-          </a:p>
-        </p:txBody>
-      </p:sp>
-      <p:sp>
-        <p:nvSpPr>
-          <p:cNvPr id="8" name="TextBox 7"/>
-          <p:cNvSpPr txBox="1"/>
-          <p:nvPr/>
-        </p:nvSpPr>
-        <p:spPr>
-          <a:xfrm>
-            <a:off x="1371600" y="1801368"/>
-            <a:ext cx="4404207" cy="512064"/>
-          </a:xfrm>
-          <a:prstGeom prst="rect">
-            <a:avLst/>
-          </a:prstGeom>
-          <a:noFill/>
-        </p:spPr>
-        <p:txBody>
-          <a:bodyPr wrap="square" anchor="ctr" lIns="0" rIns="0" tIns="0" bIns="0"/>
+              <a:t>e.g.</a:t>
+            </a:r>
+          </a:p>
+        </p:txBody>
+      </p:sp>
+      <p:sp>
+        <p:nvSpPr>
+          <p:cNvPr id="9" name="TextBox 8"/>
+          <p:cNvSpPr txBox="1"/>
+          <p:nvPr/>
+        </p:nvSpPr>
+        <p:spPr>
+          <a:xfrm>
+            <a:off x="8046720" y="2560320"/>
+            <a:ext cx="3291840" cy="365760"/>
+          </a:xfrm>
+          <a:prstGeom prst="rect">
+            <a:avLst/>
+          </a:prstGeom>
+          <a:noFill/>
+        </p:spPr>
+        <p:txBody>
+          <a:bodyPr wrap="square" anchor="t" lIns="0" rIns="0" tIns="0" bIns="0"/>
           <a:lstStyle/>
           <a:p>
             <a:pPr algn="l"/>
             <a:r>
-              <a:rPr sz="1900" b="1" i="0">
-                <a:solidFill>
-                  <a:srgbClr val="03306E"/>
-                </a:solidFill>
-                <a:latin typeface="Calibri"/>
-              </a:rPr>
-              <a:t>Functional</a:t>
-            </a:r>
-          </a:p>
-        </p:txBody>
-      </p:sp>
-      <p:sp>
-        <p:nvSpPr>
-          <p:cNvPr id="9" name="TextBox 8"/>
-          <p:cNvSpPr txBox="1"/>
-          <p:nvPr/>
-        </p:nvSpPr>
-        <p:spPr>
-          <a:xfrm>
-            <a:off x="777240" y="2468880"/>
-            <a:ext cx="4952847" cy="1143000"/>
+              <a:rPr sz="1300" b="1" i="0">
+                <a:solidFill>
+                  <a:srgbClr val="A9C8F0"/>
+                </a:solidFill>
+                <a:latin typeface="Calibri"/>
+              </a:rPr>
+              <a:t>EXAMPLE</a:t>
+            </a:r>
+          </a:p>
+        </p:txBody>
+      </p:sp>
+      <p:sp>
+        <p:nvSpPr>
+          <p:cNvPr id="10" name="TextBox 9"/>
+          <p:cNvSpPr txBox="1"/>
+          <p:nvPr/>
+        </p:nvSpPr>
+        <p:spPr>
+          <a:xfrm>
+            <a:off x="8046720" y="2971800"/>
+            <a:ext cx="3291840" cy="2971800"/>
           </a:xfrm>
           <a:prstGeom prst="rect">
             <a:avLst/>
@@ -4992,502 +9136,13 @@
           <a:p>
             <a:pPr algn="l"/>
             <a:r>
-              <a:rPr sz="2000" b="0" i="0">
-                <a:solidFill>
-                  <a:srgbClr val="202122"/>
-                </a:solidFill>
-                <a:latin typeface="Calibri"/>
-              </a:rPr>
-              <a:t>Unit, smoke, integration and system testing.</a:t>
-            </a:r>
-          </a:p>
-        </p:txBody>
-      </p:sp>
-      <p:sp>
-        <p:nvSpPr>
-          <p:cNvPr id="10" name="Rounded Rectangle 9"/>
-          <p:cNvSpPr/>
-          <p:nvPr/>
-        </p:nvSpPr>
-        <p:spPr>
-          <a:xfrm>
-            <a:off x="6233007" y="1600200"/>
-            <a:ext cx="5410047" cy="2148840"/>
-          </a:xfrm>
-          <a:prstGeom prst="roundRect">
-            <a:avLst>
-              <a:gd name="adj" fmla="val 6000"/>
-            </a:avLst>
-          </a:prstGeom>
-          <a:solidFill>
-            <a:srgbClr val="EAF3FF"/>
-          </a:solidFill>
-          <a:ln>
-            <a:noFill/>
-          </a:ln>
-          <a:effectLst/>
-        </p:spPr>
-        <p:style>
-          <a:lnRef idx="1">
-            <a:schemeClr val="accent1"/>
-          </a:lnRef>
-          <a:fillRef idx="3">
-            <a:schemeClr val="accent1"/>
-          </a:fillRef>
-          <a:effectRef idx="2">
-            <a:schemeClr val="accent1"/>
-          </a:effectRef>
-          <a:fontRef idx="minor">
-            <a:schemeClr val="lt1"/>
-          </a:fontRef>
-        </p:style>
-        <p:txBody>
-          <a:bodyPr rtlCol="0" anchor="ctr"/>
-          <a:lstStyle/>
-          <a:p/>
-        </p:txBody>
-      </p:sp>
-      <p:sp>
-        <p:nvSpPr>
-          <p:cNvPr id="11" name="Oval 10"/>
-          <p:cNvSpPr/>
-          <p:nvPr/>
-        </p:nvSpPr>
-        <p:spPr>
-          <a:xfrm>
-            <a:off x="6461607" y="1828800"/>
-            <a:ext cx="457200" cy="457200"/>
-          </a:xfrm>
-          <a:prstGeom prst="ellipse">
-            <a:avLst/>
-          </a:prstGeom>
-          <a:solidFill>
-            <a:srgbClr val="33C17A"/>
-          </a:solidFill>
-          <a:ln>
-            <a:noFill/>
-          </a:ln>
-          <a:effectLst/>
-        </p:spPr>
-        <p:style>
-          <a:lnRef idx="1">
-            <a:schemeClr val="accent1"/>
-          </a:lnRef>
-          <a:fillRef idx="3">
-            <a:schemeClr val="accent1"/>
-          </a:fillRef>
-          <a:effectRef idx="2">
-            <a:schemeClr val="accent1"/>
-          </a:effectRef>
-          <a:fontRef idx="minor">
-            <a:schemeClr val="lt1"/>
-          </a:fontRef>
-        </p:style>
-        <p:txBody>
-          <a:bodyPr rtlCol="0" anchor="ctr" lIns="0" rIns="0" tIns="0" bIns="0"/>
-          <a:lstStyle/>
-          <a:p>
-            <a:pPr algn="ctr"/>
-            <a:r>
-              <a:rPr sz="1500" b="1">
-                <a:solidFill>
-                  <a:srgbClr val="202122"/>
-                </a:solidFill>
-                <a:latin typeface="Calibri"/>
-              </a:rPr>
-              <a:t>2</a:t>
-            </a:r>
-          </a:p>
-        </p:txBody>
-      </p:sp>
-      <p:sp>
-        <p:nvSpPr>
-          <p:cNvPr id="12" name="TextBox 11"/>
-          <p:cNvSpPr txBox="1"/>
-          <p:nvPr/>
-        </p:nvSpPr>
-        <p:spPr>
-          <a:xfrm>
-            <a:off x="7055967" y="1801368"/>
-            <a:ext cx="4404207" cy="512064"/>
-          </a:xfrm>
-          <a:prstGeom prst="rect">
-            <a:avLst/>
-          </a:prstGeom>
-          <a:noFill/>
-        </p:spPr>
-        <p:txBody>
-          <a:bodyPr wrap="square" anchor="ctr" lIns="0" rIns="0" tIns="0" bIns="0"/>
-          <a:lstStyle/>
-          <a:p>
-            <a:pPr algn="l"/>
-            <a:r>
-              <a:rPr sz="1900" b="1" i="0">
-                <a:solidFill>
-                  <a:srgbClr val="03306E"/>
-                </a:solidFill>
-                <a:latin typeface="Calibri"/>
-              </a:rPr>
-              <a:t>Non-functional</a:t>
-            </a:r>
-          </a:p>
-        </p:txBody>
-      </p:sp>
-      <p:sp>
-        <p:nvSpPr>
-          <p:cNvPr id="13" name="TextBox 12"/>
-          <p:cNvSpPr txBox="1"/>
-          <p:nvPr/>
-        </p:nvSpPr>
-        <p:spPr>
-          <a:xfrm>
-            <a:off x="6461607" y="2468880"/>
-            <a:ext cx="4952847" cy="1143000"/>
-          </a:xfrm>
-          <a:prstGeom prst="rect">
-            <a:avLst/>
-          </a:prstGeom>
-          <a:noFill/>
-        </p:spPr>
-        <p:txBody>
-          <a:bodyPr wrap="square" anchor="t" lIns="0" rIns="0" tIns="0" bIns="0"/>
-          <a:lstStyle/>
-          <a:p>
-            <a:pPr algn="l"/>
-            <a:r>
-              <a:rPr sz="2000" b="0" i="0">
-                <a:solidFill>
-                  <a:srgbClr val="202122"/>
-                </a:solidFill>
-                <a:latin typeface="Calibri"/>
-              </a:rPr>
-              <a:t>Availability, compatibility, configuration and load testing.</a:t>
-            </a:r>
-          </a:p>
-        </p:txBody>
-      </p:sp>
-      <p:sp>
-        <p:nvSpPr>
-          <p:cNvPr id="14" name="Rounded Rectangle 13"/>
-          <p:cNvSpPr/>
-          <p:nvPr/>
-        </p:nvSpPr>
-        <p:spPr>
-          <a:xfrm>
-            <a:off x="548640" y="4023360"/>
-            <a:ext cx="5410047" cy="2148840"/>
-          </a:xfrm>
-          <a:prstGeom prst="roundRect">
-            <a:avLst>
-              <a:gd name="adj" fmla="val 6000"/>
-            </a:avLst>
-          </a:prstGeom>
-          <a:solidFill>
-            <a:srgbClr val="EAF3FF"/>
-          </a:solidFill>
-          <a:ln>
-            <a:noFill/>
-          </a:ln>
-          <a:effectLst/>
-        </p:spPr>
-        <p:style>
-          <a:lnRef idx="1">
-            <a:schemeClr val="accent1"/>
-          </a:lnRef>
-          <a:fillRef idx="3">
-            <a:schemeClr val="accent1"/>
-          </a:fillRef>
-          <a:effectRef idx="2">
-            <a:schemeClr val="accent1"/>
-          </a:effectRef>
-          <a:fontRef idx="minor">
-            <a:schemeClr val="lt1"/>
-          </a:fontRef>
-        </p:style>
-        <p:txBody>
-          <a:bodyPr rtlCol="0" anchor="ctr"/>
-          <a:lstStyle/>
-          <a:p/>
-        </p:txBody>
-      </p:sp>
-      <p:sp>
-        <p:nvSpPr>
-          <p:cNvPr id="15" name="Oval 14"/>
-          <p:cNvSpPr/>
-          <p:nvPr/>
-        </p:nvSpPr>
-        <p:spPr>
-          <a:xfrm>
-            <a:off x="777240" y="4251960"/>
-            <a:ext cx="457200" cy="457200"/>
-          </a:xfrm>
-          <a:prstGeom prst="ellipse">
-            <a:avLst/>
-          </a:prstGeom>
-          <a:solidFill>
-            <a:srgbClr val="33C17A"/>
-          </a:solidFill>
-          <a:ln>
-            <a:noFill/>
-          </a:ln>
-          <a:effectLst/>
-        </p:spPr>
-        <p:style>
-          <a:lnRef idx="1">
-            <a:schemeClr val="accent1"/>
-          </a:lnRef>
-          <a:fillRef idx="3">
-            <a:schemeClr val="accent1"/>
-          </a:fillRef>
-          <a:effectRef idx="2">
-            <a:schemeClr val="accent1"/>
-          </a:effectRef>
-          <a:fontRef idx="minor">
-            <a:schemeClr val="lt1"/>
-          </a:fontRef>
-        </p:style>
-        <p:txBody>
-          <a:bodyPr rtlCol="0" anchor="ctr" lIns="0" rIns="0" tIns="0" bIns="0"/>
-          <a:lstStyle/>
-          <a:p>
-            <a:pPr algn="ctr"/>
-            <a:r>
-              <a:rPr sz="1500" b="1">
-                <a:solidFill>
-                  <a:srgbClr val="202122"/>
-                </a:solidFill>
-                <a:latin typeface="Calibri"/>
-              </a:rPr>
-              <a:t>3</a:t>
-            </a:r>
-          </a:p>
-        </p:txBody>
-      </p:sp>
-      <p:sp>
-        <p:nvSpPr>
-          <p:cNvPr id="16" name="TextBox 15"/>
-          <p:cNvSpPr txBox="1"/>
-          <p:nvPr/>
-        </p:nvSpPr>
-        <p:spPr>
-          <a:xfrm>
-            <a:off x="1371600" y="4224528"/>
-            <a:ext cx="4404207" cy="512064"/>
-          </a:xfrm>
-          <a:prstGeom prst="rect">
-            <a:avLst/>
-          </a:prstGeom>
-          <a:noFill/>
-        </p:spPr>
-        <p:txBody>
-          <a:bodyPr wrap="square" anchor="ctr" lIns="0" rIns="0" tIns="0" bIns="0"/>
-          <a:lstStyle/>
-          <a:p>
-            <a:pPr algn="l"/>
-            <a:r>
-              <a:rPr sz="1900" b="1" i="0">
-                <a:solidFill>
-                  <a:srgbClr val="03306E"/>
-                </a:solidFill>
-                <a:latin typeface="Calibri"/>
-              </a:rPr>
-              <a:t>Front-end</a:t>
-            </a:r>
-          </a:p>
-        </p:txBody>
-      </p:sp>
-      <p:sp>
-        <p:nvSpPr>
-          <p:cNvPr id="17" name="TextBox 16"/>
-          <p:cNvSpPr txBox="1"/>
-          <p:nvPr/>
-        </p:nvSpPr>
-        <p:spPr>
-          <a:xfrm>
-            <a:off x="777240" y="4892040"/>
-            <a:ext cx="4952847" cy="1143000"/>
-          </a:xfrm>
-          <a:prstGeom prst="rect">
-            <a:avLst/>
-          </a:prstGeom>
-          <a:noFill/>
-        </p:spPr>
-        <p:txBody>
-          <a:bodyPr wrap="square" anchor="t" lIns="0" rIns="0" tIns="0" bIns="0"/>
-          <a:lstStyle/>
-          <a:p>
-            <a:pPr algn="l"/>
-            <a:r>
-              <a:rPr sz="2000" b="0" i="0">
-                <a:solidFill>
-                  <a:srgbClr val="202122"/>
-                </a:solidFill>
-                <a:latin typeface="Calibri"/>
-              </a:rPr>
-              <a:t>Performance, browsers, OS, rendering, loading times, responsiveness.</a:t>
-            </a:r>
-          </a:p>
-        </p:txBody>
-      </p:sp>
-      <p:sp>
-        <p:nvSpPr>
-          <p:cNvPr id="18" name="Rounded Rectangle 17"/>
-          <p:cNvSpPr/>
-          <p:nvPr/>
-        </p:nvSpPr>
-        <p:spPr>
-          <a:xfrm>
-            <a:off x="6233007" y="4023360"/>
-            <a:ext cx="5410047" cy="2148840"/>
-          </a:xfrm>
-          <a:prstGeom prst="roundRect">
-            <a:avLst>
-              <a:gd name="adj" fmla="val 6000"/>
-            </a:avLst>
-          </a:prstGeom>
-          <a:solidFill>
-            <a:srgbClr val="EAF3FF"/>
-          </a:solidFill>
-          <a:ln>
-            <a:noFill/>
-          </a:ln>
-          <a:effectLst/>
-        </p:spPr>
-        <p:style>
-          <a:lnRef idx="1">
-            <a:schemeClr val="accent1"/>
-          </a:lnRef>
-          <a:fillRef idx="3">
-            <a:schemeClr val="accent1"/>
-          </a:fillRef>
-          <a:effectRef idx="2">
-            <a:schemeClr val="accent1"/>
-          </a:effectRef>
-          <a:fontRef idx="minor">
-            <a:schemeClr val="lt1"/>
-          </a:fontRef>
-        </p:style>
-        <p:txBody>
-          <a:bodyPr rtlCol="0" anchor="ctr"/>
-          <a:lstStyle/>
-          <a:p/>
-        </p:txBody>
-      </p:sp>
-      <p:sp>
-        <p:nvSpPr>
-          <p:cNvPr id="19" name="Oval 18"/>
-          <p:cNvSpPr/>
-          <p:nvPr/>
-        </p:nvSpPr>
-        <p:spPr>
-          <a:xfrm>
-            <a:off x="6461607" y="4251960"/>
-            <a:ext cx="457200" cy="457200"/>
-          </a:xfrm>
-          <a:prstGeom prst="ellipse">
-            <a:avLst/>
-          </a:prstGeom>
-          <a:solidFill>
-            <a:srgbClr val="33C17A"/>
-          </a:solidFill>
-          <a:ln>
-            <a:noFill/>
-          </a:ln>
-          <a:effectLst/>
-        </p:spPr>
-        <p:style>
-          <a:lnRef idx="1">
-            <a:schemeClr val="accent1"/>
-          </a:lnRef>
-          <a:fillRef idx="3">
-            <a:schemeClr val="accent1"/>
-          </a:fillRef>
-          <a:effectRef idx="2">
-            <a:schemeClr val="accent1"/>
-          </a:effectRef>
-          <a:fontRef idx="minor">
-            <a:schemeClr val="lt1"/>
-          </a:fontRef>
-        </p:style>
-        <p:txBody>
-          <a:bodyPr rtlCol="0" anchor="ctr" lIns="0" rIns="0" tIns="0" bIns="0"/>
-          <a:lstStyle/>
-          <a:p>
-            <a:pPr algn="ctr"/>
-            <a:r>
-              <a:rPr sz="1500" b="1">
-                <a:solidFill>
-                  <a:srgbClr val="202122"/>
-                </a:solidFill>
-                <a:latin typeface="Calibri"/>
-              </a:rPr>
-              <a:t>4</a:t>
-            </a:r>
-          </a:p>
-        </p:txBody>
-      </p:sp>
-      <p:sp>
-        <p:nvSpPr>
-          <p:cNvPr id="20" name="TextBox 19"/>
-          <p:cNvSpPr txBox="1"/>
-          <p:nvPr/>
-        </p:nvSpPr>
-        <p:spPr>
-          <a:xfrm>
-            <a:off x="7055967" y="4224528"/>
-            <a:ext cx="4404207" cy="512064"/>
-          </a:xfrm>
-          <a:prstGeom prst="rect">
-            <a:avLst/>
-          </a:prstGeom>
-          <a:noFill/>
-        </p:spPr>
-        <p:txBody>
-          <a:bodyPr wrap="square" anchor="ctr" lIns="0" rIns="0" tIns="0" bIns="0"/>
-          <a:lstStyle/>
-          <a:p>
-            <a:pPr algn="l"/>
-            <a:r>
-              <a:rPr sz="1900" b="1" i="0">
-                <a:solidFill>
-                  <a:srgbClr val="03306E"/>
-                </a:solidFill>
-                <a:latin typeface="Calibri"/>
-              </a:rPr>
-              <a:t>Security</a:t>
-            </a:r>
-          </a:p>
-        </p:txBody>
-      </p:sp>
-      <p:sp>
-        <p:nvSpPr>
-          <p:cNvPr id="21" name="TextBox 20"/>
-          <p:cNvSpPr txBox="1"/>
-          <p:nvPr/>
-        </p:nvSpPr>
-        <p:spPr>
-          <a:xfrm>
-            <a:off x="6461607" y="4892040"/>
-            <a:ext cx="4952847" cy="1143000"/>
-          </a:xfrm>
-          <a:prstGeom prst="rect">
-            <a:avLst/>
-          </a:prstGeom>
-          <a:noFill/>
-        </p:spPr>
-        <p:txBody>
-          <a:bodyPr wrap="square" anchor="t" lIns="0" rIns="0" tIns="0" bIns="0"/>
-          <a:lstStyle/>
-          <a:p>
-            <a:pPr algn="l"/>
-            <a:r>
-              <a:rPr sz="2000" b="0" i="0">
-                <a:solidFill>
-                  <a:srgbClr val="202122"/>
-                </a:solidFill>
-                <a:latin typeface="Calibri"/>
-              </a:rPr>
-              <a:t>Vulnerability scanning, static, dynamic and integration analysis.</a:t>
+              <a:rPr sz="1900" b="0" i="0">
+                <a:solidFill>
+                  <a:srgbClr val="FFFFFF"/>
+                </a:solidFill>
+                <a:latin typeface="Cambria"/>
+              </a:rPr>
+              <a:t>Before release: smoke test the main features, run the site in Chrome, Firefox and Safari, load test 1,000 users, and run a vulnerability scan.</a:t>
             </a:r>
           </a:p>
         </p:txBody>
@@ -5579,7 +9234,7 @@
                 </a:solidFill>
                 <a:latin typeface="Cambria"/>
               </a:rPr>
-              <a:t>Testing techniques</a:t>
+              <a:t>Types of testing</a:t>
             </a:r>
           </a:p>
         </p:txBody>
@@ -5646,6 +9301,1657 @@
                 <a:latin typeface="Calibri"/>
               </a:rPr>
               <a:t>4</a:t>
+            </a:r>
+          </a:p>
+        </p:txBody>
+      </p:sp>
+      <p:sp>
+        <p:nvSpPr>
+          <p:cNvPr id="6" name="Rounded Rectangle 5"/>
+          <p:cNvSpPr/>
+          <p:nvPr/>
+        </p:nvSpPr>
+        <p:spPr>
+          <a:xfrm>
+            <a:off x="548640" y="1600200"/>
+            <a:ext cx="5410047" cy="2148840"/>
+          </a:xfrm>
+          <a:prstGeom prst="roundRect">
+            <a:avLst>
+              <a:gd name="adj" fmla="val 6000"/>
+            </a:avLst>
+          </a:prstGeom>
+          <a:solidFill>
+            <a:srgbClr val="EAF3FF"/>
+          </a:solidFill>
+          <a:ln>
+            <a:noFill/>
+          </a:ln>
+          <a:effectLst/>
+        </p:spPr>
+        <p:style>
+          <a:lnRef idx="1">
+            <a:schemeClr val="accent1"/>
+          </a:lnRef>
+          <a:fillRef idx="3">
+            <a:schemeClr val="accent1"/>
+          </a:fillRef>
+          <a:effectRef idx="2">
+            <a:schemeClr val="accent1"/>
+          </a:effectRef>
+          <a:fontRef idx="minor">
+            <a:schemeClr val="lt1"/>
+          </a:fontRef>
+        </p:style>
+        <p:txBody>
+          <a:bodyPr rtlCol="0" anchor="ctr"/>
+          <a:lstStyle/>
+          <a:p/>
+        </p:txBody>
+      </p:sp>
+      <p:sp>
+        <p:nvSpPr>
+          <p:cNvPr id="7" name="Oval 6"/>
+          <p:cNvSpPr/>
+          <p:nvPr/>
+        </p:nvSpPr>
+        <p:spPr>
+          <a:xfrm>
+            <a:off x="777240" y="1828800"/>
+            <a:ext cx="457200" cy="457200"/>
+          </a:xfrm>
+          <a:prstGeom prst="ellipse">
+            <a:avLst/>
+          </a:prstGeom>
+          <a:solidFill>
+            <a:srgbClr val="33C17A"/>
+          </a:solidFill>
+          <a:ln>
+            <a:noFill/>
+          </a:ln>
+          <a:effectLst/>
+        </p:spPr>
+        <p:style>
+          <a:lnRef idx="1">
+            <a:schemeClr val="accent1"/>
+          </a:lnRef>
+          <a:fillRef idx="3">
+            <a:schemeClr val="accent1"/>
+          </a:fillRef>
+          <a:effectRef idx="2">
+            <a:schemeClr val="accent1"/>
+          </a:effectRef>
+          <a:fontRef idx="minor">
+            <a:schemeClr val="lt1"/>
+          </a:fontRef>
+        </p:style>
+        <p:txBody>
+          <a:bodyPr rtlCol="0" anchor="ctr" lIns="0" rIns="0" tIns="0" bIns="0"/>
+          <a:lstStyle/>
+          <a:p>
+            <a:pPr algn="ctr"/>
+            <a:r>
+              <a:rPr sz="1500" b="1">
+                <a:solidFill>
+                  <a:srgbClr val="202122"/>
+                </a:solidFill>
+                <a:latin typeface="Calibri"/>
+              </a:rPr>
+              <a:t>1</a:t>
+            </a:r>
+          </a:p>
+        </p:txBody>
+      </p:sp>
+      <p:sp>
+        <p:nvSpPr>
+          <p:cNvPr id="8" name="TextBox 7"/>
+          <p:cNvSpPr txBox="1"/>
+          <p:nvPr/>
+        </p:nvSpPr>
+        <p:spPr>
+          <a:xfrm>
+            <a:off x="1371600" y="1801368"/>
+            <a:ext cx="4404207" cy="512064"/>
+          </a:xfrm>
+          <a:prstGeom prst="rect">
+            <a:avLst/>
+          </a:prstGeom>
+          <a:noFill/>
+        </p:spPr>
+        <p:txBody>
+          <a:bodyPr wrap="square" anchor="ctr" lIns="0" rIns="0" tIns="0" bIns="0"/>
+          <a:lstStyle/>
+          <a:p>
+            <a:pPr algn="l"/>
+            <a:r>
+              <a:rPr sz="1900" b="1" i="0">
+                <a:solidFill>
+                  <a:srgbClr val="03306E"/>
+                </a:solidFill>
+                <a:latin typeface="Calibri"/>
+              </a:rPr>
+              <a:t>Functional</a:t>
+            </a:r>
+          </a:p>
+        </p:txBody>
+      </p:sp>
+      <p:sp>
+        <p:nvSpPr>
+          <p:cNvPr id="9" name="TextBox 8"/>
+          <p:cNvSpPr txBox="1"/>
+          <p:nvPr/>
+        </p:nvSpPr>
+        <p:spPr>
+          <a:xfrm>
+            <a:off x="777240" y="2468880"/>
+            <a:ext cx="4952847" cy="1143000"/>
+          </a:xfrm>
+          <a:prstGeom prst="rect">
+            <a:avLst/>
+          </a:prstGeom>
+          <a:noFill/>
+        </p:spPr>
+        <p:txBody>
+          <a:bodyPr wrap="square" anchor="t" lIns="0" rIns="0" tIns="0" bIns="0"/>
+          <a:lstStyle/>
+          <a:p>
+            <a:pPr algn="l"/>
+            <a:r>
+              <a:rPr sz="2000" b="0" i="0">
+                <a:solidFill>
+                  <a:srgbClr val="202122"/>
+                </a:solidFill>
+                <a:latin typeface="Calibri"/>
+              </a:rPr>
+              <a:t>Unit, smoke, integration and system testing.</a:t>
+            </a:r>
+          </a:p>
+        </p:txBody>
+      </p:sp>
+      <p:sp>
+        <p:nvSpPr>
+          <p:cNvPr id="10" name="Rounded Rectangle 9"/>
+          <p:cNvSpPr/>
+          <p:nvPr/>
+        </p:nvSpPr>
+        <p:spPr>
+          <a:xfrm>
+            <a:off x="6233007" y="1600200"/>
+            <a:ext cx="5410047" cy="2148840"/>
+          </a:xfrm>
+          <a:prstGeom prst="roundRect">
+            <a:avLst>
+              <a:gd name="adj" fmla="val 6000"/>
+            </a:avLst>
+          </a:prstGeom>
+          <a:solidFill>
+            <a:srgbClr val="EAF3FF"/>
+          </a:solidFill>
+          <a:ln>
+            <a:noFill/>
+          </a:ln>
+          <a:effectLst/>
+        </p:spPr>
+        <p:style>
+          <a:lnRef idx="1">
+            <a:schemeClr val="accent1"/>
+          </a:lnRef>
+          <a:fillRef idx="3">
+            <a:schemeClr val="accent1"/>
+          </a:fillRef>
+          <a:effectRef idx="2">
+            <a:schemeClr val="accent1"/>
+          </a:effectRef>
+          <a:fontRef idx="minor">
+            <a:schemeClr val="lt1"/>
+          </a:fontRef>
+        </p:style>
+        <p:txBody>
+          <a:bodyPr rtlCol="0" anchor="ctr"/>
+          <a:lstStyle/>
+          <a:p/>
+        </p:txBody>
+      </p:sp>
+      <p:sp>
+        <p:nvSpPr>
+          <p:cNvPr id="11" name="Oval 10"/>
+          <p:cNvSpPr/>
+          <p:nvPr/>
+        </p:nvSpPr>
+        <p:spPr>
+          <a:xfrm>
+            <a:off x="6461607" y="1828800"/>
+            <a:ext cx="457200" cy="457200"/>
+          </a:xfrm>
+          <a:prstGeom prst="ellipse">
+            <a:avLst/>
+          </a:prstGeom>
+          <a:solidFill>
+            <a:srgbClr val="33C17A"/>
+          </a:solidFill>
+          <a:ln>
+            <a:noFill/>
+          </a:ln>
+          <a:effectLst/>
+        </p:spPr>
+        <p:style>
+          <a:lnRef idx="1">
+            <a:schemeClr val="accent1"/>
+          </a:lnRef>
+          <a:fillRef idx="3">
+            <a:schemeClr val="accent1"/>
+          </a:fillRef>
+          <a:effectRef idx="2">
+            <a:schemeClr val="accent1"/>
+          </a:effectRef>
+          <a:fontRef idx="minor">
+            <a:schemeClr val="lt1"/>
+          </a:fontRef>
+        </p:style>
+        <p:txBody>
+          <a:bodyPr rtlCol="0" anchor="ctr" lIns="0" rIns="0" tIns="0" bIns="0"/>
+          <a:lstStyle/>
+          <a:p>
+            <a:pPr algn="ctr"/>
+            <a:r>
+              <a:rPr sz="1500" b="1">
+                <a:solidFill>
+                  <a:srgbClr val="202122"/>
+                </a:solidFill>
+                <a:latin typeface="Calibri"/>
+              </a:rPr>
+              <a:t>2</a:t>
+            </a:r>
+          </a:p>
+        </p:txBody>
+      </p:sp>
+      <p:sp>
+        <p:nvSpPr>
+          <p:cNvPr id="12" name="TextBox 11"/>
+          <p:cNvSpPr txBox="1"/>
+          <p:nvPr/>
+        </p:nvSpPr>
+        <p:spPr>
+          <a:xfrm>
+            <a:off x="7055967" y="1801368"/>
+            <a:ext cx="4404207" cy="512064"/>
+          </a:xfrm>
+          <a:prstGeom prst="rect">
+            <a:avLst/>
+          </a:prstGeom>
+          <a:noFill/>
+        </p:spPr>
+        <p:txBody>
+          <a:bodyPr wrap="square" anchor="ctr" lIns="0" rIns="0" tIns="0" bIns="0"/>
+          <a:lstStyle/>
+          <a:p>
+            <a:pPr algn="l"/>
+            <a:r>
+              <a:rPr sz="1900" b="1" i="0">
+                <a:solidFill>
+                  <a:srgbClr val="03306E"/>
+                </a:solidFill>
+                <a:latin typeface="Calibri"/>
+              </a:rPr>
+              <a:t>Non-functional</a:t>
+            </a:r>
+          </a:p>
+        </p:txBody>
+      </p:sp>
+      <p:sp>
+        <p:nvSpPr>
+          <p:cNvPr id="13" name="TextBox 12"/>
+          <p:cNvSpPr txBox="1"/>
+          <p:nvPr/>
+        </p:nvSpPr>
+        <p:spPr>
+          <a:xfrm>
+            <a:off x="6461607" y="2468880"/>
+            <a:ext cx="4952847" cy="1143000"/>
+          </a:xfrm>
+          <a:prstGeom prst="rect">
+            <a:avLst/>
+          </a:prstGeom>
+          <a:noFill/>
+        </p:spPr>
+        <p:txBody>
+          <a:bodyPr wrap="square" anchor="t" lIns="0" rIns="0" tIns="0" bIns="0"/>
+          <a:lstStyle/>
+          <a:p>
+            <a:pPr algn="l"/>
+            <a:r>
+              <a:rPr sz="2000" b="0" i="0">
+                <a:solidFill>
+                  <a:srgbClr val="202122"/>
+                </a:solidFill>
+                <a:latin typeface="Calibri"/>
+              </a:rPr>
+              <a:t>Availability, compatibility, configuration and load testing.</a:t>
+            </a:r>
+          </a:p>
+        </p:txBody>
+      </p:sp>
+      <p:sp>
+        <p:nvSpPr>
+          <p:cNvPr id="14" name="Rounded Rectangle 13"/>
+          <p:cNvSpPr/>
+          <p:nvPr/>
+        </p:nvSpPr>
+        <p:spPr>
+          <a:xfrm>
+            <a:off x="548640" y="4023360"/>
+            <a:ext cx="5410047" cy="2148840"/>
+          </a:xfrm>
+          <a:prstGeom prst="roundRect">
+            <a:avLst>
+              <a:gd name="adj" fmla="val 6000"/>
+            </a:avLst>
+          </a:prstGeom>
+          <a:solidFill>
+            <a:srgbClr val="EAF3FF"/>
+          </a:solidFill>
+          <a:ln>
+            <a:noFill/>
+          </a:ln>
+          <a:effectLst/>
+        </p:spPr>
+        <p:style>
+          <a:lnRef idx="1">
+            <a:schemeClr val="accent1"/>
+          </a:lnRef>
+          <a:fillRef idx="3">
+            <a:schemeClr val="accent1"/>
+          </a:fillRef>
+          <a:effectRef idx="2">
+            <a:schemeClr val="accent1"/>
+          </a:effectRef>
+          <a:fontRef idx="minor">
+            <a:schemeClr val="lt1"/>
+          </a:fontRef>
+        </p:style>
+        <p:txBody>
+          <a:bodyPr rtlCol="0" anchor="ctr"/>
+          <a:lstStyle/>
+          <a:p/>
+        </p:txBody>
+      </p:sp>
+      <p:sp>
+        <p:nvSpPr>
+          <p:cNvPr id="15" name="Oval 14"/>
+          <p:cNvSpPr/>
+          <p:nvPr/>
+        </p:nvSpPr>
+        <p:spPr>
+          <a:xfrm>
+            <a:off x="777240" y="4251960"/>
+            <a:ext cx="457200" cy="457200"/>
+          </a:xfrm>
+          <a:prstGeom prst="ellipse">
+            <a:avLst/>
+          </a:prstGeom>
+          <a:solidFill>
+            <a:srgbClr val="33C17A"/>
+          </a:solidFill>
+          <a:ln>
+            <a:noFill/>
+          </a:ln>
+          <a:effectLst/>
+        </p:spPr>
+        <p:style>
+          <a:lnRef idx="1">
+            <a:schemeClr val="accent1"/>
+          </a:lnRef>
+          <a:fillRef idx="3">
+            <a:schemeClr val="accent1"/>
+          </a:fillRef>
+          <a:effectRef idx="2">
+            <a:schemeClr val="accent1"/>
+          </a:effectRef>
+          <a:fontRef idx="minor">
+            <a:schemeClr val="lt1"/>
+          </a:fontRef>
+        </p:style>
+        <p:txBody>
+          <a:bodyPr rtlCol="0" anchor="ctr" lIns="0" rIns="0" tIns="0" bIns="0"/>
+          <a:lstStyle/>
+          <a:p>
+            <a:pPr algn="ctr"/>
+            <a:r>
+              <a:rPr sz="1500" b="1">
+                <a:solidFill>
+                  <a:srgbClr val="202122"/>
+                </a:solidFill>
+                <a:latin typeface="Calibri"/>
+              </a:rPr>
+              <a:t>3</a:t>
+            </a:r>
+          </a:p>
+        </p:txBody>
+      </p:sp>
+      <p:sp>
+        <p:nvSpPr>
+          <p:cNvPr id="16" name="TextBox 15"/>
+          <p:cNvSpPr txBox="1"/>
+          <p:nvPr/>
+        </p:nvSpPr>
+        <p:spPr>
+          <a:xfrm>
+            <a:off x="1371600" y="4224528"/>
+            <a:ext cx="4404207" cy="512064"/>
+          </a:xfrm>
+          <a:prstGeom prst="rect">
+            <a:avLst/>
+          </a:prstGeom>
+          <a:noFill/>
+        </p:spPr>
+        <p:txBody>
+          <a:bodyPr wrap="square" anchor="ctr" lIns="0" rIns="0" tIns="0" bIns="0"/>
+          <a:lstStyle/>
+          <a:p>
+            <a:pPr algn="l"/>
+            <a:r>
+              <a:rPr sz="1900" b="1" i="0">
+                <a:solidFill>
+                  <a:srgbClr val="03306E"/>
+                </a:solidFill>
+                <a:latin typeface="Calibri"/>
+              </a:rPr>
+              <a:t>Front-end</a:t>
+            </a:r>
+          </a:p>
+        </p:txBody>
+      </p:sp>
+      <p:sp>
+        <p:nvSpPr>
+          <p:cNvPr id="17" name="TextBox 16"/>
+          <p:cNvSpPr txBox="1"/>
+          <p:nvPr/>
+        </p:nvSpPr>
+        <p:spPr>
+          <a:xfrm>
+            <a:off x="777240" y="4892040"/>
+            <a:ext cx="4952847" cy="1143000"/>
+          </a:xfrm>
+          <a:prstGeom prst="rect">
+            <a:avLst/>
+          </a:prstGeom>
+          <a:noFill/>
+        </p:spPr>
+        <p:txBody>
+          <a:bodyPr wrap="square" anchor="t" lIns="0" rIns="0" tIns="0" bIns="0"/>
+          <a:lstStyle/>
+          <a:p>
+            <a:pPr algn="l"/>
+            <a:r>
+              <a:rPr sz="2000" b="0" i="0">
+                <a:solidFill>
+                  <a:srgbClr val="202122"/>
+                </a:solidFill>
+                <a:latin typeface="Calibri"/>
+              </a:rPr>
+              <a:t>Performance, browsers, OS, rendering, loading times, responsiveness.</a:t>
+            </a:r>
+          </a:p>
+        </p:txBody>
+      </p:sp>
+      <p:sp>
+        <p:nvSpPr>
+          <p:cNvPr id="18" name="Rounded Rectangle 17"/>
+          <p:cNvSpPr/>
+          <p:nvPr/>
+        </p:nvSpPr>
+        <p:spPr>
+          <a:xfrm>
+            <a:off x="6233007" y="4023360"/>
+            <a:ext cx="5410047" cy="2148840"/>
+          </a:xfrm>
+          <a:prstGeom prst="roundRect">
+            <a:avLst>
+              <a:gd name="adj" fmla="val 6000"/>
+            </a:avLst>
+          </a:prstGeom>
+          <a:solidFill>
+            <a:srgbClr val="EAF3FF"/>
+          </a:solidFill>
+          <a:ln>
+            <a:noFill/>
+          </a:ln>
+          <a:effectLst/>
+        </p:spPr>
+        <p:style>
+          <a:lnRef idx="1">
+            <a:schemeClr val="accent1"/>
+          </a:lnRef>
+          <a:fillRef idx="3">
+            <a:schemeClr val="accent1"/>
+          </a:fillRef>
+          <a:effectRef idx="2">
+            <a:schemeClr val="accent1"/>
+          </a:effectRef>
+          <a:fontRef idx="minor">
+            <a:schemeClr val="lt1"/>
+          </a:fontRef>
+        </p:style>
+        <p:txBody>
+          <a:bodyPr rtlCol="0" anchor="ctr"/>
+          <a:lstStyle/>
+          <a:p/>
+        </p:txBody>
+      </p:sp>
+      <p:sp>
+        <p:nvSpPr>
+          <p:cNvPr id="19" name="Oval 18"/>
+          <p:cNvSpPr/>
+          <p:nvPr/>
+        </p:nvSpPr>
+        <p:spPr>
+          <a:xfrm>
+            <a:off x="6461607" y="4251960"/>
+            <a:ext cx="457200" cy="457200"/>
+          </a:xfrm>
+          <a:prstGeom prst="ellipse">
+            <a:avLst/>
+          </a:prstGeom>
+          <a:solidFill>
+            <a:srgbClr val="33C17A"/>
+          </a:solidFill>
+          <a:ln>
+            <a:noFill/>
+          </a:ln>
+          <a:effectLst/>
+        </p:spPr>
+        <p:style>
+          <a:lnRef idx="1">
+            <a:schemeClr val="accent1"/>
+          </a:lnRef>
+          <a:fillRef idx="3">
+            <a:schemeClr val="accent1"/>
+          </a:fillRef>
+          <a:effectRef idx="2">
+            <a:schemeClr val="accent1"/>
+          </a:effectRef>
+          <a:fontRef idx="minor">
+            <a:schemeClr val="lt1"/>
+          </a:fontRef>
+        </p:style>
+        <p:txBody>
+          <a:bodyPr rtlCol="0" anchor="ctr" lIns="0" rIns="0" tIns="0" bIns="0"/>
+          <a:lstStyle/>
+          <a:p>
+            <a:pPr algn="ctr"/>
+            <a:r>
+              <a:rPr sz="1500" b="1">
+                <a:solidFill>
+                  <a:srgbClr val="202122"/>
+                </a:solidFill>
+                <a:latin typeface="Calibri"/>
+              </a:rPr>
+              <a:t>4</a:t>
+            </a:r>
+          </a:p>
+        </p:txBody>
+      </p:sp>
+      <p:sp>
+        <p:nvSpPr>
+          <p:cNvPr id="20" name="TextBox 19"/>
+          <p:cNvSpPr txBox="1"/>
+          <p:nvPr/>
+        </p:nvSpPr>
+        <p:spPr>
+          <a:xfrm>
+            <a:off x="7055967" y="4224528"/>
+            <a:ext cx="4404207" cy="512064"/>
+          </a:xfrm>
+          <a:prstGeom prst="rect">
+            <a:avLst/>
+          </a:prstGeom>
+          <a:noFill/>
+        </p:spPr>
+        <p:txBody>
+          <a:bodyPr wrap="square" anchor="ctr" lIns="0" rIns="0" tIns="0" bIns="0"/>
+          <a:lstStyle/>
+          <a:p>
+            <a:pPr algn="l"/>
+            <a:r>
+              <a:rPr sz="1900" b="1" i="0">
+                <a:solidFill>
+                  <a:srgbClr val="03306E"/>
+                </a:solidFill>
+                <a:latin typeface="Calibri"/>
+              </a:rPr>
+              <a:t>Security</a:t>
+            </a:r>
+          </a:p>
+        </p:txBody>
+      </p:sp>
+      <p:sp>
+        <p:nvSpPr>
+          <p:cNvPr id="21" name="TextBox 20"/>
+          <p:cNvSpPr txBox="1"/>
+          <p:nvPr/>
+        </p:nvSpPr>
+        <p:spPr>
+          <a:xfrm>
+            <a:off x="6461607" y="4892040"/>
+            <a:ext cx="4952847" cy="1143000"/>
+          </a:xfrm>
+          <a:prstGeom prst="rect">
+            <a:avLst/>
+          </a:prstGeom>
+          <a:noFill/>
+        </p:spPr>
+        <p:txBody>
+          <a:bodyPr wrap="square" anchor="t" lIns="0" rIns="0" tIns="0" bIns="0"/>
+          <a:lstStyle/>
+          <a:p>
+            <a:pPr algn="l"/>
+            <a:r>
+              <a:rPr sz="2000" b="0" i="0">
+                <a:solidFill>
+                  <a:srgbClr val="202122"/>
+                </a:solidFill>
+                <a:latin typeface="Calibri"/>
+              </a:rPr>
+              <a:t>Vulnerability scanning, static, dynamic and integration analysis.</a:t>
+            </a:r>
+          </a:p>
+        </p:txBody>
+      </p:sp>
+    </p:spTree>
+  </p:cSld>
+  <p:clrMapOvr>
+    <a:masterClrMapping/>
+  </p:clrMapOvr>
+</p:sld>
+</file>
+
+<file path=ppt/slides/slide5.xml><?xml version="1.0" encoding="utf-8"?>
+<p:sld xmlns:a="http://schemas.openxmlformats.org/drawingml/2006/main" xmlns:p="http://schemas.openxmlformats.org/presentationml/2006/main" xmlns:r="http://schemas.openxmlformats.org/officeDocument/2006/relationships">
+  <p:cSld>
+    <p:bg>
+      <p:bgPr>
+        <a:solidFill>
+          <a:srgbClr val="FFFFFF"/>
+        </a:solidFill>
+        <a:effectLst/>
+      </p:bgPr>
+    </p:bg>
+    <p:spTree>
+      <p:nvGrpSpPr>
+        <p:cNvPr id="1" name=""/>
+        <p:cNvGrpSpPr/>
+        <p:nvPr/>
+      </p:nvGrpSpPr>
+      <p:grpSpPr/>
+      <p:sp>
+        <p:nvSpPr>
+          <p:cNvPr id="2" name="TextBox 1"/>
+          <p:cNvSpPr txBox="1"/>
+          <p:nvPr/>
+        </p:nvSpPr>
+        <p:spPr>
+          <a:xfrm>
+            <a:off x="548640" y="320040"/>
+            <a:ext cx="11094415" cy="274320"/>
+          </a:xfrm>
+          <a:prstGeom prst="rect">
+            <a:avLst/>
+          </a:prstGeom>
+          <a:noFill/>
+        </p:spPr>
+        <p:txBody>
+          <a:bodyPr wrap="square" anchor="t" lIns="0" rIns="0" tIns="0" bIns="0"/>
+          <a:lstStyle/>
+          <a:p>
+            <a:pPr algn="l"/>
+            <a:r>
+              <a:rPr sz="1100" b="1" i="0">
+                <a:solidFill>
+                  <a:srgbClr val="54595D"/>
+                </a:solidFill>
+                <a:latin typeface="Calibri"/>
+              </a:rPr>
+              <a:t>OCCUPATIONAL SPECIALISM  ·  Specialism Content Area 7</a:t>
+            </a:r>
+          </a:p>
+        </p:txBody>
+      </p:sp>
+      <p:sp>
+        <p:nvSpPr>
+          <p:cNvPr id="3" name="TextBox 2"/>
+          <p:cNvSpPr txBox="1"/>
+          <p:nvPr/>
+        </p:nvSpPr>
+        <p:spPr>
+          <a:xfrm>
+            <a:off x="548640" y="566928"/>
+            <a:ext cx="11094415" cy="822960"/>
+          </a:xfrm>
+          <a:prstGeom prst="rect">
+            <a:avLst/>
+          </a:prstGeom>
+          <a:noFill/>
+        </p:spPr>
+        <p:txBody>
+          <a:bodyPr wrap="square" anchor="ctr" lIns="0" rIns="0" tIns="0" bIns="0"/>
+          <a:lstStyle/>
+          <a:p>
+            <a:pPr algn="l"/>
+            <a:r>
+              <a:rPr sz="3200" b="1" i="0">
+                <a:solidFill>
+                  <a:srgbClr val="03306E"/>
+                </a:solidFill>
+                <a:latin typeface="Cambria"/>
+              </a:rPr>
+              <a:t>Quick check: Types of testing</a:t>
+            </a:r>
+          </a:p>
+        </p:txBody>
+      </p:sp>
+      <p:sp>
+        <p:nvSpPr>
+          <p:cNvPr id="4" name="TextBox 3"/>
+          <p:cNvSpPr txBox="1"/>
+          <p:nvPr/>
+        </p:nvSpPr>
+        <p:spPr>
+          <a:xfrm>
+            <a:off x="548640" y="6446520"/>
+            <a:ext cx="8229600" cy="274320"/>
+          </a:xfrm>
+          <a:prstGeom prst="rect">
+            <a:avLst/>
+          </a:prstGeom>
+          <a:noFill/>
+        </p:spPr>
+        <p:txBody>
+          <a:bodyPr wrap="square" anchor="t" lIns="0" rIns="0" tIns="0" bIns="0"/>
+          <a:lstStyle/>
+          <a:p>
+            <a:pPr algn="l"/>
+            <a:r>
+              <a:rPr sz="1000" b="0" i="0">
+                <a:solidFill>
+                  <a:srgbClr val="54595D"/>
+                </a:solidFill>
+                <a:latin typeface="Calibri"/>
+              </a:rPr>
+              <a:t>Digital Software Development T Level  ·  Testing a Software Solution</a:t>
+            </a:r>
+          </a:p>
+        </p:txBody>
+      </p:sp>
+      <p:sp>
+        <p:nvSpPr>
+          <p:cNvPr id="5" name="TextBox 4"/>
+          <p:cNvSpPr txBox="1"/>
+          <p:nvPr/>
+        </p:nvSpPr>
+        <p:spPr>
+          <a:xfrm>
+            <a:off x="10728655" y="6446520"/>
+            <a:ext cx="914400" cy="274320"/>
+          </a:xfrm>
+          <a:prstGeom prst="rect">
+            <a:avLst/>
+          </a:prstGeom>
+          <a:noFill/>
+        </p:spPr>
+        <p:txBody>
+          <a:bodyPr wrap="square" anchor="t" lIns="0" rIns="0" tIns="0" bIns="0"/>
+          <a:lstStyle/>
+          <a:p>
+            <a:pPr algn="r"/>
+            <a:r>
+              <a:rPr sz="1000" b="0" i="0">
+                <a:solidFill>
+                  <a:srgbClr val="54595D"/>
+                </a:solidFill>
+                <a:latin typeface="Calibri"/>
+              </a:rPr>
+              <a:t>5</a:t>
+            </a:r>
+          </a:p>
+        </p:txBody>
+      </p:sp>
+      <p:sp>
+        <p:nvSpPr>
+          <p:cNvPr id="6" name="Oval 5"/>
+          <p:cNvSpPr/>
+          <p:nvPr/>
+        </p:nvSpPr>
+        <p:spPr>
+          <a:xfrm>
+            <a:off x="548640" y="1691640"/>
+            <a:ext cx="502920" cy="502920"/>
+          </a:xfrm>
+          <a:prstGeom prst="ellipse">
+            <a:avLst/>
+          </a:prstGeom>
+          <a:solidFill>
+            <a:srgbClr val="33C17A"/>
+          </a:solidFill>
+          <a:ln>
+            <a:noFill/>
+          </a:ln>
+          <a:effectLst/>
+        </p:spPr>
+        <p:style>
+          <a:lnRef idx="1">
+            <a:schemeClr val="accent1"/>
+          </a:lnRef>
+          <a:fillRef idx="3">
+            <a:schemeClr val="accent1"/>
+          </a:fillRef>
+          <a:effectRef idx="2">
+            <a:schemeClr val="accent1"/>
+          </a:effectRef>
+          <a:fontRef idx="minor">
+            <a:schemeClr val="lt1"/>
+          </a:fontRef>
+        </p:style>
+        <p:txBody>
+          <a:bodyPr rtlCol="0" anchor="ctr" lIns="0" rIns="0" tIns="0" bIns="0"/>
+          <a:lstStyle/>
+          <a:p>
+            <a:pPr algn="ctr"/>
+            <a:r>
+              <a:rPr sz="1600" b="1">
+                <a:solidFill>
+                  <a:srgbClr val="202122"/>
+                </a:solidFill>
+                <a:latin typeface="Calibri"/>
+              </a:rPr>
+              <a:t>1</a:t>
+            </a:r>
+          </a:p>
+        </p:txBody>
+      </p:sp>
+      <p:sp>
+        <p:nvSpPr>
+          <p:cNvPr id="7" name="TextBox 6"/>
+          <p:cNvSpPr txBox="1"/>
+          <p:nvPr/>
+        </p:nvSpPr>
+        <p:spPr>
+          <a:xfrm>
+            <a:off x="1371600" y="1645920"/>
+            <a:ext cx="10271455" cy="1188720"/>
+          </a:xfrm>
+          <a:prstGeom prst="rect">
+            <a:avLst/>
+          </a:prstGeom>
+          <a:noFill/>
+        </p:spPr>
+        <p:txBody>
+          <a:bodyPr wrap="square" anchor="t" lIns="0" rIns="0" tIns="0" bIns="0"/>
+          <a:lstStyle/>
+          <a:p>
+            <a:pPr algn="l"/>
+            <a:r>
+              <a:rPr sz="2400" b="0" i="0">
+                <a:solidFill>
+                  <a:srgbClr val="202122"/>
+                </a:solidFill>
+                <a:latin typeface="Calibri"/>
+              </a:rPr>
+              <a:t>What is a smoke test?</a:t>
+            </a:r>
+          </a:p>
+        </p:txBody>
+      </p:sp>
+      <p:sp>
+        <p:nvSpPr>
+          <p:cNvPr id="8" name="Oval 7"/>
+          <p:cNvSpPr/>
+          <p:nvPr/>
+        </p:nvSpPr>
+        <p:spPr>
+          <a:xfrm>
+            <a:off x="548640" y="3108960"/>
+            <a:ext cx="502920" cy="502920"/>
+          </a:xfrm>
+          <a:prstGeom prst="ellipse">
+            <a:avLst/>
+          </a:prstGeom>
+          <a:solidFill>
+            <a:srgbClr val="33C17A"/>
+          </a:solidFill>
+          <a:ln>
+            <a:noFill/>
+          </a:ln>
+          <a:effectLst/>
+        </p:spPr>
+        <p:style>
+          <a:lnRef idx="1">
+            <a:schemeClr val="accent1"/>
+          </a:lnRef>
+          <a:fillRef idx="3">
+            <a:schemeClr val="accent1"/>
+          </a:fillRef>
+          <a:effectRef idx="2">
+            <a:schemeClr val="accent1"/>
+          </a:effectRef>
+          <a:fontRef idx="minor">
+            <a:schemeClr val="lt1"/>
+          </a:fontRef>
+        </p:style>
+        <p:txBody>
+          <a:bodyPr rtlCol="0" anchor="ctr" lIns="0" rIns="0" tIns="0" bIns="0"/>
+          <a:lstStyle/>
+          <a:p>
+            <a:pPr algn="ctr"/>
+            <a:r>
+              <a:rPr sz="1600" b="1">
+                <a:solidFill>
+                  <a:srgbClr val="202122"/>
+                </a:solidFill>
+                <a:latin typeface="Calibri"/>
+              </a:rPr>
+              <a:t>2</a:t>
+            </a:r>
+          </a:p>
+        </p:txBody>
+      </p:sp>
+      <p:sp>
+        <p:nvSpPr>
+          <p:cNvPr id="9" name="TextBox 8"/>
+          <p:cNvSpPr txBox="1"/>
+          <p:nvPr/>
+        </p:nvSpPr>
+        <p:spPr>
+          <a:xfrm>
+            <a:off x="1371600" y="3063240"/>
+            <a:ext cx="10271455" cy="1188720"/>
+          </a:xfrm>
+          <a:prstGeom prst="rect">
+            <a:avLst/>
+          </a:prstGeom>
+          <a:noFill/>
+        </p:spPr>
+        <p:txBody>
+          <a:bodyPr wrap="square" anchor="t" lIns="0" rIns="0" tIns="0" bIns="0"/>
+          <a:lstStyle/>
+          <a:p>
+            <a:pPr algn="l"/>
+            <a:r>
+              <a:rPr sz="2400" b="0" i="0">
+                <a:solidFill>
+                  <a:srgbClr val="202122"/>
+                </a:solidFill>
+                <a:latin typeface="Calibri"/>
+              </a:rPr>
+              <a:t>What is static analysis?</a:t>
+            </a:r>
+          </a:p>
+        </p:txBody>
+      </p:sp>
+      <p:sp>
+        <p:nvSpPr>
+          <p:cNvPr id="10" name="Oval 9"/>
+          <p:cNvSpPr/>
+          <p:nvPr/>
+        </p:nvSpPr>
+        <p:spPr>
+          <a:xfrm>
+            <a:off x="548640" y="4526280"/>
+            <a:ext cx="502920" cy="502920"/>
+          </a:xfrm>
+          <a:prstGeom prst="ellipse">
+            <a:avLst/>
+          </a:prstGeom>
+          <a:solidFill>
+            <a:srgbClr val="33C17A"/>
+          </a:solidFill>
+          <a:ln>
+            <a:noFill/>
+          </a:ln>
+          <a:effectLst/>
+        </p:spPr>
+        <p:style>
+          <a:lnRef idx="1">
+            <a:schemeClr val="accent1"/>
+          </a:lnRef>
+          <a:fillRef idx="3">
+            <a:schemeClr val="accent1"/>
+          </a:fillRef>
+          <a:effectRef idx="2">
+            <a:schemeClr val="accent1"/>
+          </a:effectRef>
+          <a:fontRef idx="minor">
+            <a:schemeClr val="lt1"/>
+          </a:fontRef>
+        </p:style>
+        <p:txBody>
+          <a:bodyPr rtlCol="0" anchor="ctr" lIns="0" rIns="0" tIns="0" bIns="0"/>
+          <a:lstStyle/>
+          <a:p>
+            <a:pPr algn="ctr"/>
+            <a:r>
+              <a:rPr sz="1600" b="1">
+                <a:solidFill>
+                  <a:srgbClr val="202122"/>
+                </a:solidFill>
+                <a:latin typeface="Calibri"/>
+              </a:rPr>
+              <a:t>3</a:t>
+            </a:r>
+          </a:p>
+        </p:txBody>
+      </p:sp>
+      <p:sp>
+        <p:nvSpPr>
+          <p:cNvPr id="11" name="TextBox 10"/>
+          <p:cNvSpPr txBox="1"/>
+          <p:nvPr/>
+        </p:nvSpPr>
+        <p:spPr>
+          <a:xfrm>
+            <a:off x="1371600" y="4480560"/>
+            <a:ext cx="10271455" cy="1188720"/>
+          </a:xfrm>
+          <a:prstGeom prst="rect">
+            <a:avLst/>
+          </a:prstGeom>
+          <a:noFill/>
+        </p:spPr>
+        <p:txBody>
+          <a:bodyPr wrap="square" anchor="t" lIns="0" rIns="0" tIns="0" bIns="0"/>
+          <a:lstStyle/>
+          <a:p>
+            <a:pPr algn="l"/>
+            <a:r>
+              <a:rPr sz="2400" b="0" i="0">
+                <a:solidFill>
+                  <a:srgbClr val="202122"/>
+                </a:solidFill>
+                <a:latin typeface="Calibri"/>
+              </a:rPr>
+              <a:t>Give one front-end test.</a:t>
+            </a:r>
+          </a:p>
+        </p:txBody>
+      </p:sp>
+      <p:sp>
+        <p:nvSpPr>
+          <p:cNvPr id="12" name="TextBox 11"/>
+          <p:cNvSpPr txBox="1"/>
+          <p:nvPr/>
+        </p:nvSpPr>
+        <p:spPr>
+          <a:xfrm>
+            <a:off x="548640" y="5852160"/>
+            <a:ext cx="11094415" cy="365760"/>
+          </a:xfrm>
+          <a:prstGeom prst="rect">
+            <a:avLst/>
+          </a:prstGeom>
+          <a:noFill/>
+        </p:spPr>
+        <p:txBody>
+          <a:bodyPr wrap="square" anchor="t" lIns="0" rIns="0" tIns="0" bIns="0"/>
+          <a:lstStyle/>
+          <a:p>
+            <a:pPr algn="l"/>
+            <a:r>
+              <a:rPr sz="1300" b="0" i="1">
+                <a:solidFill>
+                  <a:srgbClr val="54595D"/>
+                </a:solidFill>
+                <a:latin typeface="Calibri"/>
+              </a:rPr>
+              <a:t>Answer on mini whiteboards or in your book. Answers are in the speaker notes.</a:t>
+            </a:r>
+          </a:p>
+        </p:txBody>
+      </p:sp>
+    </p:spTree>
+  </p:cSld>
+  <p:clrMapOvr>
+    <a:masterClrMapping/>
+  </p:clrMapOvr>
+</p:sld>
+</file>
+
+<file path=ppt/slides/slide6.xml><?xml version="1.0" encoding="utf-8"?>
+<p:sld xmlns:a="http://schemas.openxmlformats.org/drawingml/2006/main" xmlns:p="http://schemas.openxmlformats.org/presentationml/2006/main" xmlns:r="http://schemas.openxmlformats.org/officeDocument/2006/relationships">
+  <p:cSld>
+    <p:bg>
+      <p:bgPr>
+        <a:solidFill>
+          <a:srgbClr val="FFFFFF"/>
+        </a:solidFill>
+        <a:effectLst/>
+      </p:bgPr>
+    </p:bg>
+    <p:spTree>
+      <p:nvGrpSpPr>
+        <p:cNvPr id="1" name=""/>
+        <p:cNvGrpSpPr/>
+        <p:nvPr/>
+      </p:nvGrpSpPr>
+      <p:grpSpPr/>
+      <p:sp>
+        <p:nvSpPr>
+          <p:cNvPr id="2" name="TextBox 1"/>
+          <p:cNvSpPr txBox="1"/>
+          <p:nvPr/>
+        </p:nvSpPr>
+        <p:spPr>
+          <a:xfrm>
+            <a:off x="548640" y="320040"/>
+            <a:ext cx="11094415" cy="274320"/>
+          </a:xfrm>
+          <a:prstGeom prst="rect">
+            <a:avLst/>
+          </a:prstGeom>
+          <a:noFill/>
+        </p:spPr>
+        <p:txBody>
+          <a:bodyPr wrap="square" anchor="t" lIns="0" rIns="0" tIns="0" bIns="0"/>
+          <a:lstStyle/>
+          <a:p>
+            <a:pPr algn="l"/>
+            <a:r>
+              <a:rPr sz="1100" b="1" i="0">
+                <a:solidFill>
+                  <a:srgbClr val="54595D"/>
+                </a:solidFill>
+                <a:latin typeface="Calibri"/>
+              </a:rPr>
+              <a:t>OCCUPATIONAL SPECIALISM  ·  Specialism Content Area 7</a:t>
+            </a:r>
+          </a:p>
+        </p:txBody>
+      </p:sp>
+      <p:sp>
+        <p:nvSpPr>
+          <p:cNvPr id="3" name="TextBox 2"/>
+          <p:cNvSpPr txBox="1"/>
+          <p:nvPr/>
+        </p:nvSpPr>
+        <p:spPr>
+          <a:xfrm>
+            <a:off x="548640" y="566928"/>
+            <a:ext cx="11094415" cy="822960"/>
+          </a:xfrm>
+          <a:prstGeom prst="rect">
+            <a:avLst/>
+          </a:prstGeom>
+          <a:noFill/>
+        </p:spPr>
+        <p:txBody>
+          <a:bodyPr wrap="square" anchor="ctr" lIns="0" rIns="0" tIns="0" bIns="0"/>
+          <a:lstStyle/>
+          <a:p>
+            <a:pPr algn="l"/>
+            <a:r>
+              <a:rPr sz="3200" b="1" i="0">
+                <a:solidFill>
+                  <a:srgbClr val="03306E"/>
+                </a:solidFill>
+                <a:latin typeface="Cambria"/>
+              </a:rPr>
+              <a:t>Testing techniques</a:t>
+            </a:r>
+          </a:p>
+        </p:txBody>
+      </p:sp>
+      <p:sp>
+        <p:nvSpPr>
+          <p:cNvPr id="4" name="TextBox 3"/>
+          <p:cNvSpPr txBox="1"/>
+          <p:nvPr/>
+        </p:nvSpPr>
+        <p:spPr>
+          <a:xfrm>
+            <a:off x="548640" y="6446520"/>
+            <a:ext cx="8229600" cy="274320"/>
+          </a:xfrm>
+          <a:prstGeom prst="rect">
+            <a:avLst/>
+          </a:prstGeom>
+          <a:noFill/>
+        </p:spPr>
+        <p:txBody>
+          <a:bodyPr wrap="square" anchor="t" lIns="0" rIns="0" tIns="0" bIns="0"/>
+          <a:lstStyle/>
+          <a:p>
+            <a:pPr algn="l"/>
+            <a:r>
+              <a:rPr sz="1000" b="0" i="0">
+                <a:solidFill>
+                  <a:srgbClr val="54595D"/>
+                </a:solidFill>
+                <a:latin typeface="Calibri"/>
+              </a:rPr>
+              <a:t>Digital Software Development T Level  ·  Testing a Software Solution</a:t>
+            </a:r>
+          </a:p>
+        </p:txBody>
+      </p:sp>
+      <p:sp>
+        <p:nvSpPr>
+          <p:cNvPr id="5" name="TextBox 4"/>
+          <p:cNvSpPr txBox="1"/>
+          <p:nvPr/>
+        </p:nvSpPr>
+        <p:spPr>
+          <a:xfrm>
+            <a:off x="10728655" y="6446520"/>
+            <a:ext cx="914400" cy="274320"/>
+          </a:xfrm>
+          <a:prstGeom prst="rect">
+            <a:avLst/>
+          </a:prstGeom>
+          <a:noFill/>
+        </p:spPr>
+        <p:txBody>
+          <a:bodyPr wrap="square" anchor="t" lIns="0" rIns="0" tIns="0" bIns="0"/>
+          <a:lstStyle/>
+          <a:p>
+            <a:pPr algn="r"/>
+            <a:r>
+              <a:rPr sz="1000" b="0" i="0">
+                <a:solidFill>
+                  <a:srgbClr val="54595D"/>
+                </a:solidFill>
+                <a:latin typeface="Calibri"/>
+              </a:rPr>
+              <a:t>6</a:t>
+            </a:r>
+          </a:p>
+        </p:txBody>
+      </p:sp>
+      <p:sp>
+        <p:nvSpPr>
+          <p:cNvPr id="6" name="TextBox 5"/>
+          <p:cNvSpPr txBox="1"/>
+          <p:nvPr/>
+        </p:nvSpPr>
+        <p:spPr>
+          <a:xfrm>
+            <a:off x="548640" y="1554480"/>
+            <a:ext cx="6720840" cy="4617720"/>
+          </a:xfrm>
+          <a:prstGeom prst="rect">
+            <a:avLst/>
+          </a:prstGeom>
+          <a:noFill/>
+        </p:spPr>
+        <p:txBody>
+          <a:bodyPr wrap="square" lIns="0" rIns="0" tIns="0" bIns="0">
+            <a:spAutoFit/>
+          </a:bodyPr>
+          <a:lstStyle/>
+          <a:p>
+            <a:pPr>
+              <a:spcAft>
+                <a:spcPts val="1320"/>
+              </a:spcAft>
+            </a:pPr>
+            <a:r>
+              <a:rPr sz="2200" b="0">
+                <a:solidFill>
+                  <a:srgbClr val="202122"/>
+                </a:solidFill>
+                <a:latin typeface="Calibri"/>
+              </a:rPr>
+              <a:t>Acceptance testing checks the software meets the client's requirements. Alpha testing is early internal testing; beta testing gives a limited group of real external users the software before full release.</a:t>
+            </a:r>
+          </a:p>
+          <a:p>
+            <a:pPr>
+              <a:spcAft>
+                <a:spcPts val="1320"/>
+              </a:spcAft>
+            </a:pPr>
+            <a:r>
+              <a:rPr sz="2200" b="0">
+                <a:solidFill>
+                  <a:srgbClr val="202122"/>
+                </a:solidFill>
+                <a:latin typeface="Calibri"/>
+              </a:rPr>
+              <a:t>Closed box (black box) testing uses only inputs and outputs, without looking at the code. Open box (white box) testing designs tests from the code's structure, so every path is exercised.</a:t>
+            </a:r>
+          </a:p>
+          <a:p>
+            <a:pPr>
+              <a:spcAft>
+                <a:spcPts val="1320"/>
+              </a:spcAft>
+            </a:pPr>
+            <a:r>
+              <a:rPr sz="2200" b="0">
+                <a:solidFill>
+                  <a:srgbClr val="202122"/>
+                </a:solidFill>
+                <a:latin typeface="Calibri"/>
+              </a:rPr>
+              <a:t>Tests can be manual or automatic, and AI tools can help generate tests.</a:t>
+            </a:r>
+          </a:p>
+        </p:txBody>
+      </p:sp>
+      <p:sp>
+        <p:nvSpPr>
+          <p:cNvPr id="7" name="Rounded Rectangle 6"/>
+          <p:cNvSpPr/>
+          <p:nvPr/>
+        </p:nvSpPr>
+        <p:spPr>
+          <a:xfrm>
+            <a:off x="7772400" y="1554480"/>
+            <a:ext cx="3867912" cy="4526280"/>
+          </a:xfrm>
+          <a:prstGeom prst="roundRect">
+            <a:avLst>
+              <a:gd name="adj" fmla="val 8000"/>
+            </a:avLst>
+          </a:prstGeom>
+          <a:solidFill>
+            <a:srgbClr val="03306E"/>
+          </a:solidFill>
+          <a:ln>
+            <a:noFill/>
+          </a:ln>
+          <a:effectLst/>
+        </p:spPr>
+        <p:style>
+          <a:lnRef idx="1">
+            <a:schemeClr val="accent1"/>
+          </a:lnRef>
+          <a:fillRef idx="3">
+            <a:schemeClr val="accent1"/>
+          </a:fillRef>
+          <a:effectRef idx="2">
+            <a:schemeClr val="accent1"/>
+          </a:effectRef>
+          <a:fontRef idx="minor">
+            <a:schemeClr val="lt1"/>
+          </a:fontRef>
+        </p:style>
+        <p:txBody>
+          <a:bodyPr rtlCol="0" anchor="ctr"/>
+          <a:lstStyle/>
+          <a:p/>
+        </p:txBody>
+      </p:sp>
+      <p:sp>
+        <p:nvSpPr>
+          <p:cNvPr id="8" name="Oval 7"/>
+          <p:cNvSpPr/>
+          <p:nvPr/>
+        </p:nvSpPr>
+        <p:spPr>
+          <a:xfrm>
+            <a:off x="8046720" y="1828800"/>
+            <a:ext cx="548640" cy="548640"/>
+          </a:xfrm>
+          <a:prstGeom prst="ellipse">
+            <a:avLst/>
+          </a:prstGeom>
+          <a:solidFill>
+            <a:srgbClr val="33C17A"/>
+          </a:solidFill>
+          <a:ln>
+            <a:noFill/>
+          </a:ln>
+          <a:effectLst/>
+        </p:spPr>
+        <p:style>
+          <a:lnRef idx="1">
+            <a:schemeClr val="accent1"/>
+          </a:lnRef>
+          <a:fillRef idx="3">
+            <a:schemeClr val="accent1"/>
+          </a:fillRef>
+          <a:effectRef idx="2">
+            <a:schemeClr val="accent1"/>
+          </a:effectRef>
+          <a:fontRef idx="minor">
+            <a:schemeClr val="lt1"/>
+          </a:fontRef>
+        </p:style>
+        <p:txBody>
+          <a:bodyPr rtlCol="0" anchor="ctr" lIns="0" rIns="0" tIns="0" bIns="0"/>
+          <a:lstStyle/>
+          <a:p>
+            <a:pPr algn="ctr"/>
+            <a:r>
+              <a:rPr sz="1300" b="1">
+                <a:solidFill>
+                  <a:srgbClr val="202122"/>
+                </a:solidFill>
+                <a:latin typeface="Calibri"/>
+              </a:rPr>
+              <a:t>e.g.</a:t>
+            </a:r>
+          </a:p>
+        </p:txBody>
+      </p:sp>
+      <p:sp>
+        <p:nvSpPr>
+          <p:cNvPr id="9" name="TextBox 8"/>
+          <p:cNvSpPr txBox="1"/>
+          <p:nvPr/>
+        </p:nvSpPr>
+        <p:spPr>
+          <a:xfrm>
+            <a:off x="8046720" y="2560320"/>
+            <a:ext cx="3291840" cy="365760"/>
+          </a:xfrm>
+          <a:prstGeom prst="rect">
+            <a:avLst/>
+          </a:prstGeom>
+          <a:noFill/>
+        </p:spPr>
+        <p:txBody>
+          <a:bodyPr wrap="square" anchor="t" lIns="0" rIns="0" tIns="0" bIns="0"/>
+          <a:lstStyle/>
+          <a:p>
+            <a:pPr algn="l"/>
+            <a:r>
+              <a:rPr sz="1300" b="1" i="0">
+                <a:solidFill>
+                  <a:srgbClr val="A9C8F0"/>
+                </a:solidFill>
+                <a:latin typeface="Calibri"/>
+              </a:rPr>
+              <a:t>EXAMPLE</a:t>
+            </a:r>
+          </a:p>
+        </p:txBody>
+      </p:sp>
+      <p:sp>
+        <p:nvSpPr>
+          <p:cNvPr id="10" name="TextBox 9"/>
+          <p:cNvSpPr txBox="1"/>
+          <p:nvPr/>
+        </p:nvSpPr>
+        <p:spPr>
+          <a:xfrm>
+            <a:off x="8046720" y="2971800"/>
+            <a:ext cx="3291840" cy="2971800"/>
+          </a:xfrm>
+          <a:prstGeom prst="rect">
+            <a:avLst/>
+          </a:prstGeom>
+          <a:noFill/>
+        </p:spPr>
+        <p:txBody>
+          <a:bodyPr wrap="square" anchor="t" lIns="0" rIns="0" tIns="0" bIns="0"/>
+          <a:lstStyle/>
+          <a:p>
+            <a:pPr algn="l"/>
+            <a:r>
+              <a:rPr sz="1900" b="0" i="0">
+                <a:solidFill>
+                  <a:srgbClr val="FFFFFF"/>
+                </a:solidFill>
+                <a:latin typeface="Cambria"/>
+              </a:rPr>
+              <a:t>A game is alpha tested by staff, then beta tested by 500 players who report bugs before launch.</a:t>
+            </a:r>
+          </a:p>
+        </p:txBody>
+      </p:sp>
+    </p:spTree>
+  </p:cSld>
+  <p:clrMapOvr>
+    <a:masterClrMapping/>
+  </p:clrMapOvr>
+</p:sld>
+</file>
+
+<file path=ppt/slides/slide7.xml><?xml version="1.0" encoding="utf-8"?>
+<p:sld xmlns:a="http://schemas.openxmlformats.org/drawingml/2006/main" xmlns:p="http://schemas.openxmlformats.org/presentationml/2006/main" xmlns:r="http://schemas.openxmlformats.org/officeDocument/2006/relationships">
+  <p:cSld>
+    <p:bg>
+      <p:bgPr>
+        <a:solidFill>
+          <a:srgbClr val="FFFFFF"/>
+        </a:solidFill>
+        <a:effectLst/>
+      </p:bgPr>
+    </p:bg>
+    <p:spTree>
+      <p:nvGrpSpPr>
+        <p:cNvPr id="1" name=""/>
+        <p:cNvGrpSpPr/>
+        <p:nvPr/>
+      </p:nvGrpSpPr>
+      <p:grpSpPr/>
+      <p:sp>
+        <p:nvSpPr>
+          <p:cNvPr id="2" name="TextBox 1"/>
+          <p:cNvSpPr txBox="1"/>
+          <p:nvPr/>
+        </p:nvSpPr>
+        <p:spPr>
+          <a:xfrm>
+            <a:off x="548640" y="320040"/>
+            <a:ext cx="11094415" cy="274320"/>
+          </a:xfrm>
+          <a:prstGeom prst="rect">
+            <a:avLst/>
+          </a:prstGeom>
+          <a:noFill/>
+        </p:spPr>
+        <p:txBody>
+          <a:bodyPr wrap="square" anchor="t" lIns="0" rIns="0" tIns="0" bIns="0"/>
+          <a:lstStyle/>
+          <a:p>
+            <a:pPr algn="l"/>
+            <a:r>
+              <a:rPr sz="1100" b="1" i="0">
+                <a:solidFill>
+                  <a:srgbClr val="54595D"/>
+                </a:solidFill>
+                <a:latin typeface="Calibri"/>
+              </a:rPr>
+              <a:t>OCCUPATIONAL SPECIALISM  ·  Specialism Content Area 7</a:t>
+            </a:r>
+          </a:p>
+        </p:txBody>
+      </p:sp>
+      <p:sp>
+        <p:nvSpPr>
+          <p:cNvPr id="3" name="TextBox 2"/>
+          <p:cNvSpPr txBox="1"/>
+          <p:nvPr/>
+        </p:nvSpPr>
+        <p:spPr>
+          <a:xfrm>
+            <a:off x="548640" y="566928"/>
+            <a:ext cx="11094415" cy="822960"/>
+          </a:xfrm>
+          <a:prstGeom prst="rect">
+            <a:avLst/>
+          </a:prstGeom>
+          <a:noFill/>
+        </p:spPr>
+        <p:txBody>
+          <a:bodyPr wrap="square" anchor="ctr" lIns="0" rIns="0" tIns="0" bIns="0"/>
+          <a:lstStyle/>
+          <a:p>
+            <a:pPr algn="l"/>
+            <a:r>
+              <a:rPr sz="3200" b="1" i="0">
+                <a:solidFill>
+                  <a:srgbClr val="03306E"/>
+                </a:solidFill>
+                <a:latin typeface="Cambria"/>
+              </a:rPr>
+              <a:t>Testing techniques</a:t>
+            </a:r>
+          </a:p>
+        </p:txBody>
+      </p:sp>
+      <p:sp>
+        <p:nvSpPr>
+          <p:cNvPr id="4" name="TextBox 3"/>
+          <p:cNvSpPr txBox="1"/>
+          <p:nvPr/>
+        </p:nvSpPr>
+        <p:spPr>
+          <a:xfrm>
+            <a:off x="548640" y="6446520"/>
+            <a:ext cx="8229600" cy="274320"/>
+          </a:xfrm>
+          <a:prstGeom prst="rect">
+            <a:avLst/>
+          </a:prstGeom>
+          <a:noFill/>
+        </p:spPr>
+        <p:txBody>
+          <a:bodyPr wrap="square" anchor="t" lIns="0" rIns="0" tIns="0" bIns="0"/>
+          <a:lstStyle/>
+          <a:p>
+            <a:pPr algn="l"/>
+            <a:r>
+              <a:rPr sz="1000" b="0" i="0">
+                <a:solidFill>
+                  <a:srgbClr val="54595D"/>
+                </a:solidFill>
+                <a:latin typeface="Calibri"/>
+              </a:rPr>
+              <a:t>Digital Software Development T Level  ·  Testing a Software Solution</a:t>
+            </a:r>
+          </a:p>
+        </p:txBody>
+      </p:sp>
+      <p:sp>
+        <p:nvSpPr>
+          <p:cNvPr id="5" name="TextBox 4"/>
+          <p:cNvSpPr txBox="1"/>
+          <p:nvPr/>
+        </p:nvSpPr>
+        <p:spPr>
+          <a:xfrm>
+            <a:off x="10728655" y="6446520"/>
+            <a:ext cx="914400" cy="274320"/>
+          </a:xfrm>
+          <a:prstGeom prst="rect">
+            <a:avLst/>
+          </a:prstGeom>
+          <a:noFill/>
+        </p:spPr>
+        <p:txBody>
+          <a:bodyPr wrap="square" anchor="t" lIns="0" rIns="0" tIns="0" bIns="0"/>
+          <a:lstStyle/>
+          <a:p>
+            <a:pPr algn="r"/>
+            <a:r>
+              <a:rPr sz="1000" b="0" i="0">
+                <a:solidFill>
+                  <a:srgbClr val="54595D"/>
+                </a:solidFill>
+                <a:latin typeface="Calibri"/>
+              </a:rPr>
+              <a:t>7</a:t>
             </a:r>
           </a:p>
         </p:txBody>
@@ -5993,2027 +11299,6 @@
 </p:sld>
 </file>
 
-<file path=ppt/slides/slide5.xml><?xml version="1.0" encoding="utf-8"?>
-<p:sld xmlns:a="http://schemas.openxmlformats.org/drawingml/2006/main" xmlns:p="http://schemas.openxmlformats.org/presentationml/2006/main" xmlns:r="http://schemas.openxmlformats.org/officeDocument/2006/relationships">
-  <p:cSld>
-    <p:bg>
-      <p:bgPr>
-        <a:solidFill>
-          <a:srgbClr val="FFFFFF"/>
-        </a:solidFill>
-        <a:effectLst/>
-      </p:bgPr>
-    </p:bg>
-    <p:spTree>
-      <p:nvGrpSpPr>
-        <p:cNvPr id="1" name=""/>
-        <p:cNvGrpSpPr/>
-        <p:nvPr/>
-      </p:nvGrpSpPr>
-      <p:grpSpPr/>
-      <p:sp>
-        <p:nvSpPr>
-          <p:cNvPr id="2" name="TextBox 1"/>
-          <p:cNvSpPr txBox="1"/>
-          <p:nvPr/>
-        </p:nvSpPr>
-        <p:spPr>
-          <a:xfrm>
-            <a:off x="548640" y="320040"/>
-            <a:ext cx="11094415" cy="274320"/>
-          </a:xfrm>
-          <a:prstGeom prst="rect">
-            <a:avLst/>
-          </a:prstGeom>
-          <a:noFill/>
-        </p:spPr>
-        <p:txBody>
-          <a:bodyPr wrap="square" anchor="t" lIns="0" rIns="0" tIns="0" bIns="0"/>
-          <a:lstStyle/>
-          <a:p>
-            <a:pPr algn="l"/>
-            <a:r>
-              <a:rPr sz="1100" b="1" i="0">
-                <a:solidFill>
-                  <a:srgbClr val="54595D"/>
-                </a:solidFill>
-                <a:latin typeface="Calibri"/>
-              </a:rPr>
-              <a:t>OCCUPATIONAL SPECIALISM  ·  Specialism Content Area 7</a:t>
-            </a:r>
-          </a:p>
-        </p:txBody>
-      </p:sp>
-      <p:sp>
-        <p:nvSpPr>
-          <p:cNvPr id="3" name="TextBox 2"/>
-          <p:cNvSpPr txBox="1"/>
-          <p:nvPr/>
-        </p:nvSpPr>
-        <p:spPr>
-          <a:xfrm>
-            <a:off x="548640" y="566928"/>
-            <a:ext cx="11094415" cy="822960"/>
-          </a:xfrm>
-          <a:prstGeom prst="rect">
-            <a:avLst/>
-          </a:prstGeom>
-          <a:noFill/>
-        </p:spPr>
-        <p:txBody>
-          <a:bodyPr wrap="square" anchor="ctr" lIns="0" rIns="0" tIns="0" bIns="0"/>
-          <a:lstStyle/>
-          <a:p>
-            <a:pPr algn="l"/>
-            <a:r>
-              <a:rPr sz="3200" b="1" i="0">
-                <a:solidFill>
-                  <a:srgbClr val="03306E"/>
-                </a:solidFill>
-                <a:latin typeface="Cambria"/>
-              </a:rPr>
-              <a:t>Test data</a:t>
-            </a:r>
-          </a:p>
-        </p:txBody>
-      </p:sp>
-      <p:sp>
-        <p:nvSpPr>
-          <p:cNvPr id="4" name="TextBox 3"/>
-          <p:cNvSpPr txBox="1"/>
-          <p:nvPr/>
-        </p:nvSpPr>
-        <p:spPr>
-          <a:xfrm>
-            <a:off x="548640" y="6446520"/>
-            <a:ext cx="8229600" cy="274320"/>
-          </a:xfrm>
-          <a:prstGeom prst="rect">
-            <a:avLst/>
-          </a:prstGeom>
-          <a:noFill/>
-        </p:spPr>
-        <p:txBody>
-          <a:bodyPr wrap="square" anchor="t" lIns="0" rIns="0" tIns="0" bIns="0"/>
-          <a:lstStyle/>
-          <a:p>
-            <a:pPr algn="l"/>
-            <a:r>
-              <a:rPr sz="1000" b="0" i="0">
-                <a:solidFill>
-                  <a:srgbClr val="54595D"/>
-                </a:solidFill>
-                <a:latin typeface="Calibri"/>
-              </a:rPr>
-              <a:t>Digital Software Development T Level  ·  Testing a Software Solution</a:t>
-            </a:r>
-          </a:p>
-        </p:txBody>
-      </p:sp>
-      <p:sp>
-        <p:nvSpPr>
-          <p:cNvPr id="5" name="TextBox 4"/>
-          <p:cNvSpPr txBox="1"/>
-          <p:nvPr/>
-        </p:nvSpPr>
-        <p:spPr>
-          <a:xfrm>
-            <a:off x="10728655" y="6446520"/>
-            <a:ext cx="914400" cy="274320"/>
-          </a:xfrm>
-          <a:prstGeom prst="rect">
-            <a:avLst/>
-          </a:prstGeom>
-          <a:noFill/>
-        </p:spPr>
-        <p:txBody>
-          <a:bodyPr wrap="square" anchor="t" lIns="0" rIns="0" tIns="0" bIns="0"/>
-          <a:lstStyle/>
-          <a:p>
-            <a:pPr algn="r"/>
-            <a:r>
-              <a:rPr sz="1000" b="0" i="0">
-                <a:solidFill>
-                  <a:srgbClr val="54595D"/>
-                </a:solidFill>
-                <a:latin typeface="Calibri"/>
-              </a:rPr>
-              <a:t>5</a:t>
-            </a:r>
-          </a:p>
-        </p:txBody>
-      </p:sp>
-      <p:sp>
-        <p:nvSpPr>
-          <p:cNvPr id="6" name="Rounded Rectangle 5"/>
-          <p:cNvSpPr/>
-          <p:nvPr/>
-        </p:nvSpPr>
-        <p:spPr>
-          <a:xfrm>
-            <a:off x="548640" y="1600200"/>
-            <a:ext cx="3515258" cy="2148840"/>
-          </a:xfrm>
-          <a:prstGeom prst="roundRect">
-            <a:avLst>
-              <a:gd name="adj" fmla="val 6000"/>
-            </a:avLst>
-          </a:prstGeom>
-          <a:solidFill>
-            <a:srgbClr val="EAF3FF"/>
-          </a:solidFill>
-          <a:ln>
-            <a:noFill/>
-          </a:ln>
-          <a:effectLst/>
-        </p:spPr>
-        <p:style>
-          <a:lnRef idx="1">
-            <a:schemeClr val="accent1"/>
-          </a:lnRef>
-          <a:fillRef idx="3">
-            <a:schemeClr val="accent1"/>
-          </a:fillRef>
-          <a:effectRef idx="2">
-            <a:schemeClr val="accent1"/>
-          </a:effectRef>
-          <a:fontRef idx="minor">
-            <a:schemeClr val="lt1"/>
-          </a:fontRef>
-        </p:style>
-        <p:txBody>
-          <a:bodyPr rtlCol="0" anchor="ctr"/>
-          <a:lstStyle/>
-          <a:p/>
-        </p:txBody>
-      </p:sp>
-      <p:sp>
-        <p:nvSpPr>
-          <p:cNvPr id="7" name="Oval 6"/>
-          <p:cNvSpPr/>
-          <p:nvPr/>
-        </p:nvSpPr>
-        <p:spPr>
-          <a:xfrm>
-            <a:off x="777240" y="1828800"/>
-            <a:ext cx="457200" cy="457200"/>
-          </a:xfrm>
-          <a:prstGeom prst="ellipse">
-            <a:avLst/>
-          </a:prstGeom>
-          <a:solidFill>
-            <a:srgbClr val="33C17A"/>
-          </a:solidFill>
-          <a:ln>
-            <a:noFill/>
-          </a:ln>
-          <a:effectLst/>
-        </p:spPr>
-        <p:style>
-          <a:lnRef idx="1">
-            <a:schemeClr val="accent1"/>
-          </a:lnRef>
-          <a:fillRef idx="3">
-            <a:schemeClr val="accent1"/>
-          </a:fillRef>
-          <a:effectRef idx="2">
-            <a:schemeClr val="accent1"/>
-          </a:effectRef>
-          <a:fontRef idx="minor">
-            <a:schemeClr val="lt1"/>
-          </a:fontRef>
-        </p:style>
-        <p:txBody>
-          <a:bodyPr rtlCol="0" anchor="ctr" lIns="0" rIns="0" tIns="0" bIns="0"/>
-          <a:lstStyle/>
-          <a:p>
-            <a:pPr algn="ctr"/>
-            <a:r>
-              <a:rPr sz="1500" b="1">
-                <a:solidFill>
-                  <a:srgbClr val="202122"/>
-                </a:solidFill>
-                <a:latin typeface="Calibri"/>
-              </a:rPr>
-              <a:t>1</a:t>
-            </a:r>
-          </a:p>
-        </p:txBody>
-      </p:sp>
-      <p:sp>
-        <p:nvSpPr>
-          <p:cNvPr id="8" name="TextBox 7"/>
-          <p:cNvSpPr txBox="1"/>
-          <p:nvPr/>
-        </p:nvSpPr>
-        <p:spPr>
-          <a:xfrm>
-            <a:off x="1371600" y="1801368"/>
-            <a:ext cx="2509418" cy="512064"/>
-          </a:xfrm>
-          <a:prstGeom prst="rect">
-            <a:avLst/>
-          </a:prstGeom>
-          <a:noFill/>
-        </p:spPr>
-        <p:txBody>
-          <a:bodyPr wrap="square" anchor="ctr" lIns="0" rIns="0" tIns="0" bIns="0"/>
-          <a:lstStyle/>
-          <a:p>
-            <a:pPr algn="l"/>
-            <a:r>
-              <a:rPr sz="1900" b="1" i="0">
-                <a:solidFill>
-                  <a:srgbClr val="03306E"/>
-                </a:solidFill>
-                <a:latin typeface="Calibri"/>
-              </a:rPr>
-              <a:t>Valid</a:t>
-            </a:r>
-          </a:p>
-        </p:txBody>
-      </p:sp>
-      <p:sp>
-        <p:nvSpPr>
-          <p:cNvPr id="9" name="TextBox 8"/>
-          <p:cNvSpPr txBox="1"/>
-          <p:nvPr/>
-        </p:nvSpPr>
-        <p:spPr>
-          <a:xfrm>
-            <a:off x="777240" y="2468880"/>
-            <a:ext cx="3058058" cy="1143000"/>
-          </a:xfrm>
-          <a:prstGeom prst="rect">
-            <a:avLst/>
-          </a:prstGeom>
-          <a:noFill/>
-        </p:spPr>
-        <p:txBody>
-          <a:bodyPr wrap="square" anchor="t" lIns="0" rIns="0" tIns="0" bIns="0"/>
-          <a:lstStyle/>
-          <a:p>
-            <a:pPr algn="l"/>
-            <a:r>
-              <a:rPr sz="2000" b="0" i="0">
-                <a:solidFill>
-                  <a:srgbClr val="202122"/>
-                </a:solidFill>
-                <a:latin typeface="Calibri"/>
-              </a:rPr>
-              <a:t>Normal, accepted data.</a:t>
-            </a:r>
-          </a:p>
-        </p:txBody>
-      </p:sp>
-      <p:sp>
-        <p:nvSpPr>
-          <p:cNvPr id="10" name="Rounded Rectangle 9"/>
-          <p:cNvSpPr/>
-          <p:nvPr/>
-        </p:nvSpPr>
-        <p:spPr>
-          <a:xfrm>
-            <a:off x="4338218" y="1600200"/>
-            <a:ext cx="3515258" cy="2148840"/>
-          </a:xfrm>
-          <a:prstGeom prst="roundRect">
-            <a:avLst>
-              <a:gd name="adj" fmla="val 6000"/>
-            </a:avLst>
-          </a:prstGeom>
-          <a:solidFill>
-            <a:srgbClr val="EAF3FF"/>
-          </a:solidFill>
-          <a:ln>
-            <a:noFill/>
-          </a:ln>
-          <a:effectLst/>
-        </p:spPr>
-        <p:style>
-          <a:lnRef idx="1">
-            <a:schemeClr val="accent1"/>
-          </a:lnRef>
-          <a:fillRef idx="3">
-            <a:schemeClr val="accent1"/>
-          </a:fillRef>
-          <a:effectRef idx="2">
-            <a:schemeClr val="accent1"/>
-          </a:effectRef>
-          <a:fontRef idx="minor">
-            <a:schemeClr val="lt1"/>
-          </a:fontRef>
-        </p:style>
-        <p:txBody>
-          <a:bodyPr rtlCol="0" anchor="ctr"/>
-          <a:lstStyle/>
-          <a:p/>
-        </p:txBody>
-      </p:sp>
-      <p:sp>
-        <p:nvSpPr>
-          <p:cNvPr id="11" name="Oval 10"/>
-          <p:cNvSpPr/>
-          <p:nvPr/>
-        </p:nvSpPr>
-        <p:spPr>
-          <a:xfrm>
-            <a:off x="4566818" y="1828800"/>
-            <a:ext cx="457200" cy="457200"/>
-          </a:xfrm>
-          <a:prstGeom prst="ellipse">
-            <a:avLst/>
-          </a:prstGeom>
-          <a:solidFill>
-            <a:srgbClr val="33C17A"/>
-          </a:solidFill>
-          <a:ln>
-            <a:noFill/>
-          </a:ln>
-          <a:effectLst/>
-        </p:spPr>
-        <p:style>
-          <a:lnRef idx="1">
-            <a:schemeClr val="accent1"/>
-          </a:lnRef>
-          <a:fillRef idx="3">
-            <a:schemeClr val="accent1"/>
-          </a:fillRef>
-          <a:effectRef idx="2">
-            <a:schemeClr val="accent1"/>
-          </a:effectRef>
-          <a:fontRef idx="minor">
-            <a:schemeClr val="lt1"/>
-          </a:fontRef>
-        </p:style>
-        <p:txBody>
-          <a:bodyPr rtlCol="0" anchor="ctr" lIns="0" rIns="0" tIns="0" bIns="0"/>
-          <a:lstStyle/>
-          <a:p>
-            <a:pPr algn="ctr"/>
-            <a:r>
-              <a:rPr sz="1500" b="1">
-                <a:solidFill>
-                  <a:srgbClr val="202122"/>
-                </a:solidFill>
-                <a:latin typeface="Calibri"/>
-              </a:rPr>
-              <a:t>2</a:t>
-            </a:r>
-          </a:p>
-        </p:txBody>
-      </p:sp>
-      <p:sp>
-        <p:nvSpPr>
-          <p:cNvPr id="12" name="TextBox 11"/>
-          <p:cNvSpPr txBox="1"/>
-          <p:nvPr/>
-        </p:nvSpPr>
-        <p:spPr>
-          <a:xfrm>
-            <a:off x="5161178" y="1801368"/>
-            <a:ext cx="2509418" cy="512064"/>
-          </a:xfrm>
-          <a:prstGeom prst="rect">
-            <a:avLst/>
-          </a:prstGeom>
-          <a:noFill/>
-        </p:spPr>
-        <p:txBody>
-          <a:bodyPr wrap="square" anchor="ctr" lIns="0" rIns="0" tIns="0" bIns="0"/>
-          <a:lstStyle/>
-          <a:p>
-            <a:pPr algn="l"/>
-            <a:r>
-              <a:rPr sz="1900" b="1" i="0">
-                <a:solidFill>
-                  <a:srgbClr val="03306E"/>
-                </a:solidFill>
-                <a:latin typeface="Calibri"/>
-              </a:rPr>
-              <a:t>Invalid</a:t>
-            </a:r>
-          </a:p>
-        </p:txBody>
-      </p:sp>
-      <p:sp>
-        <p:nvSpPr>
-          <p:cNvPr id="13" name="TextBox 12"/>
-          <p:cNvSpPr txBox="1"/>
-          <p:nvPr/>
-        </p:nvSpPr>
-        <p:spPr>
-          <a:xfrm>
-            <a:off x="4566818" y="2468880"/>
-            <a:ext cx="3058058" cy="1143000"/>
-          </a:xfrm>
-          <a:prstGeom prst="rect">
-            <a:avLst/>
-          </a:prstGeom>
-          <a:noFill/>
-        </p:spPr>
-        <p:txBody>
-          <a:bodyPr wrap="square" anchor="t" lIns="0" rIns="0" tIns="0" bIns="0"/>
-          <a:lstStyle/>
-          <a:p>
-            <a:pPr algn="l"/>
-            <a:r>
-              <a:rPr sz="2000" b="0" i="0">
-                <a:solidFill>
-                  <a:srgbClr val="202122"/>
-                </a:solidFill>
-                <a:latin typeface="Calibri"/>
-              </a:rPr>
-              <a:t>Should be rejected.</a:t>
-            </a:r>
-          </a:p>
-        </p:txBody>
-      </p:sp>
-      <p:sp>
-        <p:nvSpPr>
-          <p:cNvPr id="14" name="Rounded Rectangle 13"/>
-          <p:cNvSpPr/>
-          <p:nvPr/>
-        </p:nvSpPr>
-        <p:spPr>
-          <a:xfrm>
-            <a:off x="8127796" y="1600200"/>
-            <a:ext cx="3515258" cy="2148840"/>
-          </a:xfrm>
-          <a:prstGeom prst="roundRect">
-            <a:avLst>
-              <a:gd name="adj" fmla="val 6000"/>
-            </a:avLst>
-          </a:prstGeom>
-          <a:solidFill>
-            <a:srgbClr val="EAF3FF"/>
-          </a:solidFill>
-          <a:ln>
-            <a:noFill/>
-          </a:ln>
-          <a:effectLst/>
-        </p:spPr>
-        <p:style>
-          <a:lnRef idx="1">
-            <a:schemeClr val="accent1"/>
-          </a:lnRef>
-          <a:fillRef idx="3">
-            <a:schemeClr val="accent1"/>
-          </a:fillRef>
-          <a:effectRef idx="2">
-            <a:schemeClr val="accent1"/>
-          </a:effectRef>
-          <a:fontRef idx="minor">
-            <a:schemeClr val="lt1"/>
-          </a:fontRef>
-        </p:style>
-        <p:txBody>
-          <a:bodyPr rtlCol="0" anchor="ctr"/>
-          <a:lstStyle/>
-          <a:p/>
-        </p:txBody>
-      </p:sp>
-      <p:sp>
-        <p:nvSpPr>
-          <p:cNvPr id="15" name="Oval 14"/>
-          <p:cNvSpPr/>
-          <p:nvPr/>
-        </p:nvSpPr>
-        <p:spPr>
-          <a:xfrm>
-            <a:off x="8356396" y="1828800"/>
-            <a:ext cx="457200" cy="457200"/>
-          </a:xfrm>
-          <a:prstGeom prst="ellipse">
-            <a:avLst/>
-          </a:prstGeom>
-          <a:solidFill>
-            <a:srgbClr val="33C17A"/>
-          </a:solidFill>
-          <a:ln>
-            <a:noFill/>
-          </a:ln>
-          <a:effectLst/>
-        </p:spPr>
-        <p:style>
-          <a:lnRef idx="1">
-            <a:schemeClr val="accent1"/>
-          </a:lnRef>
-          <a:fillRef idx="3">
-            <a:schemeClr val="accent1"/>
-          </a:fillRef>
-          <a:effectRef idx="2">
-            <a:schemeClr val="accent1"/>
-          </a:effectRef>
-          <a:fontRef idx="minor">
-            <a:schemeClr val="lt1"/>
-          </a:fontRef>
-        </p:style>
-        <p:txBody>
-          <a:bodyPr rtlCol="0" anchor="ctr" lIns="0" rIns="0" tIns="0" bIns="0"/>
-          <a:lstStyle/>
-          <a:p>
-            <a:pPr algn="ctr"/>
-            <a:r>
-              <a:rPr sz="1500" b="1">
-                <a:solidFill>
-                  <a:srgbClr val="202122"/>
-                </a:solidFill>
-                <a:latin typeface="Calibri"/>
-              </a:rPr>
-              <a:t>3</a:t>
-            </a:r>
-          </a:p>
-        </p:txBody>
-      </p:sp>
-      <p:sp>
-        <p:nvSpPr>
-          <p:cNvPr id="16" name="TextBox 15"/>
-          <p:cNvSpPr txBox="1"/>
-          <p:nvPr/>
-        </p:nvSpPr>
-        <p:spPr>
-          <a:xfrm>
-            <a:off x="8950756" y="1801368"/>
-            <a:ext cx="2509418" cy="512064"/>
-          </a:xfrm>
-          <a:prstGeom prst="rect">
-            <a:avLst/>
-          </a:prstGeom>
-          <a:noFill/>
-        </p:spPr>
-        <p:txBody>
-          <a:bodyPr wrap="square" anchor="ctr" lIns="0" rIns="0" tIns="0" bIns="0"/>
-          <a:lstStyle/>
-          <a:p>
-            <a:pPr algn="l"/>
-            <a:r>
-              <a:rPr sz="1900" b="1" i="0">
-                <a:solidFill>
-                  <a:srgbClr val="03306E"/>
-                </a:solidFill>
-                <a:latin typeface="Calibri"/>
-              </a:rPr>
-              <a:t>Valid extreme</a:t>
-            </a:r>
-          </a:p>
-        </p:txBody>
-      </p:sp>
-      <p:sp>
-        <p:nvSpPr>
-          <p:cNvPr id="17" name="TextBox 16"/>
-          <p:cNvSpPr txBox="1"/>
-          <p:nvPr/>
-        </p:nvSpPr>
-        <p:spPr>
-          <a:xfrm>
-            <a:off x="8356396" y="2468880"/>
-            <a:ext cx="3058058" cy="1143000"/>
-          </a:xfrm>
-          <a:prstGeom prst="rect">
-            <a:avLst/>
-          </a:prstGeom>
-          <a:noFill/>
-        </p:spPr>
-        <p:txBody>
-          <a:bodyPr wrap="square" anchor="t" lIns="0" rIns="0" tIns="0" bIns="0"/>
-          <a:lstStyle/>
-          <a:p>
-            <a:pPr algn="l"/>
-            <a:r>
-              <a:rPr sz="2000" b="0" i="0">
-                <a:solidFill>
-                  <a:srgbClr val="202122"/>
-                </a:solidFill>
-                <a:latin typeface="Calibri"/>
-              </a:rPr>
-              <a:t>At the edge but allowed.</a:t>
-            </a:r>
-          </a:p>
-        </p:txBody>
-      </p:sp>
-      <p:sp>
-        <p:nvSpPr>
-          <p:cNvPr id="18" name="Rounded Rectangle 17"/>
-          <p:cNvSpPr/>
-          <p:nvPr/>
-        </p:nvSpPr>
-        <p:spPr>
-          <a:xfrm>
-            <a:off x="548640" y="4023360"/>
-            <a:ext cx="3515258" cy="2148840"/>
-          </a:xfrm>
-          <a:prstGeom prst="roundRect">
-            <a:avLst>
-              <a:gd name="adj" fmla="val 6000"/>
-            </a:avLst>
-          </a:prstGeom>
-          <a:solidFill>
-            <a:srgbClr val="EAF3FF"/>
-          </a:solidFill>
-          <a:ln>
-            <a:noFill/>
-          </a:ln>
-          <a:effectLst/>
-        </p:spPr>
-        <p:style>
-          <a:lnRef idx="1">
-            <a:schemeClr val="accent1"/>
-          </a:lnRef>
-          <a:fillRef idx="3">
-            <a:schemeClr val="accent1"/>
-          </a:fillRef>
-          <a:effectRef idx="2">
-            <a:schemeClr val="accent1"/>
-          </a:effectRef>
-          <a:fontRef idx="minor">
-            <a:schemeClr val="lt1"/>
-          </a:fontRef>
-        </p:style>
-        <p:txBody>
-          <a:bodyPr rtlCol="0" anchor="ctr"/>
-          <a:lstStyle/>
-          <a:p/>
-        </p:txBody>
-      </p:sp>
-      <p:sp>
-        <p:nvSpPr>
-          <p:cNvPr id="19" name="Oval 18"/>
-          <p:cNvSpPr/>
-          <p:nvPr/>
-        </p:nvSpPr>
-        <p:spPr>
-          <a:xfrm>
-            <a:off x="777240" y="4251960"/>
-            <a:ext cx="457200" cy="457200"/>
-          </a:xfrm>
-          <a:prstGeom prst="ellipse">
-            <a:avLst/>
-          </a:prstGeom>
-          <a:solidFill>
-            <a:srgbClr val="33C17A"/>
-          </a:solidFill>
-          <a:ln>
-            <a:noFill/>
-          </a:ln>
-          <a:effectLst/>
-        </p:spPr>
-        <p:style>
-          <a:lnRef idx="1">
-            <a:schemeClr val="accent1"/>
-          </a:lnRef>
-          <a:fillRef idx="3">
-            <a:schemeClr val="accent1"/>
-          </a:fillRef>
-          <a:effectRef idx="2">
-            <a:schemeClr val="accent1"/>
-          </a:effectRef>
-          <a:fontRef idx="minor">
-            <a:schemeClr val="lt1"/>
-          </a:fontRef>
-        </p:style>
-        <p:txBody>
-          <a:bodyPr rtlCol="0" anchor="ctr" lIns="0" rIns="0" tIns="0" bIns="0"/>
-          <a:lstStyle/>
-          <a:p>
-            <a:pPr algn="ctr"/>
-            <a:r>
-              <a:rPr sz="1500" b="1">
-                <a:solidFill>
-                  <a:srgbClr val="202122"/>
-                </a:solidFill>
-                <a:latin typeface="Calibri"/>
-              </a:rPr>
-              <a:t>4</a:t>
-            </a:r>
-          </a:p>
-        </p:txBody>
-      </p:sp>
-      <p:sp>
-        <p:nvSpPr>
-          <p:cNvPr id="20" name="TextBox 19"/>
-          <p:cNvSpPr txBox="1"/>
-          <p:nvPr/>
-        </p:nvSpPr>
-        <p:spPr>
-          <a:xfrm>
-            <a:off x="1371600" y="4224528"/>
-            <a:ext cx="2509418" cy="512064"/>
-          </a:xfrm>
-          <a:prstGeom prst="rect">
-            <a:avLst/>
-          </a:prstGeom>
-          <a:noFill/>
-        </p:spPr>
-        <p:txBody>
-          <a:bodyPr wrap="square" anchor="ctr" lIns="0" rIns="0" tIns="0" bIns="0"/>
-          <a:lstStyle/>
-          <a:p>
-            <a:pPr algn="l"/>
-            <a:r>
-              <a:rPr sz="1900" b="1" i="0">
-                <a:solidFill>
-                  <a:srgbClr val="03306E"/>
-                </a:solidFill>
-                <a:latin typeface="Calibri"/>
-              </a:rPr>
-              <a:t>Invalid extreme</a:t>
-            </a:r>
-          </a:p>
-        </p:txBody>
-      </p:sp>
-      <p:sp>
-        <p:nvSpPr>
-          <p:cNvPr id="21" name="TextBox 20"/>
-          <p:cNvSpPr txBox="1"/>
-          <p:nvPr/>
-        </p:nvSpPr>
-        <p:spPr>
-          <a:xfrm>
-            <a:off x="777240" y="4892040"/>
-            <a:ext cx="3058058" cy="1143000"/>
-          </a:xfrm>
-          <a:prstGeom prst="rect">
-            <a:avLst/>
-          </a:prstGeom>
-          <a:noFill/>
-        </p:spPr>
-        <p:txBody>
-          <a:bodyPr wrap="square" anchor="t" lIns="0" rIns="0" tIns="0" bIns="0"/>
-          <a:lstStyle/>
-          <a:p>
-            <a:pPr algn="l"/>
-            <a:r>
-              <a:rPr sz="2000" b="0" i="0">
-                <a:solidFill>
-                  <a:srgbClr val="202122"/>
-                </a:solidFill>
-                <a:latin typeface="Calibri"/>
-              </a:rPr>
-              <a:t>Just outside the limit.</a:t>
-            </a:r>
-          </a:p>
-        </p:txBody>
-      </p:sp>
-      <p:sp>
-        <p:nvSpPr>
-          <p:cNvPr id="22" name="Rounded Rectangle 21"/>
-          <p:cNvSpPr/>
-          <p:nvPr/>
-        </p:nvSpPr>
-        <p:spPr>
-          <a:xfrm>
-            <a:off x="4338218" y="4023360"/>
-            <a:ext cx="3515258" cy="2148840"/>
-          </a:xfrm>
-          <a:prstGeom prst="roundRect">
-            <a:avLst>
-              <a:gd name="adj" fmla="val 6000"/>
-            </a:avLst>
-          </a:prstGeom>
-          <a:solidFill>
-            <a:srgbClr val="EAF3FF"/>
-          </a:solidFill>
-          <a:ln>
-            <a:noFill/>
-          </a:ln>
-          <a:effectLst/>
-        </p:spPr>
-        <p:style>
-          <a:lnRef idx="1">
-            <a:schemeClr val="accent1"/>
-          </a:lnRef>
-          <a:fillRef idx="3">
-            <a:schemeClr val="accent1"/>
-          </a:fillRef>
-          <a:effectRef idx="2">
-            <a:schemeClr val="accent1"/>
-          </a:effectRef>
-          <a:fontRef idx="minor">
-            <a:schemeClr val="lt1"/>
-          </a:fontRef>
-        </p:style>
-        <p:txBody>
-          <a:bodyPr rtlCol="0" anchor="ctr"/>
-          <a:lstStyle/>
-          <a:p/>
-        </p:txBody>
-      </p:sp>
-      <p:sp>
-        <p:nvSpPr>
-          <p:cNvPr id="23" name="Oval 22"/>
-          <p:cNvSpPr/>
-          <p:nvPr/>
-        </p:nvSpPr>
-        <p:spPr>
-          <a:xfrm>
-            <a:off x="4566818" y="4251960"/>
-            <a:ext cx="457200" cy="457200"/>
-          </a:xfrm>
-          <a:prstGeom prst="ellipse">
-            <a:avLst/>
-          </a:prstGeom>
-          <a:solidFill>
-            <a:srgbClr val="33C17A"/>
-          </a:solidFill>
-          <a:ln>
-            <a:noFill/>
-          </a:ln>
-          <a:effectLst/>
-        </p:spPr>
-        <p:style>
-          <a:lnRef idx="1">
-            <a:schemeClr val="accent1"/>
-          </a:lnRef>
-          <a:fillRef idx="3">
-            <a:schemeClr val="accent1"/>
-          </a:fillRef>
-          <a:effectRef idx="2">
-            <a:schemeClr val="accent1"/>
-          </a:effectRef>
-          <a:fontRef idx="minor">
-            <a:schemeClr val="lt1"/>
-          </a:fontRef>
-        </p:style>
-        <p:txBody>
-          <a:bodyPr rtlCol="0" anchor="ctr" lIns="0" rIns="0" tIns="0" bIns="0"/>
-          <a:lstStyle/>
-          <a:p>
-            <a:pPr algn="ctr"/>
-            <a:r>
-              <a:rPr sz="1500" b="1">
-                <a:solidFill>
-                  <a:srgbClr val="202122"/>
-                </a:solidFill>
-                <a:latin typeface="Calibri"/>
-              </a:rPr>
-              <a:t>5</a:t>
-            </a:r>
-          </a:p>
-        </p:txBody>
-      </p:sp>
-      <p:sp>
-        <p:nvSpPr>
-          <p:cNvPr id="24" name="TextBox 23"/>
-          <p:cNvSpPr txBox="1"/>
-          <p:nvPr/>
-        </p:nvSpPr>
-        <p:spPr>
-          <a:xfrm>
-            <a:off x="5161178" y="4224528"/>
-            <a:ext cx="2509418" cy="512064"/>
-          </a:xfrm>
-          <a:prstGeom prst="rect">
-            <a:avLst/>
-          </a:prstGeom>
-          <a:noFill/>
-        </p:spPr>
-        <p:txBody>
-          <a:bodyPr wrap="square" anchor="ctr" lIns="0" rIns="0" tIns="0" bIns="0"/>
-          <a:lstStyle/>
-          <a:p>
-            <a:pPr algn="l"/>
-            <a:r>
-              <a:rPr sz="1900" b="1" i="0">
-                <a:solidFill>
-                  <a:srgbClr val="03306E"/>
-                </a:solidFill>
-                <a:latin typeface="Calibri"/>
-              </a:rPr>
-              <a:t>Erroneous</a:t>
-            </a:r>
-          </a:p>
-        </p:txBody>
-      </p:sp>
-      <p:sp>
-        <p:nvSpPr>
-          <p:cNvPr id="25" name="TextBox 24"/>
-          <p:cNvSpPr txBox="1"/>
-          <p:nvPr/>
-        </p:nvSpPr>
-        <p:spPr>
-          <a:xfrm>
-            <a:off x="4566818" y="4892040"/>
-            <a:ext cx="3058058" cy="1143000"/>
-          </a:xfrm>
-          <a:prstGeom prst="rect">
-            <a:avLst/>
-          </a:prstGeom>
-          <a:noFill/>
-        </p:spPr>
-        <p:txBody>
-          <a:bodyPr wrap="square" anchor="t" lIns="0" rIns="0" tIns="0" bIns="0"/>
-          <a:lstStyle/>
-          <a:p>
-            <a:pPr algn="l"/>
-            <a:r>
-              <a:rPr sz="2000" b="0" i="0">
-                <a:solidFill>
-                  <a:srgbClr val="202122"/>
-                </a:solidFill>
-                <a:latin typeface="Calibri"/>
-              </a:rPr>
-              <a:t>Wrong type entirely.</a:t>
-            </a:r>
-          </a:p>
-        </p:txBody>
-      </p:sp>
-    </p:spTree>
-  </p:cSld>
-  <p:clrMapOvr>
-    <a:masterClrMapping/>
-  </p:clrMapOvr>
-</p:sld>
-</file>
-
-<file path=ppt/slides/slide6.xml><?xml version="1.0" encoding="utf-8"?>
-<p:sld xmlns:a="http://schemas.openxmlformats.org/drawingml/2006/main" xmlns:p="http://schemas.openxmlformats.org/presentationml/2006/main" xmlns:r="http://schemas.openxmlformats.org/officeDocument/2006/relationships">
-  <p:cSld>
-    <p:bg>
-      <p:bgPr>
-        <a:solidFill>
-          <a:srgbClr val="FFFFFF"/>
-        </a:solidFill>
-        <a:effectLst/>
-      </p:bgPr>
-    </p:bg>
-    <p:spTree>
-      <p:nvGrpSpPr>
-        <p:cNvPr id="1" name=""/>
-        <p:cNvGrpSpPr/>
-        <p:nvPr/>
-      </p:nvGrpSpPr>
-      <p:grpSpPr/>
-      <p:sp>
-        <p:nvSpPr>
-          <p:cNvPr id="2" name="TextBox 1"/>
-          <p:cNvSpPr txBox="1"/>
-          <p:nvPr/>
-        </p:nvSpPr>
-        <p:spPr>
-          <a:xfrm>
-            <a:off x="548640" y="320040"/>
-            <a:ext cx="11094415" cy="274320"/>
-          </a:xfrm>
-          <a:prstGeom prst="rect">
-            <a:avLst/>
-          </a:prstGeom>
-          <a:noFill/>
-        </p:spPr>
-        <p:txBody>
-          <a:bodyPr wrap="square" anchor="t" lIns="0" rIns="0" tIns="0" bIns="0"/>
-          <a:lstStyle/>
-          <a:p>
-            <a:pPr algn="l"/>
-            <a:r>
-              <a:rPr sz="1100" b="1" i="0">
-                <a:solidFill>
-                  <a:srgbClr val="54595D"/>
-                </a:solidFill>
-                <a:latin typeface="Calibri"/>
-              </a:rPr>
-              <a:t>OCCUPATIONAL SPECIALISM  ·  Specialism Content Area 7</a:t>
-            </a:r>
-          </a:p>
-        </p:txBody>
-      </p:sp>
-      <p:sp>
-        <p:nvSpPr>
-          <p:cNvPr id="3" name="TextBox 2"/>
-          <p:cNvSpPr txBox="1"/>
-          <p:nvPr/>
-        </p:nvSpPr>
-        <p:spPr>
-          <a:xfrm>
-            <a:off x="548640" y="566928"/>
-            <a:ext cx="11094415" cy="822960"/>
-          </a:xfrm>
-          <a:prstGeom prst="rect">
-            <a:avLst/>
-          </a:prstGeom>
-          <a:noFill/>
-        </p:spPr>
-        <p:txBody>
-          <a:bodyPr wrap="square" anchor="ctr" lIns="0" rIns="0" tIns="0" bIns="0"/>
-          <a:lstStyle/>
-          <a:p>
-            <a:pPr algn="l"/>
-            <a:r>
-              <a:rPr sz="3200" b="1" i="0">
-                <a:solidFill>
-                  <a:srgbClr val="03306E"/>
-                </a:solidFill>
-                <a:latin typeface="Cambria"/>
-              </a:rPr>
-              <a:t>Check your understanding</a:t>
-            </a:r>
-          </a:p>
-        </p:txBody>
-      </p:sp>
-      <p:sp>
-        <p:nvSpPr>
-          <p:cNvPr id="4" name="TextBox 3"/>
-          <p:cNvSpPr txBox="1"/>
-          <p:nvPr/>
-        </p:nvSpPr>
-        <p:spPr>
-          <a:xfrm>
-            <a:off x="548640" y="6446520"/>
-            <a:ext cx="8229600" cy="274320"/>
-          </a:xfrm>
-          <a:prstGeom prst="rect">
-            <a:avLst/>
-          </a:prstGeom>
-          <a:noFill/>
-        </p:spPr>
-        <p:txBody>
-          <a:bodyPr wrap="square" anchor="t" lIns="0" rIns="0" tIns="0" bIns="0"/>
-          <a:lstStyle/>
-          <a:p>
-            <a:pPr algn="l"/>
-            <a:r>
-              <a:rPr sz="1000" b="0" i="0">
-                <a:solidFill>
-                  <a:srgbClr val="54595D"/>
-                </a:solidFill>
-                <a:latin typeface="Calibri"/>
-              </a:rPr>
-              <a:t>Digital Software Development T Level  ·  Testing a Software Solution</a:t>
-            </a:r>
-          </a:p>
-        </p:txBody>
-      </p:sp>
-      <p:sp>
-        <p:nvSpPr>
-          <p:cNvPr id="5" name="TextBox 4"/>
-          <p:cNvSpPr txBox="1"/>
-          <p:nvPr/>
-        </p:nvSpPr>
-        <p:spPr>
-          <a:xfrm>
-            <a:off x="10728655" y="6446520"/>
-            <a:ext cx="914400" cy="274320"/>
-          </a:xfrm>
-          <a:prstGeom prst="rect">
-            <a:avLst/>
-          </a:prstGeom>
-          <a:noFill/>
-        </p:spPr>
-        <p:txBody>
-          <a:bodyPr wrap="square" anchor="t" lIns="0" rIns="0" tIns="0" bIns="0"/>
-          <a:lstStyle/>
-          <a:p>
-            <a:pPr algn="r"/>
-            <a:r>
-              <a:rPr sz="1000" b="0" i="0">
-                <a:solidFill>
-                  <a:srgbClr val="54595D"/>
-                </a:solidFill>
-                <a:latin typeface="Calibri"/>
-              </a:rPr>
-              <a:t>6</a:t>
-            </a:r>
-          </a:p>
-        </p:txBody>
-      </p:sp>
-      <p:sp>
-        <p:nvSpPr>
-          <p:cNvPr id="6" name="Oval 5"/>
-          <p:cNvSpPr/>
-          <p:nvPr/>
-        </p:nvSpPr>
-        <p:spPr>
-          <a:xfrm>
-            <a:off x="548640" y="1618488"/>
-            <a:ext cx="411480" cy="411480"/>
-          </a:xfrm>
-          <a:prstGeom prst="ellipse">
-            <a:avLst/>
-          </a:prstGeom>
-          <a:solidFill>
-            <a:srgbClr val="33C17A"/>
-          </a:solidFill>
-          <a:ln>
-            <a:noFill/>
-          </a:ln>
-          <a:effectLst/>
-        </p:spPr>
-        <p:style>
-          <a:lnRef idx="1">
-            <a:schemeClr val="accent1"/>
-          </a:lnRef>
-          <a:fillRef idx="3">
-            <a:schemeClr val="accent1"/>
-          </a:fillRef>
-          <a:effectRef idx="2">
-            <a:schemeClr val="accent1"/>
-          </a:effectRef>
-          <a:fontRef idx="minor">
-            <a:schemeClr val="lt1"/>
-          </a:fontRef>
-        </p:style>
-        <p:txBody>
-          <a:bodyPr rtlCol="0" anchor="ctr" lIns="0" rIns="0" tIns="0" bIns="0"/>
-          <a:lstStyle/>
-          <a:p>
-            <a:pPr algn="ctr"/>
-            <a:r>
-              <a:rPr sz="1400" b="1">
-                <a:solidFill>
-                  <a:srgbClr val="202122"/>
-                </a:solidFill>
-                <a:latin typeface="Calibri"/>
-              </a:rPr>
-              <a:t>1</a:t>
-            </a:r>
-          </a:p>
-        </p:txBody>
-      </p:sp>
-      <p:sp>
-        <p:nvSpPr>
-          <p:cNvPr id="7" name="TextBox 6"/>
-          <p:cNvSpPr txBox="1"/>
-          <p:nvPr/>
-        </p:nvSpPr>
-        <p:spPr>
-          <a:xfrm>
-            <a:off x="1234440" y="1600200"/>
-            <a:ext cx="10408615" cy="1030986"/>
-          </a:xfrm>
-          <a:prstGeom prst="rect">
-            <a:avLst/>
-          </a:prstGeom>
-          <a:noFill/>
-        </p:spPr>
-        <p:txBody>
-          <a:bodyPr wrap="square" anchor="t" lIns="0" rIns="0" tIns="0" bIns="0"/>
-          <a:lstStyle/>
-          <a:p>
-            <a:pPr algn="l"/>
-            <a:r>
-              <a:rPr sz="2200" b="0" i="0">
-                <a:solidFill>
-                  <a:srgbClr val="202122"/>
-                </a:solidFill>
-                <a:latin typeface="Calibri"/>
-              </a:rPr>
-              <a:t>What is smoke testing?</a:t>
-            </a:r>
-          </a:p>
-        </p:txBody>
-      </p:sp>
-      <p:sp>
-        <p:nvSpPr>
-          <p:cNvPr id="8" name="Oval 7"/>
-          <p:cNvSpPr/>
-          <p:nvPr/>
-        </p:nvSpPr>
-        <p:spPr>
-          <a:xfrm>
-            <a:off x="548640" y="2814066"/>
-            <a:ext cx="411480" cy="411480"/>
-          </a:xfrm>
-          <a:prstGeom prst="ellipse">
-            <a:avLst/>
-          </a:prstGeom>
-          <a:solidFill>
-            <a:srgbClr val="33C17A"/>
-          </a:solidFill>
-          <a:ln>
-            <a:noFill/>
-          </a:ln>
-          <a:effectLst/>
-        </p:spPr>
-        <p:style>
-          <a:lnRef idx="1">
-            <a:schemeClr val="accent1"/>
-          </a:lnRef>
-          <a:fillRef idx="3">
-            <a:schemeClr val="accent1"/>
-          </a:fillRef>
-          <a:effectRef idx="2">
-            <a:schemeClr val="accent1"/>
-          </a:effectRef>
-          <a:fontRef idx="minor">
-            <a:schemeClr val="lt1"/>
-          </a:fontRef>
-        </p:style>
-        <p:txBody>
-          <a:bodyPr rtlCol="0" anchor="ctr" lIns="0" rIns="0" tIns="0" bIns="0"/>
-          <a:lstStyle/>
-          <a:p>
-            <a:pPr algn="ctr"/>
-            <a:r>
-              <a:rPr sz="1400" b="1">
-                <a:solidFill>
-                  <a:srgbClr val="202122"/>
-                </a:solidFill>
-                <a:latin typeface="Calibri"/>
-              </a:rPr>
-              <a:t>2</a:t>
-            </a:r>
-          </a:p>
-        </p:txBody>
-      </p:sp>
-      <p:sp>
-        <p:nvSpPr>
-          <p:cNvPr id="9" name="TextBox 8"/>
-          <p:cNvSpPr txBox="1"/>
-          <p:nvPr/>
-        </p:nvSpPr>
-        <p:spPr>
-          <a:xfrm>
-            <a:off x="1234440" y="2795778"/>
-            <a:ext cx="10408615" cy="1030986"/>
-          </a:xfrm>
-          <a:prstGeom prst="rect">
-            <a:avLst/>
-          </a:prstGeom>
-          <a:noFill/>
-        </p:spPr>
-        <p:txBody>
-          <a:bodyPr wrap="square" anchor="t" lIns="0" rIns="0" tIns="0" bIns="0"/>
-          <a:lstStyle/>
-          <a:p>
-            <a:pPr algn="l"/>
-            <a:r>
-              <a:rPr sz="2200" b="0" i="0">
-                <a:solidFill>
-                  <a:srgbClr val="202122"/>
-                </a:solidFill>
-                <a:latin typeface="Calibri"/>
-              </a:rPr>
-              <a:t>What is the difference between alpha and beta testing?</a:t>
-            </a:r>
-          </a:p>
-        </p:txBody>
-      </p:sp>
-      <p:sp>
-        <p:nvSpPr>
-          <p:cNvPr id="10" name="Oval 9"/>
-          <p:cNvSpPr/>
-          <p:nvPr/>
-        </p:nvSpPr>
-        <p:spPr>
-          <a:xfrm>
-            <a:off x="548640" y="4009644"/>
-            <a:ext cx="411480" cy="411480"/>
-          </a:xfrm>
-          <a:prstGeom prst="ellipse">
-            <a:avLst/>
-          </a:prstGeom>
-          <a:solidFill>
-            <a:srgbClr val="33C17A"/>
-          </a:solidFill>
-          <a:ln>
-            <a:noFill/>
-          </a:ln>
-          <a:effectLst/>
-        </p:spPr>
-        <p:style>
-          <a:lnRef idx="1">
-            <a:schemeClr val="accent1"/>
-          </a:lnRef>
-          <a:fillRef idx="3">
-            <a:schemeClr val="accent1"/>
-          </a:fillRef>
-          <a:effectRef idx="2">
-            <a:schemeClr val="accent1"/>
-          </a:effectRef>
-          <a:fontRef idx="minor">
-            <a:schemeClr val="lt1"/>
-          </a:fontRef>
-        </p:style>
-        <p:txBody>
-          <a:bodyPr rtlCol="0" anchor="ctr" lIns="0" rIns="0" tIns="0" bIns="0"/>
-          <a:lstStyle/>
-          <a:p>
-            <a:pPr algn="ctr"/>
-            <a:r>
-              <a:rPr sz="1400" b="1">
-                <a:solidFill>
-                  <a:srgbClr val="202122"/>
-                </a:solidFill>
-                <a:latin typeface="Calibri"/>
-              </a:rPr>
-              <a:t>3</a:t>
-            </a:r>
-          </a:p>
-        </p:txBody>
-      </p:sp>
-      <p:sp>
-        <p:nvSpPr>
-          <p:cNvPr id="11" name="TextBox 10"/>
-          <p:cNvSpPr txBox="1"/>
-          <p:nvPr/>
-        </p:nvSpPr>
-        <p:spPr>
-          <a:xfrm>
-            <a:off x="1234440" y="3991356"/>
-            <a:ext cx="10408615" cy="1030986"/>
-          </a:xfrm>
-          <a:prstGeom prst="rect">
-            <a:avLst/>
-          </a:prstGeom>
-          <a:noFill/>
-        </p:spPr>
-        <p:txBody>
-          <a:bodyPr wrap="square" anchor="t" lIns="0" rIns="0" tIns="0" bIns="0"/>
-          <a:lstStyle/>
-          <a:p>
-            <a:pPr algn="l"/>
-            <a:r>
-              <a:rPr sz="2200" b="0" i="0">
-                <a:solidFill>
-                  <a:srgbClr val="202122"/>
-                </a:solidFill>
-                <a:latin typeface="Calibri"/>
-              </a:rPr>
-              <a:t>For a range 1 to 100, give valid extreme and invalid extreme values.</a:t>
-            </a:r>
-          </a:p>
-        </p:txBody>
-      </p:sp>
-      <p:sp>
-        <p:nvSpPr>
-          <p:cNvPr id="12" name="Oval 11"/>
-          <p:cNvSpPr/>
-          <p:nvPr/>
-        </p:nvSpPr>
-        <p:spPr>
-          <a:xfrm>
-            <a:off x="548640" y="5205221"/>
-            <a:ext cx="411480" cy="411480"/>
-          </a:xfrm>
-          <a:prstGeom prst="ellipse">
-            <a:avLst/>
-          </a:prstGeom>
-          <a:solidFill>
-            <a:srgbClr val="33C17A"/>
-          </a:solidFill>
-          <a:ln>
-            <a:noFill/>
-          </a:ln>
-          <a:effectLst/>
-        </p:spPr>
-        <p:style>
-          <a:lnRef idx="1">
-            <a:schemeClr val="accent1"/>
-          </a:lnRef>
-          <a:fillRef idx="3">
-            <a:schemeClr val="accent1"/>
-          </a:fillRef>
-          <a:effectRef idx="2">
-            <a:schemeClr val="accent1"/>
-          </a:effectRef>
-          <a:fontRef idx="minor">
-            <a:schemeClr val="lt1"/>
-          </a:fontRef>
-        </p:style>
-        <p:txBody>
-          <a:bodyPr rtlCol="0" anchor="ctr" lIns="0" rIns="0" tIns="0" bIns="0"/>
-          <a:lstStyle/>
-          <a:p>
-            <a:pPr algn="ctr"/>
-            <a:r>
-              <a:rPr sz="1400" b="1">
-                <a:solidFill>
-                  <a:srgbClr val="202122"/>
-                </a:solidFill>
-                <a:latin typeface="Calibri"/>
-              </a:rPr>
-              <a:t>4</a:t>
-            </a:r>
-          </a:p>
-        </p:txBody>
-      </p:sp>
-      <p:sp>
-        <p:nvSpPr>
-          <p:cNvPr id="13" name="TextBox 12"/>
-          <p:cNvSpPr txBox="1"/>
-          <p:nvPr/>
-        </p:nvSpPr>
-        <p:spPr>
-          <a:xfrm>
-            <a:off x="1234440" y="5186933"/>
-            <a:ext cx="10408615" cy="1030986"/>
-          </a:xfrm>
-          <a:prstGeom prst="rect">
-            <a:avLst/>
-          </a:prstGeom>
-          <a:noFill/>
-        </p:spPr>
-        <p:txBody>
-          <a:bodyPr wrap="square" anchor="t" lIns="0" rIns="0" tIns="0" bIns="0"/>
-          <a:lstStyle/>
-          <a:p>
-            <a:pPr algn="l"/>
-            <a:r>
-              <a:rPr sz="2200" b="0" i="0">
-                <a:solidFill>
-                  <a:srgbClr val="202122"/>
-                </a:solidFill>
-                <a:latin typeface="Calibri"/>
-              </a:rPr>
-              <a:t>What is static analysis?</a:t>
-            </a:r>
-          </a:p>
-        </p:txBody>
-      </p:sp>
-    </p:spTree>
-  </p:cSld>
-  <p:clrMapOvr>
-    <a:masterClrMapping/>
-  </p:clrMapOvr>
-</p:sld>
-</file>
-
-<file path=ppt/slides/slide7.xml><?xml version="1.0" encoding="utf-8"?>
-<p:sld xmlns:a="http://schemas.openxmlformats.org/drawingml/2006/main" xmlns:p="http://schemas.openxmlformats.org/presentationml/2006/main" xmlns:r="http://schemas.openxmlformats.org/officeDocument/2006/relationships">
-  <p:cSld>
-    <p:bg>
-      <p:bgPr>
-        <a:solidFill>
-          <a:srgbClr val="FFFFFF"/>
-        </a:solidFill>
-        <a:effectLst/>
-      </p:bgPr>
-    </p:bg>
-    <p:spTree>
-      <p:nvGrpSpPr>
-        <p:cNvPr id="1" name=""/>
-        <p:cNvGrpSpPr/>
-        <p:nvPr/>
-      </p:nvGrpSpPr>
-      <p:grpSpPr/>
-      <p:sp>
-        <p:nvSpPr>
-          <p:cNvPr id="2" name="TextBox 1"/>
-          <p:cNvSpPr txBox="1"/>
-          <p:nvPr/>
-        </p:nvSpPr>
-        <p:spPr>
-          <a:xfrm>
-            <a:off x="548640" y="320040"/>
-            <a:ext cx="11094415" cy="274320"/>
-          </a:xfrm>
-          <a:prstGeom prst="rect">
-            <a:avLst/>
-          </a:prstGeom>
-          <a:noFill/>
-        </p:spPr>
-        <p:txBody>
-          <a:bodyPr wrap="square" anchor="t" lIns="0" rIns="0" tIns="0" bIns="0"/>
-          <a:lstStyle/>
-          <a:p>
-            <a:pPr algn="l"/>
-            <a:r>
-              <a:rPr sz="1100" b="1" i="0">
-                <a:solidFill>
-                  <a:srgbClr val="54595D"/>
-                </a:solidFill>
-                <a:latin typeface="Calibri"/>
-              </a:rPr>
-              <a:t>OCCUPATIONAL SPECIALISM  ·  Specialism Content Area 7</a:t>
-            </a:r>
-          </a:p>
-        </p:txBody>
-      </p:sp>
-      <p:sp>
-        <p:nvSpPr>
-          <p:cNvPr id="3" name="TextBox 2"/>
-          <p:cNvSpPr txBox="1"/>
-          <p:nvPr/>
-        </p:nvSpPr>
-        <p:spPr>
-          <a:xfrm>
-            <a:off x="548640" y="566928"/>
-            <a:ext cx="11094415" cy="822960"/>
-          </a:xfrm>
-          <a:prstGeom prst="rect">
-            <a:avLst/>
-          </a:prstGeom>
-          <a:noFill/>
-        </p:spPr>
-        <p:txBody>
-          <a:bodyPr wrap="square" anchor="ctr" lIns="0" rIns="0" tIns="0" bIns="0"/>
-          <a:lstStyle/>
-          <a:p>
-            <a:pPr algn="l"/>
-            <a:r>
-              <a:rPr sz="3200" b="1" i="0">
-                <a:solidFill>
-                  <a:srgbClr val="03306E"/>
-                </a:solidFill>
-                <a:latin typeface="Cambria"/>
-              </a:rPr>
-              <a:t>Answers</a:t>
-            </a:r>
-          </a:p>
-        </p:txBody>
-      </p:sp>
-      <p:sp>
-        <p:nvSpPr>
-          <p:cNvPr id="4" name="TextBox 3"/>
-          <p:cNvSpPr txBox="1"/>
-          <p:nvPr/>
-        </p:nvSpPr>
-        <p:spPr>
-          <a:xfrm>
-            <a:off x="548640" y="6446520"/>
-            <a:ext cx="8229600" cy="274320"/>
-          </a:xfrm>
-          <a:prstGeom prst="rect">
-            <a:avLst/>
-          </a:prstGeom>
-          <a:noFill/>
-        </p:spPr>
-        <p:txBody>
-          <a:bodyPr wrap="square" anchor="t" lIns="0" rIns="0" tIns="0" bIns="0"/>
-          <a:lstStyle/>
-          <a:p>
-            <a:pPr algn="l"/>
-            <a:r>
-              <a:rPr sz="1000" b="0" i="0">
-                <a:solidFill>
-                  <a:srgbClr val="54595D"/>
-                </a:solidFill>
-                <a:latin typeface="Calibri"/>
-              </a:rPr>
-              <a:t>Digital Software Development T Level  ·  Testing a Software Solution</a:t>
-            </a:r>
-          </a:p>
-        </p:txBody>
-      </p:sp>
-      <p:sp>
-        <p:nvSpPr>
-          <p:cNvPr id="5" name="TextBox 4"/>
-          <p:cNvSpPr txBox="1"/>
-          <p:nvPr/>
-        </p:nvSpPr>
-        <p:spPr>
-          <a:xfrm>
-            <a:off x="10728655" y="6446520"/>
-            <a:ext cx="914400" cy="274320"/>
-          </a:xfrm>
-          <a:prstGeom prst="rect">
-            <a:avLst/>
-          </a:prstGeom>
-          <a:noFill/>
-        </p:spPr>
-        <p:txBody>
-          <a:bodyPr wrap="square" anchor="t" lIns="0" rIns="0" tIns="0" bIns="0"/>
-          <a:lstStyle/>
-          <a:p>
-            <a:pPr algn="r"/>
-            <a:r>
-              <a:rPr sz="1000" b="0" i="0">
-                <a:solidFill>
-                  <a:srgbClr val="54595D"/>
-                </a:solidFill>
-                <a:latin typeface="Calibri"/>
-              </a:rPr>
-              <a:t>7</a:t>
-            </a:r>
-          </a:p>
-        </p:txBody>
-      </p:sp>
-      <p:sp>
-        <p:nvSpPr>
-          <p:cNvPr id="6" name="Oval 5"/>
-          <p:cNvSpPr/>
-          <p:nvPr/>
-        </p:nvSpPr>
-        <p:spPr>
-          <a:xfrm>
-            <a:off x="548640" y="1618488"/>
-            <a:ext cx="411480" cy="411480"/>
-          </a:xfrm>
-          <a:prstGeom prst="ellipse">
-            <a:avLst/>
-          </a:prstGeom>
-          <a:solidFill>
-            <a:srgbClr val="33C17A"/>
-          </a:solidFill>
-          <a:ln>
-            <a:noFill/>
-          </a:ln>
-          <a:effectLst/>
-        </p:spPr>
-        <p:style>
-          <a:lnRef idx="1">
-            <a:schemeClr val="accent1"/>
-          </a:lnRef>
-          <a:fillRef idx="3">
-            <a:schemeClr val="accent1"/>
-          </a:fillRef>
-          <a:effectRef idx="2">
-            <a:schemeClr val="accent1"/>
-          </a:effectRef>
-          <a:fontRef idx="minor">
-            <a:schemeClr val="lt1"/>
-          </a:fontRef>
-        </p:style>
-        <p:txBody>
-          <a:bodyPr rtlCol="0" anchor="ctr" lIns="0" rIns="0" tIns="0" bIns="0"/>
-          <a:lstStyle/>
-          <a:p>
-            <a:pPr algn="ctr"/>
-            <a:r>
-              <a:rPr sz="1400" b="1">
-                <a:solidFill>
-                  <a:srgbClr val="202122"/>
-                </a:solidFill>
-                <a:latin typeface="Calibri"/>
-              </a:rPr>
-              <a:t>1</a:t>
-            </a:r>
-          </a:p>
-        </p:txBody>
-      </p:sp>
-      <p:sp>
-        <p:nvSpPr>
-          <p:cNvPr id="7" name="TextBox 6"/>
-          <p:cNvSpPr txBox="1"/>
-          <p:nvPr/>
-        </p:nvSpPr>
-        <p:spPr>
-          <a:xfrm>
-            <a:off x="1234440" y="1600200"/>
-            <a:ext cx="10408615" cy="1030986"/>
-          </a:xfrm>
-          <a:prstGeom prst="rect">
-            <a:avLst/>
-          </a:prstGeom>
-          <a:noFill/>
-        </p:spPr>
-        <p:txBody>
-          <a:bodyPr wrap="square" anchor="t" lIns="0" rIns="0" tIns="0" bIns="0"/>
-          <a:lstStyle/>
-          <a:p>
-            <a:pPr algn="l"/>
-            <a:r>
-              <a:rPr sz="1800" b="0" i="0">
-                <a:solidFill>
-                  <a:srgbClr val="54595D"/>
-                </a:solidFill>
-                <a:latin typeface="Calibri"/>
-              </a:rPr>
-              <a:t>What is smoke testing?</a:t>
-            </a:r>
-          </a:p>
-          <a:p>
-            <a:r>
-              <a:rPr sz="1800" b="1">
-                <a:solidFill>
-                  <a:srgbClr val="03306E"/>
-                </a:solidFill>
-                <a:latin typeface="Calibri"/>
-              </a:rPr>
-              <a:t>A quick check that the main functions work before deeper testing.</a:t>
-            </a:r>
-          </a:p>
-        </p:txBody>
-      </p:sp>
-      <p:sp>
-        <p:nvSpPr>
-          <p:cNvPr id="8" name="Oval 7"/>
-          <p:cNvSpPr/>
-          <p:nvPr/>
-        </p:nvSpPr>
-        <p:spPr>
-          <a:xfrm>
-            <a:off x="548640" y="2814066"/>
-            <a:ext cx="411480" cy="411480"/>
-          </a:xfrm>
-          <a:prstGeom prst="ellipse">
-            <a:avLst/>
-          </a:prstGeom>
-          <a:solidFill>
-            <a:srgbClr val="33C17A"/>
-          </a:solidFill>
-          <a:ln>
-            <a:noFill/>
-          </a:ln>
-          <a:effectLst/>
-        </p:spPr>
-        <p:style>
-          <a:lnRef idx="1">
-            <a:schemeClr val="accent1"/>
-          </a:lnRef>
-          <a:fillRef idx="3">
-            <a:schemeClr val="accent1"/>
-          </a:fillRef>
-          <a:effectRef idx="2">
-            <a:schemeClr val="accent1"/>
-          </a:effectRef>
-          <a:fontRef idx="minor">
-            <a:schemeClr val="lt1"/>
-          </a:fontRef>
-        </p:style>
-        <p:txBody>
-          <a:bodyPr rtlCol="0" anchor="ctr" lIns="0" rIns="0" tIns="0" bIns="0"/>
-          <a:lstStyle/>
-          <a:p>
-            <a:pPr algn="ctr"/>
-            <a:r>
-              <a:rPr sz="1400" b="1">
-                <a:solidFill>
-                  <a:srgbClr val="202122"/>
-                </a:solidFill>
-                <a:latin typeface="Calibri"/>
-              </a:rPr>
-              <a:t>2</a:t>
-            </a:r>
-          </a:p>
-        </p:txBody>
-      </p:sp>
-      <p:sp>
-        <p:nvSpPr>
-          <p:cNvPr id="9" name="TextBox 8"/>
-          <p:cNvSpPr txBox="1"/>
-          <p:nvPr/>
-        </p:nvSpPr>
-        <p:spPr>
-          <a:xfrm>
-            <a:off x="1234440" y="2795778"/>
-            <a:ext cx="10408615" cy="1030986"/>
-          </a:xfrm>
-          <a:prstGeom prst="rect">
-            <a:avLst/>
-          </a:prstGeom>
-          <a:noFill/>
-        </p:spPr>
-        <p:txBody>
-          <a:bodyPr wrap="square" anchor="t" lIns="0" rIns="0" tIns="0" bIns="0"/>
-          <a:lstStyle/>
-          <a:p>
-            <a:pPr algn="l"/>
-            <a:r>
-              <a:rPr sz="1800" b="0" i="0">
-                <a:solidFill>
-                  <a:srgbClr val="54595D"/>
-                </a:solidFill>
-                <a:latin typeface="Calibri"/>
-              </a:rPr>
-              <a:t>What is the difference between alpha and beta testing?</a:t>
-            </a:r>
-          </a:p>
-          <a:p>
-            <a:r>
-              <a:rPr sz="1800" b="1">
-                <a:solidFill>
-                  <a:srgbClr val="03306E"/>
-                </a:solidFill>
-                <a:latin typeface="Calibri"/>
-              </a:rPr>
-              <a:t>Alpha is internal; beta uses a limited group of real external users.</a:t>
-            </a:r>
-          </a:p>
-        </p:txBody>
-      </p:sp>
-      <p:sp>
-        <p:nvSpPr>
-          <p:cNvPr id="10" name="Oval 9"/>
-          <p:cNvSpPr/>
-          <p:nvPr/>
-        </p:nvSpPr>
-        <p:spPr>
-          <a:xfrm>
-            <a:off x="548640" y="4009644"/>
-            <a:ext cx="411480" cy="411480"/>
-          </a:xfrm>
-          <a:prstGeom prst="ellipse">
-            <a:avLst/>
-          </a:prstGeom>
-          <a:solidFill>
-            <a:srgbClr val="33C17A"/>
-          </a:solidFill>
-          <a:ln>
-            <a:noFill/>
-          </a:ln>
-          <a:effectLst/>
-        </p:spPr>
-        <p:style>
-          <a:lnRef idx="1">
-            <a:schemeClr val="accent1"/>
-          </a:lnRef>
-          <a:fillRef idx="3">
-            <a:schemeClr val="accent1"/>
-          </a:fillRef>
-          <a:effectRef idx="2">
-            <a:schemeClr val="accent1"/>
-          </a:effectRef>
-          <a:fontRef idx="minor">
-            <a:schemeClr val="lt1"/>
-          </a:fontRef>
-        </p:style>
-        <p:txBody>
-          <a:bodyPr rtlCol="0" anchor="ctr" lIns="0" rIns="0" tIns="0" bIns="0"/>
-          <a:lstStyle/>
-          <a:p>
-            <a:pPr algn="ctr"/>
-            <a:r>
-              <a:rPr sz="1400" b="1">
-                <a:solidFill>
-                  <a:srgbClr val="202122"/>
-                </a:solidFill>
-                <a:latin typeface="Calibri"/>
-              </a:rPr>
-              <a:t>3</a:t>
-            </a:r>
-          </a:p>
-        </p:txBody>
-      </p:sp>
-      <p:sp>
-        <p:nvSpPr>
-          <p:cNvPr id="11" name="TextBox 10"/>
-          <p:cNvSpPr txBox="1"/>
-          <p:nvPr/>
-        </p:nvSpPr>
-        <p:spPr>
-          <a:xfrm>
-            <a:off x="1234440" y="3991356"/>
-            <a:ext cx="10408615" cy="1030986"/>
-          </a:xfrm>
-          <a:prstGeom prst="rect">
-            <a:avLst/>
-          </a:prstGeom>
-          <a:noFill/>
-        </p:spPr>
-        <p:txBody>
-          <a:bodyPr wrap="square" anchor="t" lIns="0" rIns="0" tIns="0" bIns="0"/>
-          <a:lstStyle/>
-          <a:p>
-            <a:pPr algn="l"/>
-            <a:r>
-              <a:rPr sz="1800" b="0" i="0">
-                <a:solidFill>
-                  <a:srgbClr val="54595D"/>
-                </a:solidFill>
-                <a:latin typeface="Calibri"/>
-              </a:rPr>
-              <a:t>For a range 1 to 100, give valid extreme and invalid extreme values.</a:t>
-            </a:r>
-          </a:p>
-          <a:p>
-            <a:r>
-              <a:rPr sz="1800" b="1">
-                <a:solidFill>
-                  <a:srgbClr val="03306E"/>
-                </a:solidFill>
-                <a:latin typeface="Calibri"/>
-              </a:rPr>
-              <a:t>Valid extreme: 1 or 100. Invalid extreme: 0 or 101.</a:t>
-            </a:r>
-          </a:p>
-        </p:txBody>
-      </p:sp>
-      <p:sp>
-        <p:nvSpPr>
-          <p:cNvPr id="12" name="Oval 11"/>
-          <p:cNvSpPr/>
-          <p:nvPr/>
-        </p:nvSpPr>
-        <p:spPr>
-          <a:xfrm>
-            <a:off x="548640" y="5205221"/>
-            <a:ext cx="411480" cy="411480"/>
-          </a:xfrm>
-          <a:prstGeom prst="ellipse">
-            <a:avLst/>
-          </a:prstGeom>
-          <a:solidFill>
-            <a:srgbClr val="33C17A"/>
-          </a:solidFill>
-          <a:ln>
-            <a:noFill/>
-          </a:ln>
-          <a:effectLst/>
-        </p:spPr>
-        <p:style>
-          <a:lnRef idx="1">
-            <a:schemeClr val="accent1"/>
-          </a:lnRef>
-          <a:fillRef idx="3">
-            <a:schemeClr val="accent1"/>
-          </a:fillRef>
-          <a:effectRef idx="2">
-            <a:schemeClr val="accent1"/>
-          </a:effectRef>
-          <a:fontRef idx="minor">
-            <a:schemeClr val="lt1"/>
-          </a:fontRef>
-        </p:style>
-        <p:txBody>
-          <a:bodyPr rtlCol="0" anchor="ctr" lIns="0" rIns="0" tIns="0" bIns="0"/>
-          <a:lstStyle/>
-          <a:p>
-            <a:pPr algn="ctr"/>
-            <a:r>
-              <a:rPr sz="1400" b="1">
-                <a:solidFill>
-                  <a:srgbClr val="202122"/>
-                </a:solidFill>
-                <a:latin typeface="Calibri"/>
-              </a:rPr>
-              <a:t>4</a:t>
-            </a:r>
-          </a:p>
-        </p:txBody>
-      </p:sp>
-      <p:sp>
-        <p:nvSpPr>
-          <p:cNvPr id="13" name="TextBox 12"/>
-          <p:cNvSpPr txBox="1"/>
-          <p:nvPr/>
-        </p:nvSpPr>
-        <p:spPr>
-          <a:xfrm>
-            <a:off x="1234440" y="5186933"/>
-            <a:ext cx="10408615" cy="1030986"/>
-          </a:xfrm>
-          <a:prstGeom prst="rect">
-            <a:avLst/>
-          </a:prstGeom>
-          <a:noFill/>
-        </p:spPr>
-        <p:txBody>
-          <a:bodyPr wrap="square" anchor="t" lIns="0" rIns="0" tIns="0" bIns="0"/>
-          <a:lstStyle/>
-          <a:p>
-            <a:pPr algn="l"/>
-            <a:r>
-              <a:rPr sz="1800" b="0" i="0">
-                <a:solidFill>
-                  <a:srgbClr val="54595D"/>
-                </a:solidFill>
-                <a:latin typeface="Calibri"/>
-              </a:rPr>
-              <a:t>What is static analysis?</a:t>
-            </a:r>
-          </a:p>
-          <a:p>
-            <a:r>
-              <a:rPr sz="1800" b="1">
-                <a:solidFill>
-                  <a:srgbClr val="03306E"/>
-                </a:solidFill>
-                <a:latin typeface="Calibri"/>
-              </a:rPr>
-              <a:t>Checking code for problems without running it.</a:t>
-            </a:r>
-          </a:p>
-        </p:txBody>
-      </p:sp>
-    </p:spTree>
-  </p:cSld>
-  <p:clrMapOvr>
-    <a:masterClrMapping/>
-  </p:clrMapOvr>
-</p:sld>
-</file>
-
 <file path=ppt/slides/slide8.xml><?xml version="1.0" encoding="utf-8"?>
 <p:sld xmlns:a="http://schemas.openxmlformats.org/drawingml/2006/main" xmlns:p="http://schemas.openxmlformats.org/presentationml/2006/main" xmlns:r="http://schemas.openxmlformats.org/officeDocument/2006/relationships">
   <p:cSld>
@@ -8093,7 +11378,7 @@
                 </a:solidFill>
                 <a:latin typeface="Cambria"/>
               </a:rPr>
-              <a:t>Activity: Full test plan</a:t>
+              <a:t>Quick check: Testing techniques</a:t>
             </a:r>
           </a:p>
         </p:txBody>
@@ -8166,19 +11451,17 @@
       </p:sp>
       <p:sp>
         <p:nvSpPr>
-          <p:cNvPr id="6" name="Rounded Rectangle 5"/>
+          <p:cNvPr id="6" name="Oval 5"/>
           <p:cNvSpPr/>
           <p:nvPr/>
         </p:nvSpPr>
         <p:spPr>
           <a:xfrm>
-            <a:off x="548640" y="1508760"/>
-            <a:ext cx="2011680" cy="457200"/>
-          </a:xfrm>
-          <a:prstGeom prst="roundRect">
-            <a:avLst>
-              <a:gd name="adj" fmla="val 50000"/>
-            </a:avLst>
+            <a:off x="548640" y="1691640"/>
+            <a:ext cx="502920" cy="502920"/>
+          </a:xfrm>
+          <a:prstGeom prst="ellipse">
+            <a:avLst/>
           </a:prstGeom>
           <a:solidFill>
             <a:srgbClr val="33C17A"/>
@@ -8203,9 +11486,20 @@
           </a:fontRef>
         </p:style>
         <p:txBody>
-          <a:bodyPr rtlCol="0" anchor="ctr"/>
-          <a:lstStyle/>
-          <a:p/>
+          <a:bodyPr rtlCol="0" anchor="ctr" lIns="0" rIns="0" tIns="0" bIns="0"/>
+          <a:lstStyle/>
+          <a:p>
+            <a:pPr algn="ctr"/>
+            <a:r>
+              <a:rPr sz="1600" b="1">
+                <a:solidFill>
+                  <a:srgbClr val="202122"/>
+                </a:solidFill>
+                <a:latin typeface="Calibri"/>
+              </a:rPr>
+              <a:t>1</a:t>
+            </a:r>
+          </a:p>
         </p:txBody>
       </p:sp>
       <p:sp>
@@ -8216,80 +11510,47 @@
         </p:nvSpPr>
         <p:spPr>
           <a:xfrm>
-            <a:off x="548640" y="1508760"/>
-            <a:ext cx="2011680" cy="457200"/>
-          </a:xfrm>
-          <a:prstGeom prst="rect">
-            <a:avLst/>
-          </a:prstGeom>
-          <a:noFill/>
-        </p:spPr>
-        <p:txBody>
-          <a:bodyPr wrap="square" anchor="ctr" lIns="0" rIns="0" tIns="0" bIns="0"/>
-          <a:lstStyle/>
-          <a:p>
-            <a:pPr algn="ctr"/>
-            <a:r>
-              <a:rPr sz="1400" b="1" i="0">
+            <a:off x="1371600" y="1645920"/>
+            <a:ext cx="10271455" cy="1188720"/>
+          </a:xfrm>
+          <a:prstGeom prst="rect">
+            <a:avLst/>
+          </a:prstGeom>
+          <a:noFill/>
+        </p:spPr>
+        <p:txBody>
+          <a:bodyPr wrap="square" anchor="t" lIns="0" rIns="0" tIns="0" bIns="0"/>
+          <a:lstStyle/>
+          <a:p>
+            <a:pPr algn="l"/>
+            <a:r>
+              <a:rPr sz="2400" b="0" i="0">
                 <a:solidFill>
                   <a:srgbClr val="202122"/>
                 </a:solidFill>
                 <a:latin typeface="Calibri"/>
               </a:rPr>
-              <a:t>35 minutes</a:t>
-            </a:r>
-          </a:p>
-        </p:txBody>
-      </p:sp>
-      <p:sp>
-        <p:nvSpPr>
-          <p:cNvPr id="8" name="TextBox 7"/>
-          <p:cNvSpPr txBox="1"/>
-          <p:nvPr/>
-        </p:nvSpPr>
-        <p:spPr>
-          <a:xfrm>
-            <a:off x="2743200" y="1508760"/>
-            <a:ext cx="4754880" cy="457200"/>
-          </a:xfrm>
-          <a:prstGeom prst="rect">
-            <a:avLst/>
-          </a:prstGeom>
-          <a:noFill/>
-        </p:spPr>
-        <p:txBody>
-          <a:bodyPr wrap="square" anchor="ctr" lIns="0" rIns="0" tIns="0" bIns="0"/>
-          <a:lstStyle/>
-          <a:p>
-            <a:pPr algn="l"/>
-            <a:r>
-              <a:rPr sz="1400" b="0" i="1">
-                <a:solidFill>
-                  <a:srgbClr val="54595D"/>
-                </a:solidFill>
-                <a:latin typeface="Calibri"/>
-              </a:rPr>
-              <a:t>Pairs</a:t>
-            </a:r>
-          </a:p>
-        </p:txBody>
-      </p:sp>
-      <p:sp>
-        <p:nvSpPr>
-          <p:cNvPr id="9" name="Oval 8"/>
+              <a:t>What is the difference between alpha and beta testing?</a:t>
+            </a:r>
+          </a:p>
+        </p:txBody>
+      </p:sp>
+      <p:sp>
+        <p:nvSpPr>
+          <p:cNvPr id="8" name="Oval 7"/>
           <p:cNvSpPr/>
           <p:nvPr/>
         </p:nvSpPr>
         <p:spPr>
           <a:xfrm>
-            <a:off x="548640" y="2482596"/>
-            <a:ext cx="384048" cy="384048"/>
+            <a:off x="548640" y="3108960"/>
+            <a:ext cx="502920" cy="502920"/>
           </a:xfrm>
           <a:prstGeom prst="ellipse">
             <a:avLst/>
           </a:prstGeom>
           <a:solidFill>
-            <a:srgbClr val="0645AD"/>
+            <a:srgbClr val="33C17A"/>
           </a:solidFill>
           <a:ln>
             <a:noFill/>
@@ -8316,66 +11577,66 @@
           <a:p>
             <a:pPr algn="ctr"/>
             <a:r>
-              <a:rPr sz="1300" b="1">
-                <a:solidFill>
-                  <a:srgbClr val="FFFFFF"/>
-                </a:solidFill>
-                <a:latin typeface="Calibri"/>
-              </a:rPr>
-              <a:t>1</a:t>
-            </a:r>
-          </a:p>
-        </p:txBody>
-      </p:sp>
-      <p:sp>
-        <p:nvSpPr>
-          <p:cNvPr id="10" name="TextBox 9"/>
-          <p:cNvSpPr txBox="1"/>
-          <p:nvPr/>
-        </p:nvSpPr>
-        <p:spPr>
-          <a:xfrm>
-            <a:off x="1143000" y="2240280"/>
-            <a:ext cx="5943600" cy="868680"/>
-          </a:xfrm>
-          <a:prstGeom prst="rect">
-            <a:avLst/>
-          </a:prstGeom>
-          <a:noFill/>
-        </p:spPr>
-        <p:txBody>
-          <a:bodyPr wrap="square" anchor="ctr" lIns="0" rIns="0" tIns="0" bIns="0"/>
+              <a:rPr sz="1600" b="1">
+                <a:solidFill>
+                  <a:srgbClr val="202122"/>
+                </a:solidFill>
+                <a:latin typeface="Calibri"/>
+              </a:rPr>
+              <a:t>2</a:t>
+            </a:r>
+          </a:p>
+        </p:txBody>
+      </p:sp>
+      <p:sp>
+        <p:nvSpPr>
+          <p:cNvPr id="9" name="TextBox 8"/>
+          <p:cNvSpPr txBox="1"/>
+          <p:nvPr/>
+        </p:nvSpPr>
+        <p:spPr>
+          <a:xfrm>
+            <a:off x="1371600" y="3063240"/>
+            <a:ext cx="10271455" cy="1188720"/>
+          </a:xfrm>
+          <a:prstGeom prst="rect">
+            <a:avLst/>
+          </a:prstGeom>
+          <a:noFill/>
+        </p:spPr>
+        <p:txBody>
+          <a:bodyPr wrap="square" anchor="t" lIns="0" rIns="0" tIns="0" bIns="0"/>
           <a:lstStyle/>
           <a:p>
             <a:pPr algn="l"/>
             <a:r>
-              <a:rPr sz="1700" b="0" i="0">
+              <a:rPr sz="2400" b="0" i="0">
                 <a:solidFill>
                   <a:srgbClr val="202122"/>
                 </a:solidFill>
                 <a:latin typeface="Calibri"/>
               </a:rPr>
-              <a:t>Choose a feature from your own project.</a:t>
-            </a:r>
-          </a:p>
-        </p:txBody>
-      </p:sp>
-      <p:sp>
-        <p:nvSpPr>
-          <p:cNvPr id="11" name="Oval 10"/>
+              <a:t>What does open box testing use?</a:t>
+            </a:r>
+          </a:p>
+        </p:txBody>
+      </p:sp>
+      <p:sp>
+        <p:nvSpPr>
+          <p:cNvPr id="10" name="Oval 9"/>
           <p:cNvSpPr/>
           <p:nvPr/>
         </p:nvSpPr>
         <p:spPr>
           <a:xfrm>
-            <a:off x="548640" y="3461004"/>
-            <a:ext cx="384048" cy="384048"/>
+            <a:off x="548640" y="4526280"/>
+            <a:ext cx="502920" cy="502920"/>
           </a:xfrm>
           <a:prstGeom prst="ellipse">
             <a:avLst/>
           </a:prstGeom>
           <a:solidFill>
-            <a:srgbClr val="0645AD"/>
+            <a:srgbClr val="33C17A"/>
           </a:solidFill>
           <a:ln>
             <a:noFill/>
@@ -8402,13 +11663,46 @@
           <a:p>
             <a:pPr algn="ctr"/>
             <a:r>
-              <a:rPr sz="1300" b="1">
-                <a:solidFill>
-                  <a:srgbClr val="FFFFFF"/>
-                </a:solidFill>
-                <a:latin typeface="Calibri"/>
-              </a:rPr>
-              <a:t>2</a:t>
+              <a:rPr sz="1600" b="1">
+                <a:solidFill>
+                  <a:srgbClr val="202122"/>
+                </a:solidFill>
+                <a:latin typeface="Calibri"/>
+              </a:rPr>
+              <a:t>3</a:t>
+            </a:r>
+          </a:p>
+        </p:txBody>
+      </p:sp>
+      <p:sp>
+        <p:nvSpPr>
+          <p:cNvPr id="11" name="TextBox 10"/>
+          <p:cNvSpPr txBox="1"/>
+          <p:nvPr/>
+        </p:nvSpPr>
+        <p:spPr>
+          <a:xfrm>
+            <a:off x="1371600" y="4480560"/>
+            <a:ext cx="10271455" cy="1188720"/>
+          </a:xfrm>
+          <a:prstGeom prst="rect">
+            <a:avLst/>
+          </a:prstGeom>
+          <a:noFill/>
+        </p:spPr>
+        <p:txBody>
+          <a:bodyPr wrap="square" anchor="t" lIns="0" rIns="0" tIns="0" bIns="0"/>
+          <a:lstStyle/>
+          <a:p>
+            <a:pPr algn="l"/>
+            <a:r>
+              <a:rPr sz="2400" b="0" i="0">
+                <a:solidFill>
+                  <a:srgbClr val="202122"/>
+                </a:solidFill>
+                <a:latin typeface="Calibri"/>
+              </a:rPr>
+              <a:t>What does acceptance testing check?</a:t>
             </a:r>
           </a:p>
         </p:txBody>
@@ -8421,362 +11715,27 @@
         </p:nvSpPr>
         <p:spPr>
           <a:xfrm>
-            <a:off x="1143000" y="3218688"/>
-            <a:ext cx="5943600" cy="868680"/>
-          </a:xfrm>
-          <a:prstGeom prst="rect">
-            <a:avLst/>
-          </a:prstGeom>
-          <a:noFill/>
-        </p:spPr>
-        <p:txBody>
-          <a:bodyPr wrap="square" anchor="ctr" lIns="0" rIns="0" tIns="0" bIns="0"/>
+            <a:off x="548640" y="5852160"/>
+            <a:ext cx="11094415" cy="365760"/>
+          </a:xfrm>
+          <a:prstGeom prst="rect">
+            <a:avLst/>
+          </a:prstGeom>
+          <a:noFill/>
+        </p:spPr>
+        <p:txBody>
+          <a:bodyPr wrap="square" anchor="t" lIns="0" rIns="0" tIns="0" bIns="0"/>
           <a:lstStyle/>
           <a:p>
             <a:pPr algn="l"/>
             <a:r>
-              <a:rPr sz="1700" b="0" i="0">
-                <a:solidFill>
-                  <a:srgbClr val="202122"/>
-                </a:solidFill>
-                <a:latin typeface="Calibri"/>
-              </a:rPr>
-              <a:t>Write tests using all five test data types.</a:t>
-            </a:r>
-          </a:p>
-        </p:txBody>
-      </p:sp>
-      <p:sp>
-        <p:nvSpPr>
-          <p:cNvPr id="13" name="Oval 12"/>
-          <p:cNvSpPr/>
-          <p:nvPr/>
-        </p:nvSpPr>
-        <p:spPr>
-          <a:xfrm>
-            <a:off x="548640" y="4439412"/>
-            <a:ext cx="384048" cy="384048"/>
-          </a:xfrm>
-          <a:prstGeom prst="ellipse">
-            <a:avLst/>
-          </a:prstGeom>
-          <a:solidFill>
-            <a:srgbClr val="0645AD"/>
-          </a:solidFill>
-          <a:ln>
-            <a:noFill/>
-          </a:ln>
-          <a:effectLst/>
-        </p:spPr>
-        <p:style>
-          <a:lnRef idx="1">
-            <a:schemeClr val="accent1"/>
-          </a:lnRef>
-          <a:fillRef idx="3">
-            <a:schemeClr val="accent1"/>
-          </a:fillRef>
-          <a:effectRef idx="2">
-            <a:schemeClr val="accent1"/>
-          </a:effectRef>
-          <a:fontRef idx="minor">
-            <a:schemeClr val="lt1"/>
-          </a:fontRef>
-        </p:style>
-        <p:txBody>
-          <a:bodyPr rtlCol="0" anchor="ctr" lIns="0" rIns="0" tIns="0" bIns="0"/>
-          <a:lstStyle/>
-          <a:p>
-            <a:pPr algn="ctr"/>
-            <a:r>
-              <a:rPr sz="1300" b="1">
-                <a:solidFill>
-                  <a:srgbClr val="FFFFFF"/>
-                </a:solidFill>
-                <a:latin typeface="Calibri"/>
-              </a:rPr>
-              <a:t>3</a:t>
-            </a:r>
-          </a:p>
-        </p:txBody>
-      </p:sp>
-      <p:sp>
-        <p:nvSpPr>
-          <p:cNvPr id="14" name="TextBox 13"/>
-          <p:cNvSpPr txBox="1"/>
-          <p:nvPr/>
-        </p:nvSpPr>
-        <p:spPr>
-          <a:xfrm>
-            <a:off x="1143000" y="4197096"/>
-            <a:ext cx="5943600" cy="868680"/>
-          </a:xfrm>
-          <a:prstGeom prst="rect">
-            <a:avLst/>
-          </a:prstGeom>
-          <a:noFill/>
-        </p:spPr>
-        <p:txBody>
-          <a:bodyPr wrap="square" anchor="ctr" lIns="0" rIns="0" tIns="0" bIns="0"/>
-          <a:lstStyle/>
-          <a:p>
-            <a:pPr algn="l"/>
-            <a:r>
-              <a:rPr sz="1700" b="0" i="0">
-                <a:solidFill>
-                  <a:srgbClr val="202122"/>
-                </a:solidFill>
-                <a:latin typeface="Calibri"/>
-              </a:rPr>
-              <a:t>Add one front-end and one security test.</a:t>
-            </a:r>
-          </a:p>
-        </p:txBody>
-      </p:sp>
-      <p:sp>
-        <p:nvSpPr>
-          <p:cNvPr id="15" name="Oval 14"/>
-          <p:cNvSpPr/>
-          <p:nvPr/>
-        </p:nvSpPr>
-        <p:spPr>
-          <a:xfrm>
-            <a:off x="548640" y="5417820"/>
-            <a:ext cx="384048" cy="384048"/>
-          </a:xfrm>
-          <a:prstGeom prst="ellipse">
-            <a:avLst/>
-          </a:prstGeom>
-          <a:solidFill>
-            <a:srgbClr val="0645AD"/>
-          </a:solidFill>
-          <a:ln>
-            <a:noFill/>
-          </a:ln>
-          <a:effectLst/>
-        </p:spPr>
-        <p:style>
-          <a:lnRef idx="1">
-            <a:schemeClr val="accent1"/>
-          </a:lnRef>
-          <a:fillRef idx="3">
-            <a:schemeClr val="accent1"/>
-          </a:fillRef>
-          <a:effectRef idx="2">
-            <a:schemeClr val="accent1"/>
-          </a:effectRef>
-          <a:fontRef idx="minor">
-            <a:schemeClr val="lt1"/>
-          </a:fontRef>
-        </p:style>
-        <p:txBody>
-          <a:bodyPr rtlCol="0" anchor="ctr" lIns="0" rIns="0" tIns="0" bIns="0"/>
-          <a:lstStyle/>
-          <a:p>
-            <a:pPr algn="ctr"/>
-            <a:r>
-              <a:rPr sz="1300" b="1">
-                <a:solidFill>
-                  <a:srgbClr val="FFFFFF"/>
-                </a:solidFill>
-                <a:latin typeface="Calibri"/>
-              </a:rPr>
-              <a:t>4</a:t>
-            </a:r>
-          </a:p>
-        </p:txBody>
-      </p:sp>
-      <p:sp>
-        <p:nvSpPr>
-          <p:cNvPr id="16" name="TextBox 15"/>
-          <p:cNvSpPr txBox="1"/>
-          <p:nvPr/>
-        </p:nvSpPr>
-        <p:spPr>
-          <a:xfrm>
-            <a:off x="1143000" y="5175504"/>
-            <a:ext cx="5943600" cy="868680"/>
-          </a:xfrm>
-          <a:prstGeom prst="rect">
-            <a:avLst/>
-          </a:prstGeom>
-          <a:noFill/>
-        </p:spPr>
-        <p:txBody>
-          <a:bodyPr wrap="square" anchor="ctr" lIns="0" rIns="0" tIns="0" bIns="0"/>
-          <a:lstStyle/>
-          <a:p>
-            <a:pPr algn="l"/>
-            <a:r>
-              <a:rPr sz="1700" b="0" i="0">
-                <a:solidFill>
-                  <a:srgbClr val="202122"/>
-                </a:solidFill>
-                <a:latin typeface="Calibri"/>
-              </a:rPr>
-              <a:t>Run them, record results and plan regression tests.</a:t>
-            </a:r>
-          </a:p>
-        </p:txBody>
-      </p:sp>
-      <p:sp>
-        <p:nvSpPr>
-          <p:cNvPr id="17" name="Rounded Rectangle 16"/>
-          <p:cNvSpPr/>
-          <p:nvPr/>
-        </p:nvSpPr>
-        <p:spPr>
-          <a:xfrm>
-            <a:off x="7772400" y="1508760"/>
-            <a:ext cx="3867912" cy="4572000"/>
-          </a:xfrm>
-          <a:prstGeom prst="roundRect">
-            <a:avLst>
-              <a:gd name="adj" fmla="val 8000"/>
-            </a:avLst>
-          </a:prstGeom>
-          <a:solidFill>
-            <a:srgbClr val="EAF3FF"/>
-          </a:solidFill>
-          <a:ln>
-            <a:noFill/>
-          </a:ln>
-          <a:effectLst/>
-        </p:spPr>
-        <p:style>
-          <a:lnRef idx="1">
-            <a:schemeClr val="accent1"/>
-          </a:lnRef>
-          <a:fillRef idx="3">
-            <a:schemeClr val="accent1"/>
-          </a:fillRef>
-          <a:effectRef idx="2">
-            <a:schemeClr val="accent1"/>
-          </a:effectRef>
-          <a:fontRef idx="minor">
-            <a:schemeClr val="lt1"/>
-          </a:fontRef>
-        </p:style>
-        <p:txBody>
-          <a:bodyPr rtlCol="0" anchor="ctr"/>
-          <a:lstStyle/>
-          <a:p/>
-        </p:txBody>
-      </p:sp>
-      <p:sp>
-        <p:nvSpPr>
-          <p:cNvPr id="18" name="TextBox 17"/>
-          <p:cNvSpPr txBox="1"/>
-          <p:nvPr/>
-        </p:nvSpPr>
-        <p:spPr>
-          <a:xfrm>
-            <a:off x="8046720" y="1737360"/>
-            <a:ext cx="3291840" cy="365760"/>
-          </a:xfrm>
-          <a:prstGeom prst="rect">
-            <a:avLst/>
-          </a:prstGeom>
-          <a:noFill/>
-        </p:spPr>
-        <p:txBody>
-          <a:bodyPr wrap="square" anchor="t" lIns="0" rIns="0" tIns="0" bIns="0"/>
-          <a:lstStyle/>
-          <a:p>
-            <a:pPr algn="l"/>
-            <a:r>
-              <a:rPr sz="1300" b="1" i="0">
-                <a:solidFill>
-                  <a:srgbClr val="0645AD"/>
-                </a:solidFill>
-                <a:latin typeface="Calibri"/>
-              </a:rPr>
-              <a:t>SUCCESS CRITERIA</a:t>
-            </a:r>
-          </a:p>
-        </p:txBody>
-      </p:sp>
-      <p:sp>
-        <p:nvSpPr>
-          <p:cNvPr id="19" name="TextBox 18"/>
-          <p:cNvSpPr txBox="1"/>
-          <p:nvPr/>
-        </p:nvSpPr>
-        <p:spPr>
-          <a:xfrm>
-            <a:off x="8046720" y="2240280"/>
-            <a:ext cx="3337560" cy="3657600"/>
-          </a:xfrm>
-          <a:prstGeom prst="rect">
-            <a:avLst/>
-          </a:prstGeom>
-          <a:noFill/>
-        </p:spPr>
-        <p:txBody>
-          <a:bodyPr wrap="square" lIns="0" rIns="0" tIns="0" bIns="0">
-            <a:spAutoFit/>
-          </a:bodyPr>
-          <a:lstStyle/>
-          <a:p>
-            <a:pPr marL="274320" indent="-274320">
-              <a:spcAft>
-                <a:spcPts val="810"/>
-              </a:spcAft>
-              <a:buClr>
-                <a:srgbClr val="0645AD"/>
-              </a:buClr>
-              <a:buFont typeface="Arial"/>
-              <a:buChar char="•"/>
-            </a:pPr>
-            <a:r>
-              <a:rPr sz="1800" b="0">
-                <a:solidFill>
-                  <a:srgbClr val="202122"/>
-                </a:solidFill>
-                <a:latin typeface="Calibri"/>
-              </a:rPr>
-              <a:t>Pre-requisites stated</a:t>
-            </a:r>
-          </a:p>
-          <a:p>
-            <a:pPr marL="274320" indent="-274320">
-              <a:spcAft>
-                <a:spcPts val="810"/>
-              </a:spcAft>
-              <a:buClr>
-                <a:srgbClr val="0645AD"/>
-              </a:buClr>
-              <a:buFont typeface="Arial"/>
-              <a:buChar char="•"/>
-            </a:pPr>
-            <a:r>
-              <a:rPr sz="1800" b="0">
-                <a:solidFill>
-                  <a:srgbClr val="202122"/>
-                </a:solidFill>
-                <a:latin typeface="Calibri"/>
-              </a:rPr>
-              <a:t>All data types used</a:t>
-            </a:r>
-          </a:p>
-          <a:p>
-            <a:pPr marL="274320" indent="-274320">
-              <a:spcAft>
-                <a:spcPts val="810"/>
-              </a:spcAft>
-              <a:buClr>
-                <a:srgbClr val="0645AD"/>
-              </a:buClr>
-              <a:buFont typeface="Arial"/>
-              <a:buChar char="•"/>
-            </a:pPr>
-            <a:r>
-              <a:rPr sz="1800" b="0">
-                <a:solidFill>
-                  <a:srgbClr val="202122"/>
-                </a:solidFill>
-                <a:latin typeface="Calibri"/>
-              </a:rPr>
-              <a:t>Regression testing planned</a:t>
+              <a:rPr sz="1300" b="0" i="1">
+                <a:solidFill>
+                  <a:srgbClr val="54595D"/>
+                </a:solidFill>
+                <a:latin typeface="Calibri"/>
+              </a:rPr>
+              <a:t>Answer on mini whiteboards or in your book. Answers are in the speaker notes.</a:t>
             </a:r>
           </a:p>
         </p:txBody>
@@ -8795,7 +11754,7 @@
     <p:bg>
       <p:bgPr>
         <a:solidFill>
-          <a:srgbClr val="03306E"/>
+          <a:srgbClr val="FFFFFF"/>
         </a:solidFill>
         <a:effectLst/>
       </p:bgPr>
@@ -8831,7 +11790,7 @@
             <a:r>
               <a:rPr sz="1100" b="1" i="0">
                 <a:solidFill>
-                  <a:srgbClr val="A9C8F0"/>
+                  <a:srgbClr val="54595D"/>
                 </a:solidFill>
                 <a:latin typeface="Calibri"/>
               </a:rPr>
@@ -8864,25 +11823,206 @@
             <a:r>
               <a:rPr sz="3200" b="1" i="0">
                 <a:solidFill>
-                  <a:srgbClr val="FFFFFF"/>
+                  <a:srgbClr val="03306E"/>
                 </a:solidFill>
                 <a:latin typeface="Cambria"/>
               </a:rPr>
-              <a:t>Exit ticket</a:t>
-            </a:r>
-          </a:p>
-        </p:txBody>
-      </p:sp>
-      <p:sp>
-        <p:nvSpPr>
-          <p:cNvPr id="4" name="Oval 3"/>
+              <a:t>Test data</a:t>
+            </a:r>
+          </a:p>
+        </p:txBody>
+      </p:sp>
+      <p:sp>
+        <p:nvSpPr>
+          <p:cNvPr id="4" name="TextBox 3"/>
+          <p:cNvSpPr txBox="1"/>
+          <p:nvPr/>
+        </p:nvSpPr>
+        <p:spPr>
+          <a:xfrm>
+            <a:off x="548640" y="6446520"/>
+            <a:ext cx="8229600" cy="274320"/>
+          </a:xfrm>
+          <a:prstGeom prst="rect">
+            <a:avLst/>
+          </a:prstGeom>
+          <a:noFill/>
+        </p:spPr>
+        <p:txBody>
+          <a:bodyPr wrap="square" anchor="t" lIns="0" rIns="0" tIns="0" bIns="0"/>
+          <a:lstStyle/>
+          <a:p>
+            <a:pPr algn="l"/>
+            <a:r>
+              <a:rPr sz="1000" b="0" i="0">
+                <a:solidFill>
+                  <a:srgbClr val="54595D"/>
+                </a:solidFill>
+                <a:latin typeface="Calibri"/>
+              </a:rPr>
+              <a:t>Digital Software Development T Level  ·  Testing a Software Solution</a:t>
+            </a:r>
+          </a:p>
+        </p:txBody>
+      </p:sp>
+      <p:sp>
+        <p:nvSpPr>
+          <p:cNvPr id="5" name="TextBox 4"/>
+          <p:cNvSpPr txBox="1"/>
+          <p:nvPr/>
+        </p:nvSpPr>
+        <p:spPr>
+          <a:xfrm>
+            <a:off x="10728655" y="6446520"/>
+            <a:ext cx="914400" cy="274320"/>
+          </a:xfrm>
+          <a:prstGeom prst="rect">
+            <a:avLst/>
+          </a:prstGeom>
+          <a:noFill/>
+        </p:spPr>
+        <p:txBody>
+          <a:bodyPr wrap="square" anchor="t" lIns="0" rIns="0" tIns="0" bIns="0"/>
+          <a:lstStyle/>
+          <a:p>
+            <a:pPr algn="r"/>
+            <a:r>
+              <a:rPr sz="1000" b="0" i="0">
+                <a:solidFill>
+                  <a:srgbClr val="54595D"/>
+                </a:solidFill>
+                <a:latin typeface="Calibri"/>
+              </a:rPr>
+              <a:t>9</a:t>
+            </a:r>
+          </a:p>
+        </p:txBody>
+      </p:sp>
+      <p:sp>
+        <p:nvSpPr>
+          <p:cNvPr id="6" name="TextBox 5"/>
+          <p:cNvSpPr txBox="1"/>
+          <p:nvPr/>
+        </p:nvSpPr>
+        <p:spPr>
+          <a:xfrm>
+            <a:off x="548640" y="1554480"/>
+            <a:ext cx="6720840" cy="4617720"/>
+          </a:xfrm>
+          <a:prstGeom prst="rect">
+            <a:avLst/>
+          </a:prstGeom>
+          <a:noFill/>
+        </p:spPr>
+        <p:txBody>
+          <a:bodyPr wrap="square" lIns="0" rIns="0" tIns="0" bIns="0">
+            <a:spAutoFit/>
+          </a:bodyPr>
+          <a:lstStyle/>
+          <a:p>
+            <a:pPr>
+              <a:spcAft>
+                <a:spcPts val="1320"/>
+              </a:spcAft>
+            </a:pPr>
+            <a:r>
+              <a:rPr sz="2200" b="0">
+                <a:solidFill>
+                  <a:srgbClr val="202122"/>
+                </a:solidFill>
+                <a:latin typeface="Calibri"/>
+              </a:rPr>
+              <a:t>Each test needs a purpose, test data, any prerequisites and an expected result.</a:t>
+            </a:r>
+          </a:p>
+          <a:p>
+            <a:pPr>
+              <a:spcAft>
+                <a:spcPts val="1320"/>
+              </a:spcAft>
+            </a:pPr>
+            <a:r>
+              <a:rPr sz="2200" b="0">
+                <a:solidFill>
+                  <a:srgbClr val="202122"/>
+                </a:solidFill>
+                <a:latin typeface="Calibri"/>
+              </a:rPr>
+              <a:t>Test data comes in five kinds. Valid: normal data that should be accepted. Invalid: should be rejected. Valid extreme: at the very edge but still allowed. Invalid extreme: just outside the limit. Erroneous: the wrong type entirely.</a:t>
+            </a:r>
+          </a:p>
+          <a:p>
+            <a:pPr>
+              <a:spcAft>
+                <a:spcPts val="1320"/>
+              </a:spcAft>
+            </a:pPr>
+            <a:r>
+              <a:rPr sz="2200" b="0">
+                <a:solidFill>
+                  <a:srgbClr val="202122"/>
+                </a:solidFill>
+                <a:latin typeface="Calibri"/>
+              </a:rPr>
+              <a:t>After testing, update the plan with actual results, any changes made, and re-tests or regression tests.</a:t>
+            </a:r>
+          </a:p>
+        </p:txBody>
+      </p:sp>
+      <p:sp>
+        <p:nvSpPr>
+          <p:cNvPr id="7" name="Rounded Rectangle 6"/>
           <p:cNvSpPr/>
           <p:nvPr/>
         </p:nvSpPr>
         <p:spPr>
           <a:xfrm>
-            <a:off x="548640" y="1737360"/>
-            <a:ext cx="502920" cy="502920"/>
+            <a:off x="7772400" y="1554480"/>
+            <a:ext cx="3867912" cy="4526280"/>
+          </a:xfrm>
+          <a:prstGeom prst="roundRect">
+            <a:avLst>
+              <a:gd name="adj" fmla="val 8000"/>
+            </a:avLst>
+          </a:prstGeom>
+          <a:solidFill>
+            <a:srgbClr val="03306E"/>
+          </a:solidFill>
+          <a:ln>
+            <a:noFill/>
+          </a:ln>
+          <a:effectLst/>
+        </p:spPr>
+        <p:style>
+          <a:lnRef idx="1">
+            <a:schemeClr val="accent1"/>
+          </a:lnRef>
+          <a:fillRef idx="3">
+            <a:schemeClr val="accent1"/>
+          </a:fillRef>
+          <a:effectRef idx="2">
+            <a:schemeClr val="accent1"/>
+          </a:effectRef>
+          <a:fontRef idx="minor">
+            <a:schemeClr val="lt1"/>
+          </a:fontRef>
+        </p:style>
+        <p:txBody>
+          <a:bodyPr rtlCol="0" anchor="ctr"/>
+          <a:lstStyle/>
+          <a:p/>
+        </p:txBody>
+      </p:sp>
+      <p:sp>
+        <p:nvSpPr>
+          <p:cNvPr id="8" name="Oval 7"/>
+          <p:cNvSpPr/>
+          <p:nvPr/>
+        </p:nvSpPr>
+        <p:spPr>
+          <a:xfrm>
+            <a:off x="8046720" y="1828800"/>
+            <a:ext cx="548640" cy="548640"/>
           </a:xfrm>
           <a:prstGeom prst="ellipse">
             <a:avLst/>
@@ -8915,394 +12055,79 @@
           <a:p>
             <a:pPr algn="ctr"/>
             <a:r>
-              <a:rPr sz="1700" b="1">
+              <a:rPr sz="1300" b="1">
                 <a:solidFill>
                   <a:srgbClr val="202122"/>
                 </a:solidFill>
                 <a:latin typeface="Calibri"/>
               </a:rPr>
-              <a:t>1</a:t>
-            </a:r>
-          </a:p>
-        </p:txBody>
-      </p:sp>
-      <p:sp>
-        <p:nvSpPr>
-          <p:cNvPr id="5" name="TextBox 4"/>
-          <p:cNvSpPr txBox="1"/>
-          <p:nvPr/>
-        </p:nvSpPr>
-        <p:spPr>
-          <a:xfrm>
-            <a:off x="1325880" y="1645920"/>
-            <a:ext cx="6583680" cy="822960"/>
-          </a:xfrm>
-          <a:prstGeom prst="rect">
-            <a:avLst/>
-          </a:prstGeom>
-          <a:noFill/>
-        </p:spPr>
-        <p:txBody>
-          <a:bodyPr wrap="square" anchor="ctr" lIns="0" rIns="0" tIns="0" bIns="0"/>
+              <a:t>e.g.</a:t>
+            </a:r>
+          </a:p>
+        </p:txBody>
+      </p:sp>
+      <p:sp>
+        <p:nvSpPr>
+          <p:cNvPr id="9" name="TextBox 8"/>
+          <p:cNvSpPr txBox="1"/>
+          <p:nvPr/>
+        </p:nvSpPr>
+        <p:spPr>
+          <a:xfrm>
+            <a:off x="8046720" y="2560320"/>
+            <a:ext cx="3291840" cy="365760"/>
+          </a:xfrm>
+          <a:prstGeom prst="rect">
+            <a:avLst/>
+          </a:prstGeom>
+          <a:noFill/>
+        </p:spPr>
+        <p:txBody>
+          <a:bodyPr wrap="square" anchor="t" lIns="0" rIns="0" tIns="0" bIns="0"/>
           <a:lstStyle/>
           <a:p>
             <a:pPr algn="l"/>
             <a:r>
-              <a:rPr sz="2000" b="0" i="0">
+              <a:rPr sz="1300" b="1" i="0">
+                <a:solidFill>
+                  <a:srgbClr val="A9C8F0"/>
+                </a:solidFill>
+                <a:latin typeface="Calibri"/>
+              </a:rPr>
+              <a:t>EXAMPLE</a:t>
+            </a:r>
+          </a:p>
+        </p:txBody>
+      </p:sp>
+      <p:sp>
+        <p:nvSpPr>
+          <p:cNvPr id="10" name="TextBox 9"/>
+          <p:cNvSpPr txBox="1"/>
+          <p:nvPr/>
+        </p:nvSpPr>
+        <p:spPr>
+          <a:xfrm>
+            <a:off x="8046720" y="2971800"/>
+            <a:ext cx="3291840" cy="2971800"/>
+          </a:xfrm>
+          <a:prstGeom prst="rect">
+            <a:avLst/>
+          </a:prstGeom>
+          <a:noFill/>
+        </p:spPr>
+        <p:txBody>
+          <a:bodyPr wrap="square" anchor="t" lIns="0" rIns="0" tIns="0" bIns="0"/>
+          <a:lstStyle/>
+          <a:p>
+            <a:pPr algn="l"/>
+            <a:r>
+              <a:rPr sz="1900" b="0" i="0">
                 <a:solidFill>
                   <a:srgbClr val="FFFFFF"/>
                 </a:solidFill>
-                <a:latin typeface="Calibri"/>
-              </a:rPr>
-              <a:t>Why run beta tests with real users?</a:t>
-            </a:r>
-          </a:p>
-        </p:txBody>
-      </p:sp>
-      <p:sp>
-        <p:nvSpPr>
-          <p:cNvPr id="6" name="Oval 5"/>
-          <p:cNvSpPr/>
-          <p:nvPr/>
-        </p:nvSpPr>
-        <p:spPr>
-          <a:xfrm>
-            <a:off x="548640" y="2697480"/>
-            <a:ext cx="502920" cy="502920"/>
-          </a:xfrm>
-          <a:prstGeom prst="ellipse">
-            <a:avLst/>
-          </a:prstGeom>
-          <a:solidFill>
-            <a:srgbClr val="33C17A"/>
-          </a:solidFill>
-          <a:ln>
-            <a:noFill/>
-          </a:ln>
-          <a:effectLst/>
-        </p:spPr>
-        <p:style>
-          <a:lnRef idx="1">
-            <a:schemeClr val="accent1"/>
-          </a:lnRef>
-          <a:fillRef idx="3">
-            <a:schemeClr val="accent1"/>
-          </a:fillRef>
-          <a:effectRef idx="2">
-            <a:schemeClr val="accent1"/>
-          </a:effectRef>
-          <a:fontRef idx="minor">
-            <a:schemeClr val="lt1"/>
-          </a:fontRef>
-        </p:style>
-        <p:txBody>
-          <a:bodyPr rtlCol="0" anchor="ctr" lIns="0" rIns="0" tIns="0" bIns="0"/>
-          <a:lstStyle/>
-          <a:p>
-            <a:pPr algn="ctr"/>
-            <a:r>
-              <a:rPr sz="1700" b="1">
-                <a:solidFill>
-                  <a:srgbClr val="202122"/>
-                </a:solidFill>
-                <a:latin typeface="Calibri"/>
-              </a:rPr>
-              <a:t>2</a:t>
-            </a:r>
-          </a:p>
-        </p:txBody>
-      </p:sp>
-      <p:sp>
-        <p:nvSpPr>
-          <p:cNvPr id="7" name="TextBox 6"/>
-          <p:cNvSpPr txBox="1"/>
-          <p:nvPr/>
-        </p:nvSpPr>
-        <p:spPr>
-          <a:xfrm>
-            <a:off x="1325880" y="2606040"/>
-            <a:ext cx="6583680" cy="822960"/>
-          </a:xfrm>
-          <a:prstGeom prst="rect">
-            <a:avLst/>
-          </a:prstGeom>
-          <a:noFill/>
-        </p:spPr>
-        <p:txBody>
-          <a:bodyPr wrap="square" anchor="ctr" lIns="0" rIns="0" tIns="0" bIns="0"/>
-          <a:lstStyle/>
-          <a:p>
-            <a:pPr algn="l"/>
-            <a:r>
-              <a:rPr sz="2000" b="0" i="0">
-                <a:solidFill>
-                  <a:srgbClr val="FFFFFF"/>
-                </a:solidFill>
-                <a:latin typeface="Calibri"/>
-              </a:rPr>
-              <a:t>What is open box testing?</a:t>
-            </a:r>
-          </a:p>
-        </p:txBody>
-      </p:sp>
-      <p:sp>
-        <p:nvSpPr>
-          <p:cNvPr id="8" name="Oval 7"/>
-          <p:cNvSpPr/>
-          <p:nvPr/>
-        </p:nvSpPr>
-        <p:spPr>
-          <a:xfrm>
-            <a:off x="548640" y="3657600"/>
-            <a:ext cx="502920" cy="502920"/>
-          </a:xfrm>
-          <a:prstGeom prst="ellipse">
-            <a:avLst/>
-          </a:prstGeom>
-          <a:solidFill>
-            <a:srgbClr val="33C17A"/>
-          </a:solidFill>
-          <a:ln>
-            <a:noFill/>
-          </a:ln>
-          <a:effectLst/>
-        </p:spPr>
-        <p:style>
-          <a:lnRef idx="1">
-            <a:schemeClr val="accent1"/>
-          </a:lnRef>
-          <a:fillRef idx="3">
-            <a:schemeClr val="accent1"/>
-          </a:fillRef>
-          <a:effectRef idx="2">
-            <a:schemeClr val="accent1"/>
-          </a:effectRef>
-          <a:fontRef idx="minor">
-            <a:schemeClr val="lt1"/>
-          </a:fontRef>
-        </p:style>
-        <p:txBody>
-          <a:bodyPr rtlCol="0" anchor="ctr" lIns="0" rIns="0" tIns="0" bIns="0"/>
-          <a:lstStyle/>
-          <a:p>
-            <a:pPr algn="ctr"/>
-            <a:r>
-              <a:rPr sz="1700" b="1">
-                <a:solidFill>
-                  <a:srgbClr val="202122"/>
-                </a:solidFill>
-                <a:latin typeface="Calibri"/>
-              </a:rPr>
-              <a:t>3</a:t>
-            </a:r>
-          </a:p>
-        </p:txBody>
-      </p:sp>
-      <p:sp>
-        <p:nvSpPr>
-          <p:cNvPr id="9" name="TextBox 8"/>
-          <p:cNvSpPr txBox="1"/>
-          <p:nvPr/>
-        </p:nvSpPr>
-        <p:spPr>
-          <a:xfrm>
-            <a:off x="1325880" y="3566160"/>
-            <a:ext cx="6583680" cy="822960"/>
-          </a:xfrm>
-          <a:prstGeom prst="rect">
-            <a:avLst/>
-          </a:prstGeom>
-          <a:noFill/>
-        </p:spPr>
-        <p:txBody>
-          <a:bodyPr wrap="square" anchor="ctr" lIns="0" rIns="0" tIns="0" bIns="0"/>
-          <a:lstStyle/>
-          <a:p>
-            <a:pPr algn="l"/>
-            <a:r>
-              <a:rPr sz="2000" b="0" i="0">
-                <a:solidFill>
-                  <a:srgbClr val="FFFFFF"/>
-                </a:solidFill>
-                <a:latin typeface="Calibri"/>
-              </a:rPr>
-              <a:t>When should regression tests run?</a:t>
-            </a:r>
-          </a:p>
-        </p:txBody>
-      </p:sp>
-      <p:sp>
-        <p:nvSpPr>
-          <p:cNvPr id="10" name="Rounded Rectangle 9"/>
-          <p:cNvSpPr/>
-          <p:nvPr/>
-        </p:nvSpPr>
-        <p:spPr>
-          <a:xfrm>
-            <a:off x="8229600" y="1645920"/>
-            <a:ext cx="3410712" cy="2926080"/>
-          </a:xfrm>
-          <a:prstGeom prst="roundRect">
-            <a:avLst>
-              <a:gd name="adj" fmla="val 8000"/>
-            </a:avLst>
-          </a:prstGeom>
-          <a:solidFill>
-            <a:srgbClr val="0645AD"/>
-          </a:solidFill>
-          <a:ln>
-            <a:noFill/>
-          </a:ln>
-          <a:effectLst/>
-        </p:spPr>
-        <p:style>
-          <a:lnRef idx="1">
-            <a:schemeClr val="accent1"/>
-          </a:lnRef>
-          <a:fillRef idx="3">
-            <a:schemeClr val="accent1"/>
-          </a:fillRef>
-          <a:effectRef idx="2">
-            <a:schemeClr val="accent1"/>
-          </a:effectRef>
-          <a:fontRef idx="minor">
-            <a:schemeClr val="lt1"/>
-          </a:fontRef>
-        </p:style>
-        <p:txBody>
-          <a:bodyPr rtlCol="0" anchor="ctr"/>
-          <a:lstStyle/>
-          <a:p/>
-        </p:txBody>
-      </p:sp>
-      <p:sp>
-        <p:nvSpPr>
-          <p:cNvPr id="11" name="TextBox 10"/>
-          <p:cNvSpPr txBox="1"/>
-          <p:nvPr/>
-        </p:nvSpPr>
-        <p:spPr>
-          <a:xfrm>
-            <a:off x="8503920" y="1874519"/>
-            <a:ext cx="2926080" cy="365760"/>
-          </a:xfrm>
-          <a:prstGeom prst="rect">
-            <a:avLst/>
-          </a:prstGeom>
-          <a:noFill/>
-        </p:spPr>
-        <p:txBody>
-          <a:bodyPr wrap="square" anchor="t" lIns="0" rIns="0" tIns="0" bIns="0"/>
-          <a:lstStyle/>
-          <a:p>
-            <a:pPr algn="l"/>
-            <a:r>
-              <a:rPr sz="1300" b="1" i="0">
-                <a:solidFill>
-                  <a:srgbClr val="A9C8F0"/>
-                </a:solidFill>
-                <a:latin typeface="Calibri"/>
-              </a:rPr>
-              <a:t>REVISE THIS TOPIC</a:t>
-            </a:r>
-          </a:p>
-        </p:txBody>
-      </p:sp>
-      <p:sp>
-        <p:nvSpPr>
-          <p:cNvPr id="12" name="TextBox 11"/>
-          <p:cNvSpPr txBox="1"/>
-          <p:nvPr/>
-        </p:nvSpPr>
-        <p:spPr>
-          <a:xfrm>
-            <a:off x="8503920" y="2286000"/>
-            <a:ext cx="2926080" cy="548640"/>
-          </a:xfrm>
-          <a:prstGeom prst="rect">
-            <a:avLst/>
-          </a:prstGeom>
-          <a:noFill/>
-        </p:spPr>
-        <p:txBody>
-          <a:bodyPr wrap="square" anchor="t" lIns="0" rIns="0" tIns="0" bIns="0"/>
-          <a:lstStyle/>
-          <a:p>
-            <a:pPr algn="l"/>
-            <a:r>
-              <a:rPr sz="1400" b="0" i="0">
-                <a:solidFill>
-                  <a:srgbClr val="FFFFFF"/>
-                </a:solidFill>
-                <a:latin typeface="Calibri"/>
-              </a:rPr>
-              <a:t>Revision notes for this lesson are on the study wiki:</a:t>
-            </a:r>
-          </a:p>
-        </p:txBody>
-      </p:sp>
-      <p:sp>
-        <p:nvSpPr>
-          <p:cNvPr id="13" name="TextBox 12"/>
-          <p:cNvSpPr txBox="1"/>
-          <p:nvPr/>
-        </p:nvSpPr>
-        <p:spPr>
-          <a:xfrm>
-            <a:off x="8503920" y="2926080"/>
-            <a:ext cx="2926080" cy="1463040"/>
-          </a:xfrm>
-          <a:prstGeom prst="rect">
-            <a:avLst/>
-          </a:prstGeom>
-          <a:noFill/>
-        </p:spPr>
-        <p:txBody>
-          <a:bodyPr wrap="square" anchor="t" lIns="0" rIns="0" tIns="0" bIns="0"/>
-          <a:lstStyle/>
-          <a:p>
-            <a:pPr algn="l"/>
-            <a:r>
-              <a:rPr sz="2000" b="1" i="0">
-                <a:solidFill>
-                  <a:srgbClr val="FFFFFF"/>
-                </a:solidFill>
                 <a:latin typeface="Cambria"/>
               </a:rPr>
-              <a:t>Testing a Software Solution</a:t>
-            </a:r>
-          </a:p>
-        </p:txBody>
-      </p:sp>
-      <p:sp>
-        <p:nvSpPr>
-          <p:cNvPr id="14" name="TextBox 13"/>
-          <p:cNvSpPr txBox="1"/>
-          <p:nvPr/>
-        </p:nvSpPr>
-        <p:spPr>
-          <a:xfrm>
-            <a:off x="548640" y="5669280"/>
-            <a:ext cx="11094415" cy="548640"/>
-          </a:xfrm>
-          <a:prstGeom prst="rect">
-            <a:avLst/>
-          </a:prstGeom>
-          <a:noFill/>
-        </p:spPr>
-        <p:txBody>
-          <a:bodyPr wrap="square" anchor="t" lIns="0" rIns="0" tIns="0" bIns="0"/>
-          <a:lstStyle/>
-          <a:p>
-            <a:pPr algn="l"/>
-            <a:r>
-              <a:rPr sz="1200" b="0" i="0">
-                <a:solidFill>
-                  <a:srgbClr val="A9C8F0"/>
-                </a:solidFill>
-                <a:latin typeface="Calibri"/>
-              </a:rPr>
-              <a:t>https://lana6478.github.io/T-level-Digital-Software-Development/#/02-occupational-specialism/07-testing.md</a:t>
+              <a:t>For ages 11 to 18: valid 15, valid extreme 11 and 18, invalid extreme 10 and 19, invalid 30, erroneous 'fifteen'.</a:t>
             </a:r>
           </a:p>
         </p:txBody>
